--- a/Career_Intelligence_Engine_Deck.pptx
+++ b/Career_Intelligence_Engine_Deck.pptx
@@ -4,9 +4,6 @@
   <p:sldMasterIdLst>
     <p:sldMasterId id="2147483648" r:id="rId1"/>
   </p:sldMasterIdLst>
-  <p:notesMasterIdLst>
-    <p:notesMasterId r:id="rId11"/>
-  </p:notesMasterIdLst>
   <p:sldIdLst>
     <p:sldId id="256" r:id="rId2"/>
     <p:sldId id="257" r:id="rId3"/>
@@ -18,7 +15,10 @@
     <p:sldId id="263" r:id="rId9"/>
     <p:sldId id="264" r:id="rId10"/>
   </p:sldIdLst>
-  <p:sldSz cx="9144000" cy="5143500" type="screen16x9"/>
+  <p:notesMasterIdLst>
+    <p:notesMasterId r:id="rId11"/>
+  </p:notesMasterIdLst>
+  <p:sldSz cx="9144000" cy="5143500"/>
   <p:notesSz cx="5143500" cy="9144000"/>
   <p:defaultTextStyle>
     <a:lvl1pPr marL="0" algn="l" defTabSz="914400" rtl="0" eaLnBrk="1" latinLnBrk="0" hangingPunct="1">
@@ -112,41 +112,7 @@
       </a:defRPr>
     </a:lvl9pPr>
   </p:defaultTextStyle>
-  <p:extLst>
-    <p:ext uri="{EFAFB233-063F-42B5-8137-9DF3F51BA10A}">
-      <p15:sldGuideLst xmlns:p15="http://schemas.microsoft.com/office/powerpoint/2012/main"/>
-    </p:ext>
-  </p:extLst>
 </p:presentation>
-</file>
-
-<file path=ppt/changesInfos/changesInfo1.xml><?xml version="1.0" encoding="utf-8"?>
-<pc:chgInfo xmlns:a="http://schemas.openxmlformats.org/drawingml/2006/main" xmlns:r="http://schemas.openxmlformats.org/officeDocument/2006/relationships" xmlns:ac="http://schemas.microsoft.com/office/drawing/2013/main/command" xmlns:pc="http://schemas.microsoft.com/office/powerpoint/2013/main/command">
-  <pc:docChgLst>
-    <pc:chgData name="Mayukh Ghosh" userId="e5ed4935-a7ce-480a-984f-d2917d127464" providerId="ADAL" clId="{B4B003DF-4950-42C8-BA2B-4A298416261F}"/>
-    <pc:docChg chg="modSld">
-      <pc:chgData name="Mayukh Ghosh" userId="e5ed4935-a7ce-480a-984f-d2917d127464" providerId="ADAL" clId="{B4B003DF-4950-42C8-BA2B-4A298416261F}" dt="2026-05-20T10:54:15.415" v="15" actId="20577"/>
-      <pc:docMkLst>
-        <pc:docMk/>
-      </pc:docMkLst>
-      <pc:sldChg chg="modSp mod">
-        <pc:chgData name="Mayukh Ghosh" userId="e5ed4935-a7ce-480a-984f-d2917d127464" providerId="ADAL" clId="{B4B003DF-4950-42C8-BA2B-4A298416261F}" dt="2026-05-20T10:54:15.415" v="15" actId="20577"/>
-        <pc:sldMkLst>
-          <pc:docMk/>
-          <pc:sldMk cId="0" sldId="256"/>
-        </pc:sldMkLst>
-        <pc:spChg chg="mod">
-          <ac:chgData name="Mayukh Ghosh" userId="e5ed4935-a7ce-480a-984f-d2917d127464" providerId="ADAL" clId="{B4B003DF-4950-42C8-BA2B-4A298416261F}" dt="2026-05-20T10:54:15.415" v="15" actId="20577"/>
-          <ac:spMkLst>
-            <pc:docMk/>
-            <pc:sldMk cId="0" sldId="256"/>
-            <ac:spMk id="7" creationId="{00000000-0000-0000-0000-000000000000}"/>
-          </ac:spMkLst>
-        </pc:spChg>
-      </pc:sldChg>
-    </pc:docChg>
-  </pc:docChgLst>
-</pc:chgInfo>
 </file>
 
 <file path=ppt/notesMasters/notesMaster1.xml><?xml version="1.0" encoding="utf-8"?>
@@ -171,10 +137,234 @@
           <a:chExt cx="0" cy="0"/>
         </a:xfrm>
       </p:grpSpPr>
+      <p:sp>
+        <p:nvSpPr>
+          <p:cNvPr id="2" name="Header Placeholder 1"/>
+          <p:cNvSpPr>
+            <a:spLocks noGrp="1"/>
+          </p:cNvSpPr>
+          <p:nvPr>
+            <p:ph type="hdr" sz="quarter"/>
+          </p:nvPr>
+        </p:nvSpPr>
+        <p:spPr>
+          <a:xfrm>
+            <a:off x="0" y="0"/>
+            <a:ext cx="2971800" cy="458788"/>
+          </a:xfrm>
+          <a:prstGeom prst="rect">
+            <a:avLst/>
+          </a:prstGeom>
+        </p:spPr>
+        <p:txBody>
+          <a:bodyPr vert="horz" lIns="91440" tIns="45720" rIns="91440" bIns="45720" rtlCol="0"/>
+          <a:lstStyle>
+            <a:lvl1pPr algn="l">
+              <a:defRPr sz="1200"/>
+            </a:lvl1pPr>
+          </a:lstStyle>
+          <a:p>
+            <a:endParaRPr lang="en-US"/>
+          </a:p>
+        </p:txBody>
+      </p:sp>
+      <p:sp>
+        <p:nvSpPr>
+          <p:cNvPr id="3" name="Date Placeholder 2"/>
+          <p:cNvSpPr>
+            <a:spLocks noGrp="1"/>
+          </p:cNvSpPr>
+          <p:nvPr>
+            <p:ph type="dt" idx="1"/>
+          </p:nvPr>
+        </p:nvSpPr>
+        <p:spPr>
+          <a:xfrm>
+            <a:off x="3884613" y="0"/>
+            <a:ext cx="2971800" cy="458788"/>
+          </a:xfrm>
+          <a:prstGeom prst="rect">
+            <a:avLst/>
+          </a:prstGeom>
+        </p:spPr>
+        <p:txBody>
+          <a:bodyPr vert="horz" lIns="91440" tIns="45720" rIns="91440" bIns="45720" rtlCol="0"/>
+          <a:lstStyle>
+            <a:lvl1pPr algn="r">
+              <a:defRPr sz="1200"/>
+            </a:lvl1pPr>
+          </a:lstStyle>
+          <a:p>
+            <a:fld id="{5282F153-3F37-0F45-9E97-73ACFA13230C}" type="datetimeFigureOut">
+              <a:rPr lang="en-US"/>
+              <a:t>7/23/19</a:t>
+            </a:fld>
+            <a:endParaRPr lang="en-US"/>
+          </a:p>
+        </p:txBody>
+      </p:sp>
+      <p:sp>
+        <p:nvSpPr>
+          <p:cNvPr id="4" name="Slide Image Placeholder 3"/>
+          <p:cNvSpPr>
+            <a:spLocks noGrp="1" noRot="1" noChangeAspect="1"/>
+          </p:cNvSpPr>
+          <p:nvPr>
+            <p:ph type="sldImg" idx="2"/>
+          </p:nvPr>
+        </p:nvSpPr>
+        <p:spPr>
+          <a:xfrm>
+            <a:off x="685800" y="1143000"/>
+            <a:ext cx="5486400" cy="3086100"/>
+          </a:xfrm>
+          <a:prstGeom prst="rect">
+            <a:avLst/>
+          </a:prstGeom>
+          <a:noFill/>
+          <a:ln w="12700">
+            <a:solidFill>
+              <a:prstClr val="black"/>
+            </a:solidFill>
+          </a:ln>
+        </p:spPr>
+        <p:txBody>
+          <a:bodyPr vert="horz" lIns="91440" tIns="45720" rIns="91440" bIns="45720" rtlCol="0" anchor="ctr"/>
+          <a:lstStyle/>
+          <a:p>
+            <a:endParaRPr lang="en-US"/>
+          </a:p>
+        </p:txBody>
+      </p:sp>
+      <p:sp>
+        <p:nvSpPr>
+          <p:cNvPr id="5" name="Notes Placeholder 4"/>
+          <p:cNvSpPr>
+            <a:spLocks noGrp="1"/>
+          </p:cNvSpPr>
+          <p:nvPr>
+            <p:ph type="body" sz="quarter" idx="3"/>
+          </p:nvPr>
+        </p:nvSpPr>
+        <p:spPr>
+          <a:xfrm>
+            <a:off x="685800" y="4400550"/>
+            <a:ext cx="5486400" cy="3600450"/>
+          </a:xfrm>
+          <a:prstGeom prst="rect">
+            <a:avLst/>
+          </a:prstGeom>
+        </p:spPr>
+        <p:txBody>
+          <a:bodyPr vert="horz" lIns="91440" tIns="45720" rIns="91440" bIns="45720" rtlCol="0"/>
+          <a:lstStyle/>
+          <a:p>
+            <a:pPr lvl="0"/>
+            <a:r>
+              <a:rPr lang="en-US"/>
+              <a:t>Click to edit Master text styles</a:t>
+            </a:r>
+          </a:p>
+          <a:p>
+            <a:pPr lvl="1"/>
+            <a:r>
+              <a:rPr lang="en-US"/>
+              <a:t>Second level</a:t>
+            </a:r>
+          </a:p>
+          <a:p>
+            <a:pPr lvl="2"/>
+            <a:r>
+              <a:rPr lang="en-US"/>
+              <a:t>Third level</a:t>
+            </a:r>
+          </a:p>
+          <a:p>
+            <a:pPr lvl="3"/>
+            <a:r>
+              <a:rPr lang="en-US"/>
+              <a:t>Fourth level</a:t>
+            </a:r>
+          </a:p>
+          <a:p>
+            <a:pPr lvl="4"/>
+            <a:r>
+              <a:rPr lang="en-US"/>
+              <a:t>Fifth level</a:t>
+            </a:r>
+          </a:p>
+        </p:txBody>
+      </p:sp>
+      <p:sp>
+        <p:nvSpPr>
+          <p:cNvPr id="6" name="Footer Placeholder 5"/>
+          <p:cNvSpPr>
+            <a:spLocks noGrp="1"/>
+          </p:cNvSpPr>
+          <p:nvPr>
+            <p:ph type="ftr" sz="quarter" idx="4"/>
+          </p:nvPr>
+        </p:nvSpPr>
+        <p:spPr>
+          <a:xfrm>
+            <a:off x="0" y="8685213"/>
+            <a:ext cx="2971800" cy="458787"/>
+          </a:xfrm>
+          <a:prstGeom prst="rect">
+            <a:avLst/>
+          </a:prstGeom>
+        </p:spPr>
+        <p:txBody>
+          <a:bodyPr vert="horz" lIns="91440" tIns="45720" rIns="91440" bIns="45720" rtlCol="0" anchor="b"/>
+          <a:lstStyle>
+            <a:lvl1pPr algn="l">
+              <a:defRPr sz="1200"/>
+            </a:lvl1pPr>
+          </a:lstStyle>
+          <a:p>
+            <a:endParaRPr lang="en-US"/>
+          </a:p>
+        </p:txBody>
+      </p:sp>
+      <p:sp>
+        <p:nvSpPr>
+          <p:cNvPr id="7" name="Slide Number Placeholder 6"/>
+          <p:cNvSpPr>
+            <a:spLocks noGrp="1"/>
+          </p:cNvSpPr>
+          <p:nvPr>
+            <p:ph type="sldNum" sz="quarter" idx="5"/>
+          </p:nvPr>
+        </p:nvSpPr>
+        <p:spPr>
+          <a:xfrm>
+            <a:off x="3884613" y="8685213"/>
+            <a:ext cx="2971800" cy="458787"/>
+          </a:xfrm>
+          <a:prstGeom prst="rect">
+            <a:avLst/>
+          </a:prstGeom>
+        </p:spPr>
+        <p:txBody>
+          <a:bodyPr vert="horz" lIns="91440" tIns="45720" rIns="91440" bIns="45720" rtlCol="0" anchor="b"/>
+          <a:lstStyle>
+            <a:lvl1pPr algn="r">
+              <a:defRPr sz="1200"/>
+            </a:lvl1pPr>
+          </a:lstStyle>
+          <a:p>
+            <a:fld id="{CE5E9CC1-C706-0F49-92D6-E571CC5EEA8F}" type="slidenum">
+              <a:rPr lang="en-US"/>
+              <a:t>‹#›</a:t>
+            </a:fld>
+            <a:endParaRPr lang="en-US"/>
+          </a:p>
+        </p:txBody>
+      </p:sp>
     </p:spTree>
     <p:extLst>
       <p:ext uri="{BB962C8B-B14F-4D97-AF65-F5344CB8AC3E}">
-        <p14:creationId xmlns:p14="http://schemas.microsoft.com/office/powerpoint/2010/main" val="3469380797"/>
+        <p14:creationId xmlns:p14="http://schemas.microsoft.com/office/powerpoint/2010/main" val="1024086991"/>
       </p:ext>
     </p:extLst>
   </p:cSld>
@@ -318,6 +508,10 @@
           <a:bodyPr/>
           <a:lstStyle/>
           <a:p>
+            <a:r>
+              <a:rPr lang="en-US" dirty="0"/>
+              <a:t/>
+            </a:r>
             <a:endParaRPr lang="en-US" dirty="0"/>
           </a:p>
         </p:txBody>
@@ -402,6 +596,10 @@
           <a:bodyPr/>
           <a:lstStyle/>
           <a:p>
+            <a:r>
+              <a:rPr lang="en-US" dirty="0"/>
+              <a:t/>
+            </a:r>
             <a:endParaRPr lang="en-US" dirty="0"/>
           </a:p>
         </p:txBody>
@@ -486,6 +684,10 @@
           <a:bodyPr/>
           <a:lstStyle/>
           <a:p>
+            <a:r>
+              <a:rPr lang="en-US" dirty="0"/>
+              <a:t/>
+            </a:r>
             <a:endParaRPr lang="en-US" dirty="0"/>
           </a:p>
         </p:txBody>
@@ -570,6 +772,10 @@
           <a:bodyPr/>
           <a:lstStyle/>
           <a:p>
+            <a:r>
+              <a:rPr lang="en-US" dirty="0"/>
+              <a:t/>
+            </a:r>
             <a:endParaRPr lang="en-US" dirty="0"/>
           </a:p>
         </p:txBody>
@@ -654,6 +860,10 @@
           <a:bodyPr/>
           <a:lstStyle/>
           <a:p>
+            <a:r>
+              <a:rPr lang="en-US" dirty="0"/>
+              <a:t/>
+            </a:r>
             <a:endParaRPr lang="en-US" dirty="0"/>
           </a:p>
         </p:txBody>
@@ -738,6 +948,10 @@
           <a:bodyPr/>
           <a:lstStyle/>
           <a:p>
+            <a:r>
+              <a:rPr lang="en-US" dirty="0"/>
+              <a:t/>
+            </a:r>
             <a:endParaRPr lang="en-US" dirty="0"/>
           </a:p>
         </p:txBody>
@@ -822,6 +1036,10 @@
           <a:bodyPr/>
           <a:lstStyle/>
           <a:p>
+            <a:r>
+              <a:rPr lang="en-US" dirty="0"/>
+              <a:t/>
+            </a:r>
             <a:endParaRPr lang="en-US" dirty="0"/>
           </a:p>
         </p:txBody>
@@ -906,6 +1124,10 @@
           <a:bodyPr/>
           <a:lstStyle/>
           <a:p>
+            <a:r>
+              <a:rPr lang="en-US" dirty="0"/>
+              <a:t/>
+            </a:r>
             <a:endParaRPr lang="en-US" dirty="0"/>
           </a:p>
         </p:txBody>
@@ -990,6 +1212,10 @@
           <a:bodyPr/>
           <a:lstStyle/>
           <a:p>
+            <a:r>
+              <a:rPr lang="en-US" dirty="0"/>
+              <a:t/>
+            </a:r>
             <a:endParaRPr lang="en-US" dirty="0"/>
           </a:p>
         </p:txBody>
@@ -1063,11 +1289,6 @@
 <file path=ppt/slideMasters/slideMaster1.xml><?xml version="1.0" encoding="utf-8"?>
 <p:sldMaster xmlns:a="http://schemas.openxmlformats.org/drawingml/2006/main" xmlns:r="http://schemas.openxmlformats.org/officeDocument/2006/relationships" xmlns:p="http://schemas.openxmlformats.org/presentationml/2006/main">
   <p:cSld>
-    <p:bg>
-      <p:bgRef idx="1001">
-        <a:schemeClr val="bg1"/>
-      </p:bgRef>
-    </p:bg>
     <p:spTree>
       <p:nvGrpSpPr>
         <p:cNvPr id="1" name=""/>
@@ -1350,7 +1571,6 @@
         <a:solidFill>
           <a:srgbClr val="0D1117"/>
         </a:solidFill>
-        <a:effectLst/>
       </p:bgPr>
     </p:bg>
     <p:spTree>
@@ -1386,13 +1606,6 @@
           </a:solidFill>
           <a:ln/>
         </p:spPr>
-        <p:txBody>
-          <a:bodyPr/>
-          <a:lstStyle/>
-          <a:p>
-            <a:endParaRPr lang="en-US"/>
-          </a:p>
-        </p:txBody>
       </p:sp>
       <p:sp>
         <p:nvSpPr>
@@ -1415,24 +1628,17 @@
           </a:solidFill>
           <a:ln/>
         </p:spPr>
-        <p:txBody>
-          <a:bodyPr/>
-          <a:lstStyle/>
-          <a:p>
-            <a:endParaRPr lang="en-US"/>
-          </a:p>
-        </p:txBody>
       </p:sp>
       <p:pic>
         <p:nvPicPr>
-          <p:cNvPr id="4" name="Image 0" descr="preencoded.png"/>
+          <p:cNvPr id="4" name="Image 0" descr="preencoded.png">    </p:cNvPr>
           <p:cNvPicPr>
             <a:picLocks noChangeAspect="1"/>
           </p:cNvPicPr>
           <p:nvPr/>
         </p:nvPicPr>
         <p:blipFill>
-          <a:blip r:embed="rId3"/>
+          <a:blip r:embed="rId1"/>
           <a:stretch>
             <a:fillRect/>
           </a:stretch>
@@ -1468,7 +1674,7 @@
           <a:bodyPr wrap="square" lIns="0" tIns="0" rIns="0" bIns="0" rtlCol="0" anchor="ctr"/>
           <a:lstStyle/>
           <a:p>
-            <a:pPr marL="0" indent="0">
+            <a:pPr indent="0" marL="0">
               <a:lnSpc>
                 <a:spcPct val="110000"/>
               </a:lnSpc>
@@ -1488,7 +1694,7 @@
             <a:endParaRPr lang="en-US" sz="3800" dirty="0"/>
           </a:p>
           <a:p>
-            <a:pPr marL="0" indent="0">
+            <a:pPr indent="0" marL="0">
               <a:lnSpc>
                 <a:spcPct val="110000"/>
               </a:lnSpc>
@@ -1530,7 +1736,7 @@
           <a:bodyPr wrap="square" lIns="0" tIns="0" rIns="0" bIns="0" rtlCol="0" anchor="ctr"/>
           <a:lstStyle/>
           <a:p>
-            <a:pPr marL="0" indent="0">
+            <a:pPr indent="0" marL="0">
               <a:lnSpc>
                 <a:spcPct val="130000"/>
               </a:lnSpc>
@@ -1550,7 +1756,7 @@
             <a:endParaRPr lang="en-US" sz="1600" dirty="0"/>
           </a:p>
           <a:p>
-            <a:pPr marL="0" indent="0">
+            <a:pPr indent="0" marL="0">
               <a:lnSpc>
                 <a:spcPct val="130000"/>
               </a:lnSpc>
@@ -1592,11 +1798,11 @@
           <a:bodyPr wrap="square" lIns="0" tIns="0" rIns="0" bIns="0" rtlCol="0" anchor="ctr"/>
           <a:lstStyle/>
           <a:p>
-            <a:pPr marL="0" indent="0">
-              <a:buNone/>
-            </a:pPr>
-            <a:r>
-              <a:rPr lang="en-US" sz="1300">
+            <a:pPr indent="0" marL="0">
+              <a:buNone/>
+            </a:pPr>
+            <a:r>
+              <a:rPr lang="en-US" sz="1300" dirty="0">
                 <a:solidFill>
                   <a:srgbClr val="00D4AA"/>
                 </a:solidFill>
@@ -1604,18 +1810,7 @@
                 <a:ea typeface="Calibri" pitchFamily="34" charset="-122"/>
                 <a:cs typeface="Calibri" pitchFamily="34" charset="-120"/>
               </a:rPr>
-              <a:t>Mayukh  Ghosh |  </a:t>
-            </a:r>
-            <a:r>
-              <a:rPr lang="en-US" sz="1300" dirty="0">
-                <a:solidFill>
-                  <a:srgbClr val="00D4AA"/>
-                </a:solidFill>
-                <a:latin typeface="Calibri" pitchFamily="34" charset="0"/>
-                <a:ea typeface="Calibri" pitchFamily="34" charset="-122"/>
-                <a:cs typeface="Calibri" pitchFamily="34" charset="-120"/>
-              </a:rPr>
-              <a:t>Agentic AI Product Manager</a:t>
+              <a:t>Mayukh  |  Agentic AI Product Manager</a:t>
             </a:r>
             <a:endParaRPr lang="en-US" sz="1300" dirty="0"/>
           </a:p>
@@ -1637,7 +1832,6 @@
         <a:solidFill>
           <a:srgbClr val="0D1117"/>
         </a:solidFill>
-        <a:effectLst/>
       </p:bgPr>
     </p:bg>
     <p:spTree>
@@ -1673,13 +1867,6 @@
           </a:solidFill>
           <a:ln/>
         </p:spPr>
-        <p:txBody>
-          <a:bodyPr/>
-          <a:lstStyle/>
-          <a:p>
-            <a:endParaRPr lang="en-US"/>
-          </a:p>
-        </p:txBody>
       </p:sp>
       <p:sp>
         <p:nvSpPr>
@@ -1702,7 +1889,7 @@
           <a:bodyPr wrap="square" lIns="0" tIns="0" rIns="0" bIns="0" rtlCol="0" anchor="ctr"/>
           <a:lstStyle/>
           <a:p>
-            <a:pPr marL="0" indent="0">
+            <a:pPr indent="0" marL="0">
               <a:buNone/>
             </a:pPr>
             <a:r>
@@ -1741,7 +1928,7 @@
           <a:bodyPr wrap="square" lIns="0" tIns="0" rIns="0" bIns="0" rtlCol="0" anchor="ctr"/>
           <a:lstStyle/>
           <a:p>
-            <a:pPr marL="0" indent="0">
+            <a:pPr indent="0" marL="0">
               <a:buNone/>
             </a:pPr>
             <a:r>
@@ -1778,24 +1965,275 @@
           </a:solidFill>
           <a:ln/>
           <a:effectLst>
-            <a:outerShdw blurRad="101600" dist="38100" dir="8100000" algn="bl" rotWithShape="0">
+            <a:outerShdw sx="100000" sy="100000" kx="0" ky="0" algn="bl" rotWithShape="0" blurRad="101600" dist="38100" dir="8100000">
               <a:srgbClr val="000000">
                 <a:alpha val="35000"/>
               </a:srgbClr>
             </a:outerShdw>
           </a:effectLst>
         </p:spPr>
-        <p:txBody>
-          <a:bodyPr/>
-          <a:lstStyle/>
-          <a:p>
-            <a:endParaRPr lang="en-US"/>
-          </a:p>
-        </p:txBody>
       </p:sp>
       <p:pic>
         <p:nvPicPr>
-          <p:cNvPr id="6" name="Image 0" descr="preencoded.png"/>
+          <p:cNvPr id="6" name="Image 0" descr="preencoded.png">    </p:cNvPr>
+          <p:cNvPicPr>
+            <a:picLocks noChangeAspect="1"/>
+          </p:cNvPicPr>
+          <p:nvPr/>
+        </p:nvPicPr>
+        <p:blipFill>
+          <a:blip r:embed="rId1"/>
+          <a:stretch>
+            <a:fillRect/>
+          </a:stretch>
+        </p:blipFill>
+        <p:spPr>
+          <a:xfrm>
+            <a:off x="822960" y="1755648"/>
+            <a:ext cx="457200" cy="457200"/>
+          </a:xfrm>
+          <a:prstGeom prst="rect">
+            <a:avLst/>
+          </a:prstGeom>
+        </p:spPr>
+      </p:pic>
+      <p:sp>
+        <p:nvSpPr>
+          <p:cNvPr id="7" name="Text 4"/>
+          <p:cNvSpPr/>
+          <p:nvPr/>
+        </p:nvSpPr>
+        <p:spPr>
+          <a:xfrm>
+            <a:off x="1463040" y="1627632"/>
+            <a:ext cx="6858000" cy="320040"/>
+          </a:xfrm>
+          <a:prstGeom prst="rect">
+            <a:avLst/>
+          </a:prstGeom>
+          <a:noFill/>
+          <a:ln/>
+        </p:spPr>
+        <p:txBody>
+          <a:bodyPr wrap="square" lIns="0" tIns="0" rIns="0" bIns="0" rtlCol="0" anchor="ctr"/>
+          <a:lstStyle/>
+          <a:p>
+            <a:pPr indent="0" marL="0">
+              <a:buNone/>
+            </a:pPr>
+            <a:r>
+              <a:rPr lang="en-US" sz="1500" b="1" dirty="0">
+                <a:solidFill>
+                  <a:srgbClr val="00D4AA"/>
+                </a:solidFill>
+                <a:latin typeface="Calibri" pitchFamily="34" charset="0"/>
+                <a:ea typeface="Calibri" pitchFamily="34" charset="-122"/>
+                <a:cs typeface="Calibri" pitchFamily="34" charset="-120"/>
+              </a:rPr>
+              <a:t>Market Friction</a:t>
+            </a:r>
+            <a:endParaRPr lang="en-US" sz="1500" dirty="0"/>
+          </a:p>
+        </p:txBody>
+      </p:sp>
+      <p:sp>
+        <p:nvSpPr>
+          <p:cNvPr id="8" name="Text 5"/>
+          <p:cNvSpPr/>
+          <p:nvPr/>
+        </p:nvSpPr>
+        <p:spPr>
+          <a:xfrm>
+            <a:off x="1463040" y="1965960"/>
+            <a:ext cx="6858000" cy="411480"/>
+          </a:xfrm>
+          <a:prstGeom prst="rect">
+            <a:avLst/>
+          </a:prstGeom>
+          <a:noFill/>
+          <a:ln/>
+        </p:spPr>
+        <p:txBody>
+          <a:bodyPr wrap="square" lIns="0" tIns="0" rIns="0" bIns="0" rtlCol="0" anchor="ctr"/>
+          <a:lstStyle/>
+          <a:p>
+            <a:pPr indent="0" marL="0">
+              <a:buNone/>
+            </a:pPr>
+            <a:r>
+              <a:rPr lang="en-US" sz="1200" dirty="0">
+                <a:solidFill>
+                  <a:srgbClr val="8B949E"/>
+                </a:solidFill>
+                <a:latin typeface="Calibri" pitchFamily="34" charset="0"/>
+                <a:ea typeface="Calibri" pitchFamily="34" charset="-122"/>
+                <a:cs typeface="Calibri" pitchFamily="34" charset="-120"/>
+              </a:rPr>
+              <a:t>Job boards change daily. ATS scanners filter resumes lacking precise weekly keyword alignments. Static applications fail silently.</a:t>
+            </a:r>
+            <a:endParaRPr lang="en-US" sz="1200" dirty="0"/>
+          </a:p>
+        </p:txBody>
+      </p:sp>
+      <p:sp>
+        <p:nvSpPr>
+          <p:cNvPr id="9" name="Shape 6"/>
+          <p:cNvSpPr/>
+          <p:nvPr/>
+        </p:nvSpPr>
+        <p:spPr>
+          <a:xfrm>
+            <a:off x="548640" y="2651760"/>
+            <a:ext cx="8046720" cy="914400"/>
+          </a:xfrm>
+          <a:prstGeom prst="rect">
+            <a:avLst/>
+          </a:prstGeom>
+          <a:solidFill>
+            <a:srgbClr val="21262D"/>
+          </a:solidFill>
+          <a:ln/>
+          <a:effectLst>
+            <a:outerShdw sx="100000" sy="100000" kx="0" ky="0" algn="bl" rotWithShape="0" blurRad="101600" dist="38100" dir="8100000">
+              <a:srgbClr val="000000">
+                <a:alpha val="35000"/>
+              </a:srgbClr>
+            </a:outerShdw>
+          </a:effectLst>
+        </p:spPr>
+      </p:sp>
+      <p:pic>
+        <p:nvPicPr>
+          <p:cNvPr id="10" name="Image 1" descr="preencoded.png">    </p:cNvPr>
+          <p:cNvPicPr>
+            <a:picLocks noChangeAspect="1"/>
+          </p:cNvPicPr>
+          <p:nvPr/>
+        </p:nvPicPr>
+        <p:blipFill>
+          <a:blip r:embed="rId2"/>
+          <a:stretch>
+            <a:fillRect/>
+          </a:stretch>
+        </p:blipFill>
+        <p:spPr>
+          <a:xfrm>
+            <a:off x="822960" y="2852928"/>
+            <a:ext cx="457200" cy="457200"/>
+          </a:xfrm>
+          <a:prstGeom prst="rect">
+            <a:avLst/>
+          </a:prstGeom>
+        </p:spPr>
+      </p:pic>
+      <p:sp>
+        <p:nvSpPr>
+          <p:cNvPr id="11" name="Text 7"/>
+          <p:cNvSpPr/>
+          <p:nvPr/>
+        </p:nvSpPr>
+        <p:spPr>
+          <a:xfrm>
+            <a:off x="1463040" y="2724912"/>
+            <a:ext cx="6858000" cy="320040"/>
+          </a:xfrm>
+          <a:prstGeom prst="rect">
+            <a:avLst/>
+          </a:prstGeom>
+          <a:noFill/>
+          <a:ln/>
+        </p:spPr>
+        <p:txBody>
+          <a:bodyPr wrap="square" lIns="0" tIns="0" rIns="0" bIns="0" rtlCol="0" anchor="ctr"/>
+          <a:lstStyle/>
+          <a:p>
+            <a:pPr indent="0" marL="0">
+              <a:buNone/>
+            </a:pPr>
+            <a:r>
+              <a:rPr lang="en-US" sz="1500" b="1" dirty="0">
+                <a:solidFill>
+                  <a:srgbClr val="00D4AA"/>
+                </a:solidFill>
+                <a:latin typeface="Calibri" pitchFamily="34" charset="0"/>
+                <a:ea typeface="Calibri" pitchFamily="34" charset="-122"/>
+                <a:cs typeface="Calibri" pitchFamily="34" charset="-120"/>
+              </a:rPr>
+              <a:t>Skill Drift</a:t>
+            </a:r>
+            <a:endParaRPr lang="en-US" sz="1500" dirty="0"/>
+          </a:p>
+        </p:txBody>
+      </p:sp>
+      <p:sp>
+        <p:nvSpPr>
+          <p:cNvPr id="12" name="Text 8"/>
+          <p:cNvSpPr/>
+          <p:nvPr/>
+        </p:nvSpPr>
+        <p:spPr>
+          <a:xfrm>
+            <a:off x="1463040" y="3063240"/>
+            <a:ext cx="6858000" cy="411480"/>
+          </a:xfrm>
+          <a:prstGeom prst="rect">
+            <a:avLst/>
+          </a:prstGeom>
+          <a:noFill/>
+          <a:ln/>
+        </p:spPr>
+        <p:txBody>
+          <a:bodyPr wrap="square" lIns="0" tIns="0" rIns="0" bIns="0" rtlCol="0" anchor="ctr"/>
+          <a:lstStyle/>
+          <a:p>
+            <a:pPr indent="0" marL="0">
+              <a:buNone/>
+            </a:pPr>
+            <a:r>
+              <a:rPr lang="en-US" sz="1200" dirty="0">
+                <a:solidFill>
+                  <a:srgbClr val="8B949E"/>
+                </a:solidFill>
+                <a:latin typeface="Calibri" pitchFamily="34" charset="0"/>
+                <a:ea typeface="Calibri" pitchFamily="34" charset="-122"/>
+                <a:cs typeface="Calibri" pitchFamily="34" charset="-120"/>
+              </a:rPr>
+              <a:t>State-of-the-art in AI agents evolves weekly. Custom orchestrators give way to hierarchical swarms, SQLite sync containers, and new patterns overnight.</a:t>
+            </a:r>
+            <a:endParaRPr lang="en-US" sz="1200" dirty="0"/>
+          </a:p>
+        </p:txBody>
+      </p:sp>
+      <p:sp>
+        <p:nvSpPr>
+          <p:cNvPr id="13" name="Shape 9"/>
+          <p:cNvSpPr/>
+          <p:nvPr/>
+        </p:nvSpPr>
+        <p:spPr>
+          <a:xfrm>
+            <a:off x="548640" y="3749040"/>
+            <a:ext cx="8046720" cy="914400"/>
+          </a:xfrm>
+          <a:prstGeom prst="rect">
+            <a:avLst/>
+          </a:prstGeom>
+          <a:solidFill>
+            <a:srgbClr val="21262D"/>
+          </a:solidFill>
+          <a:ln/>
+          <a:effectLst>
+            <a:outerShdw sx="100000" sy="100000" kx="0" ky="0" algn="bl" rotWithShape="0" blurRad="101600" dist="38100" dir="8100000">
+              <a:srgbClr val="000000">
+                <a:alpha val="35000"/>
+              </a:srgbClr>
+            </a:outerShdw>
+          </a:effectLst>
+        </p:spPr>
+      </p:sp>
+      <p:pic>
+        <p:nvPicPr>
+          <p:cNvPr id="14" name="Image 2" descr="preencoded.png">    </p:cNvPr>
           <p:cNvPicPr>
             <a:picLocks noChangeAspect="1"/>
           </p:cNvPicPr>
@@ -1809,7 +2247,7 @@
         </p:blipFill>
         <p:spPr>
           <a:xfrm>
-            <a:off x="822960" y="1755648"/>
+            <a:off x="822960" y="3950208"/>
             <a:ext cx="457200" cy="457200"/>
           </a:xfrm>
           <a:prstGeom prst="rect">
@@ -1819,13 +2257,13 @@
       </p:pic>
       <p:sp>
         <p:nvSpPr>
-          <p:cNvPr id="7" name="Text 4"/>
-          <p:cNvSpPr/>
-          <p:nvPr/>
-        </p:nvSpPr>
-        <p:spPr>
-          <a:xfrm>
-            <a:off x="1463040" y="1627632"/>
+          <p:cNvPr id="15" name="Text 10"/>
+          <p:cNvSpPr/>
+          <p:nvPr/>
+        </p:nvSpPr>
+        <p:spPr>
+          <a:xfrm>
+            <a:off x="1463040" y="3822192"/>
             <a:ext cx="6858000" cy="320040"/>
           </a:xfrm>
           <a:prstGeom prst="rect">
@@ -1838,7 +2276,7 @@
           <a:bodyPr wrap="square" lIns="0" tIns="0" rIns="0" bIns="0" rtlCol="0" anchor="ctr"/>
           <a:lstStyle/>
           <a:p>
-            <a:pPr marL="0" indent="0">
+            <a:pPr indent="0" marL="0">
               <a:buNone/>
             </a:pPr>
             <a:r>
@@ -1850,278 +2288,6 @@
                 <a:ea typeface="Calibri" pitchFamily="34" charset="-122"/>
                 <a:cs typeface="Calibri" pitchFamily="34" charset="-120"/>
               </a:rPr>
-              <a:t>Market Friction</a:t>
-            </a:r>
-            <a:endParaRPr lang="en-US" sz="1500" dirty="0"/>
-          </a:p>
-        </p:txBody>
-      </p:sp>
-      <p:sp>
-        <p:nvSpPr>
-          <p:cNvPr id="8" name="Text 5"/>
-          <p:cNvSpPr/>
-          <p:nvPr/>
-        </p:nvSpPr>
-        <p:spPr>
-          <a:xfrm>
-            <a:off x="1463040" y="1965960"/>
-            <a:ext cx="6858000" cy="411480"/>
-          </a:xfrm>
-          <a:prstGeom prst="rect">
-            <a:avLst/>
-          </a:prstGeom>
-          <a:noFill/>
-          <a:ln/>
-        </p:spPr>
-        <p:txBody>
-          <a:bodyPr wrap="square" lIns="0" tIns="0" rIns="0" bIns="0" rtlCol="0" anchor="ctr"/>
-          <a:lstStyle/>
-          <a:p>
-            <a:pPr marL="0" indent="0">
-              <a:buNone/>
-            </a:pPr>
-            <a:r>
-              <a:rPr lang="en-US" sz="1200" dirty="0">
-                <a:solidFill>
-                  <a:srgbClr val="8B949E"/>
-                </a:solidFill>
-                <a:latin typeface="Calibri" pitchFamily="34" charset="0"/>
-                <a:ea typeface="Calibri" pitchFamily="34" charset="-122"/>
-                <a:cs typeface="Calibri" pitchFamily="34" charset="-120"/>
-              </a:rPr>
-              <a:t>Job boards change daily. ATS scanners filter resumes lacking precise weekly keyword alignments. Static applications fail silently.</a:t>
-            </a:r>
-            <a:endParaRPr lang="en-US" sz="1200" dirty="0"/>
-          </a:p>
-        </p:txBody>
-      </p:sp>
-      <p:sp>
-        <p:nvSpPr>
-          <p:cNvPr id="9" name="Shape 6"/>
-          <p:cNvSpPr/>
-          <p:nvPr/>
-        </p:nvSpPr>
-        <p:spPr>
-          <a:xfrm>
-            <a:off x="548640" y="2651760"/>
-            <a:ext cx="8046720" cy="914400"/>
-          </a:xfrm>
-          <a:prstGeom prst="rect">
-            <a:avLst/>
-          </a:prstGeom>
-          <a:solidFill>
-            <a:srgbClr val="21262D"/>
-          </a:solidFill>
-          <a:ln/>
-          <a:effectLst>
-            <a:outerShdw blurRad="101600" dist="38100" dir="8100000" algn="bl" rotWithShape="0">
-              <a:srgbClr val="000000">
-                <a:alpha val="35000"/>
-              </a:srgbClr>
-            </a:outerShdw>
-          </a:effectLst>
-        </p:spPr>
-        <p:txBody>
-          <a:bodyPr/>
-          <a:lstStyle/>
-          <a:p>
-            <a:endParaRPr lang="en-US"/>
-          </a:p>
-        </p:txBody>
-      </p:sp>
-      <p:pic>
-        <p:nvPicPr>
-          <p:cNvPr id="10" name="Image 1" descr="preencoded.png"/>
-          <p:cNvPicPr>
-            <a:picLocks noChangeAspect="1"/>
-          </p:cNvPicPr>
-          <p:nvPr/>
-        </p:nvPicPr>
-        <p:blipFill>
-          <a:blip r:embed="rId4"/>
-          <a:stretch>
-            <a:fillRect/>
-          </a:stretch>
-        </p:blipFill>
-        <p:spPr>
-          <a:xfrm>
-            <a:off x="822960" y="2852928"/>
-            <a:ext cx="457200" cy="457200"/>
-          </a:xfrm>
-          <a:prstGeom prst="rect">
-            <a:avLst/>
-          </a:prstGeom>
-        </p:spPr>
-      </p:pic>
-      <p:sp>
-        <p:nvSpPr>
-          <p:cNvPr id="11" name="Text 7"/>
-          <p:cNvSpPr/>
-          <p:nvPr/>
-        </p:nvSpPr>
-        <p:spPr>
-          <a:xfrm>
-            <a:off x="1463040" y="2724912"/>
-            <a:ext cx="6858000" cy="320040"/>
-          </a:xfrm>
-          <a:prstGeom prst="rect">
-            <a:avLst/>
-          </a:prstGeom>
-          <a:noFill/>
-          <a:ln/>
-        </p:spPr>
-        <p:txBody>
-          <a:bodyPr wrap="square" lIns="0" tIns="0" rIns="0" bIns="0" rtlCol="0" anchor="ctr"/>
-          <a:lstStyle/>
-          <a:p>
-            <a:pPr marL="0" indent="0">
-              <a:buNone/>
-            </a:pPr>
-            <a:r>
-              <a:rPr lang="en-US" sz="1500" b="1" dirty="0">
-                <a:solidFill>
-                  <a:srgbClr val="00D4AA"/>
-                </a:solidFill>
-                <a:latin typeface="Calibri" pitchFamily="34" charset="0"/>
-                <a:ea typeface="Calibri" pitchFamily="34" charset="-122"/>
-                <a:cs typeface="Calibri" pitchFamily="34" charset="-120"/>
-              </a:rPr>
-              <a:t>Skill Drift</a:t>
-            </a:r>
-            <a:endParaRPr lang="en-US" sz="1500" dirty="0"/>
-          </a:p>
-        </p:txBody>
-      </p:sp>
-      <p:sp>
-        <p:nvSpPr>
-          <p:cNvPr id="12" name="Text 8"/>
-          <p:cNvSpPr/>
-          <p:nvPr/>
-        </p:nvSpPr>
-        <p:spPr>
-          <a:xfrm>
-            <a:off x="1463040" y="3063240"/>
-            <a:ext cx="6858000" cy="411480"/>
-          </a:xfrm>
-          <a:prstGeom prst="rect">
-            <a:avLst/>
-          </a:prstGeom>
-          <a:noFill/>
-          <a:ln/>
-        </p:spPr>
-        <p:txBody>
-          <a:bodyPr wrap="square" lIns="0" tIns="0" rIns="0" bIns="0" rtlCol="0" anchor="ctr"/>
-          <a:lstStyle/>
-          <a:p>
-            <a:pPr marL="0" indent="0">
-              <a:buNone/>
-            </a:pPr>
-            <a:r>
-              <a:rPr lang="en-US" sz="1200" dirty="0">
-                <a:solidFill>
-                  <a:srgbClr val="8B949E"/>
-                </a:solidFill>
-                <a:latin typeface="Calibri" pitchFamily="34" charset="0"/>
-                <a:ea typeface="Calibri" pitchFamily="34" charset="-122"/>
-                <a:cs typeface="Calibri" pitchFamily="34" charset="-120"/>
-              </a:rPr>
-              <a:t>State-of-the-art in AI agents evolves weekly. Custom orchestrators give way to hierarchical swarms, SQLite sync containers, and new patterns overnight.</a:t>
-            </a:r>
-            <a:endParaRPr lang="en-US" sz="1200" dirty="0"/>
-          </a:p>
-        </p:txBody>
-      </p:sp>
-      <p:sp>
-        <p:nvSpPr>
-          <p:cNvPr id="13" name="Shape 9"/>
-          <p:cNvSpPr/>
-          <p:nvPr/>
-        </p:nvSpPr>
-        <p:spPr>
-          <a:xfrm>
-            <a:off x="548640" y="3749040"/>
-            <a:ext cx="8046720" cy="914400"/>
-          </a:xfrm>
-          <a:prstGeom prst="rect">
-            <a:avLst/>
-          </a:prstGeom>
-          <a:solidFill>
-            <a:srgbClr val="21262D"/>
-          </a:solidFill>
-          <a:ln/>
-          <a:effectLst>
-            <a:outerShdw blurRad="101600" dist="38100" dir="8100000" algn="bl" rotWithShape="0">
-              <a:srgbClr val="000000">
-                <a:alpha val="35000"/>
-              </a:srgbClr>
-            </a:outerShdw>
-          </a:effectLst>
-        </p:spPr>
-        <p:txBody>
-          <a:bodyPr/>
-          <a:lstStyle/>
-          <a:p>
-            <a:endParaRPr lang="en-US"/>
-          </a:p>
-        </p:txBody>
-      </p:sp>
-      <p:pic>
-        <p:nvPicPr>
-          <p:cNvPr id="14" name="Image 2" descr="preencoded.png"/>
-          <p:cNvPicPr>
-            <a:picLocks noChangeAspect="1"/>
-          </p:cNvPicPr>
-          <p:nvPr/>
-        </p:nvPicPr>
-        <p:blipFill>
-          <a:blip r:embed="rId5"/>
-          <a:stretch>
-            <a:fillRect/>
-          </a:stretch>
-        </p:blipFill>
-        <p:spPr>
-          <a:xfrm>
-            <a:off x="822960" y="3950208"/>
-            <a:ext cx="457200" cy="457200"/>
-          </a:xfrm>
-          <a:prstGeom prst="rect">
-            <a:avLst/>
-          </a:prstGeom>
-        </p:spPr>
-      </p:pic>
-      <p:sp>
-        <p:nvSpPr>
-          <p:cNvPr id="15" name="Text 10"/>
-          <p:cNvSpPr/>
-          <p:nvPr/>
-        </p:nvSpPr>
-        <p:spPr>
-          <a:xfrm>
-            <a:off x="1463040" y="3822192"/>
-            <a:ext cx="6858000" cy="320040"/>
-          </a:xfrm>
-          <a:prstGeom prst="rect">
-            <a:avLst/>
-          </a:prstGeom>
-          <a:noFill/>
-          <a:ln/>
-        </p:spPr>
-        <p:txBody>
-          <a:bodyPr wrap="square" lIns="0" tIns="0" rIns="0" bIns="0" rtlCol="0" anchor="ctr"/>
-          <a:lstStyle/>
-          <a:p>
-            <a:pPr marL="0" indent="0">
-              <a:buNone/>
-            </a:pPr>
-            <a:r>
-              <a:rPr lang="en-US" sz="1500" b="1" dirty="0">
-                <a:solidFill>
-                  <a:srgbClr val="00D4AA"/>
-                </a:solidFill>
-                <a:latin typeface="Calibri" pitchFamily="34" charset="0"/>
-                <a:ea typeface="Calibri" pitchFamily="34" charset="-122"/>
-                <a:cs typeface="Calibri" pitchFamily="34" charset="-120"/>
-              </a:rPr>
               <a:t>Proof Gap</a:t>
             </a:r>
             <a:endParaRPr lang="en-US" sz="1500" dirty="0"/>
@@ -2149,7 +2315,7 @@
           <a:bodyPr wrap="square" lIns="0" tIns="0" rIns="0" bIns="0" rtlCol="0" anchor="ctr"/>
           <a:lstStyle/>
           <a:p>
-            <a:pPr marL="0" indent="0">
+            <a:pPr indent="0" marL="0">
               <a:buNone/>
             </a:pPr>
             <a:r>
@@ -2183,7 +2349,6 @@
         <a:solidFill>
           <a:srgbClr val="0D1117"/>
         </a:solidFill>
-        <a:effectLst/>
       </p:bgPr>
     </p:bg>
     <p:spTree>
@@ -2219,13 +2384,6 @@
           </a:solidFill>
           <a:ln/>
         </p:spPr>
-        <p:txBody>
-          <a:bodyPr/>
-          <a:lstStyle/>
-          <a:p>
-            <a:endParaRPr lang="en-US"/>
-          </a:p>
-        </p:txBody>
       </p:sp>
       <p:sp>
         <p:nvSpPr>
@@ -2248,7 +2406,7 @@
           <a:bodyPr wrap="square" lIns="0" tIns="0" rIns="0" bIns="0" rtlCol="0" anchor="ctr"/>
           <a:lstStyle/>
           <a:p>
-            <a:pPr marL="0" indent="0">
+            <a:pPr indent="0" marL="0">
               <a:buNone/>
             </a:pPr>
             <a:r>
@@ -2287,7 +2445,7 @@
           <a:bodyPr wrap="square" lIns="0" tIns="0" rIns="0" bIns="0" rtlCol="0" anchor="ctr"/>
           <a:lstStyle/>
           <a:p>
-            <a:pPr marL="0" indent="0">
+            <a:pPr indent="0" marL="0">
               <a:buNone/>
             </a:pPr>
             <a:r>
@@ -2324,20 +2482,13 @@
           </a:solidFill>
           <a:ln/>
           <a:effectLst>
-            <a:outerShdw blurRad="101600" dist="38100" dir="8100000" algn="bl" rotWithShape="0">
+            <a:outerShdw sx="100000" sy="100000" kx="0" ky="0" algn="bl" rotWithShape="0" blurRad="101600" dist="38100" dir="8100000">
               <a:srgbClr val="000000">
                 <a:alpha val="35000"/>
               </a:srgbClr>
             </a:outerShdw>
           </a:effectLst>
         </p:spPr>
-        <p:txBody>
-          <a:bodyPr/>
-          <a:lstStyle/>
-          <a:p>
-            <a:endParaRPr lang="en-US"/>
-          </a:p>
-        </p:txBody>
       </p:sp>
       <p:sp>
         <p:nvSpPr>
@@ -2358,13 +2509,6 @@
           </a:solidFill>
           <a:ln/>
         </p:spPr>
-        <p:txBody>
-          <a:bodyPr/>
-          <a:lstStyle/>
-          <a:p>
-            <a:endParaRPr lang="en-US"/>
-          </a:p>
-        </p:txBody>
       </p:sp>
       <p:sp>
         <p:nvSpPr>
@@ -2387,7 +2531,7 @@
           <a:bodyPr wrap="square" lIns="0" tIns="0" rIns="0" bIns="0" rtlCol="0" anchor="ctr"/>
           <a:lstStyle/>
           <a:p>
-            <a:pPr marL="0" indent="0" algn="ctr">
+            <a:pPr algn="ctr" indent="0" marL="0">
               <a:buNone/>
             </a:pPr>
             <a:r>
@@ -2426,7 +2570,7 @@
           <a:bodyPr wrap="square" lIns="0" tIns="0" rIns="0" bIns="0" rtlCol="0" anchor="ctr"/>
           <a:lstStyle/>
           <a:p>
-            <a:pPr marL="0" indent="0" algn="ctr">
+            <a:pPr algn="ctr" indent="0" marL="0">
               <a:buNone/>
             </a:pPr>
             <a:r>
@@ -2465,7 +2609,7 @@
           <a:bodyPr wrap="square" lIns="0" tIns="0" rIns="0" bIns="0" rtlCol="0" anchor="ctr"/>
           <a:lstStyle/>
           <a:p>
-            <a:pPr marL="0" indent="0" algn="ctr">
+            <a:pPr algn="ctr" indent="0" marL="0">
               <a:buNone/>
             </a:pPr>
             <a:r>
@@ -2482,7 +2626,7 @@
             <a:endParaRPr lang="en-US" sz="1000" dirty="0"/>
           </a:p>
           <a:p>
-            <a:pPr marL="0" indent="0" algn="ctr">
+            <a:pPr algn="ctr" indent="0" marL="0">
               <a:buNone/>
             </a:pPr>
             <a:r>
@@ -2519,20 +2663,13 @@
           </a:solidFill>
           <a:ln/>
           <a:effectLst>
-            <a:outerShdw blurRad="101600" dist="38100" dir="8100000" algn="bl" rotWithShape="0">
+            <a:outerShdw sx="100000" sy="100000" kx="0" ky="0" algn="bl" rotWithShape="0" blurRad="101600" dist="38100" dir="8100000">
               <a:srgbClr val="000000">
                 <a:alpha val="35000"/>
               </a:srgbClr>
             </a:outerShdw>
           </a:effectLst>
         </p:spPr>
-        <p:txBody>
-          <a:bodyPr/>
-          <a:lstStyle/>
-          <a:p>
-            <a:endParaRPr lang="en-US"/>
-          </a:p>
-        </p:txBody>
       </p:sp>
       <p:sp>
         <p:nvSpPr>
@@ -2553,13 +2690,6 @@
           </a:solidFill>
           <a:ln/>
         </p:spPr>
-        <p:txBody>
-          <a:bodyPr/>
-          <a:lstStyle/>
-          <a:p>
-            <a:endParaRPr lang="en-US"/>
-          </a:p>
-        </p:txBody>
       </p:sp>
       <p:sp>
         <p:nvSpPr>
@@ -2582,7 +2712,7 @@
           <a:bodyPr wrap="square" lIns="0" tIns="0" rIns="0" bIns="0" rtlCol="0" anchor="ctr"/>
           <a:lstStyle/>
           <a:p>
-            <a:pPr marL="0" indent="0" algn="ctr">
+            <a:pPr algn="ctr" indent="0" marL="0">
               <a:buNone/>
             </a:pPr>
             <a:r>
@@ -2621,7 +2751,7 @@
           <a:bodyPr wrap="square" lIns="0" tIns="0" rIns="0" bIns="0" rtlCol="0" anchor="ctr"/>
           <a:lstStyle/>
           <a:p>
-            <a:pPr marL="0" indent="0" algn="ctr">
+            <a:pPr algn="ctr" indent="0" marL="0">
               <a:buNone/>
             </a:pPr>
             <a:r>
@@ -2660,7 +2790,7 @@
           <a:bodyPr wrap="square" lIns="0" tIns="0" rIns="0" bIns="0" rtlCol="0" anchor="ctr"/>
           <a:lstStyle/>
           <a:p>
-            <a:pPr marL="0" indent="0" algn="ctr">
+            <a:pPr algn="ctr" indent="0" marL="0">
               <a:buNone/>
             </a:pPr>
             <a:r>
@@ -2677,7 +2807,7 @@
             <a:endParaRPr lang="en-US" sz="1000" dirty="0"/>
           </a:p>
           <a:p>
-            <a:pPr marL="0" indent="0" algn="ctr">
+            <a:pPr algn="ctr" indent="0" marL="0">
               <a:buNone/>
             </a:pPr>
             <a:r>
@@ -2714,20 +2844,13 @@
           </a:solidFill>
           <a:ln/>
           <a:effectLst>
-            <a:outerShdw blurRad="101600" dist="38100" dir="8100000" algn="bl" rotWithShape="0">
+            <a:outerShdw sx="100000" sy="100000" kx="0" ky="0" algn="bl" rotWithShape="0" blurRad="101600" dist="38100" dir="8100000">
               <a:srgbClr val="000000">
                 <a:alpha val="35000"/>
               </a:srgbClr>
             </a:outerShdw>
           </a:effectLst>
         </p:spPr>
-        <p:txBody>
-          <a:bodyPr/>
-          <a:lstStyle/>
-          <a:p>
-            <a:endParaRPr lang="en-US"/>
-          </a:p>
-        </p:txBody>
       </p:sp>
       <p:sp>
         <p:nvSpPr>
@@ -2748,13 +2871,6 @@
           </a:solidFill>
           <a:ln/>
         </p:spPr>
-        <p:txBody>
-          <a:bodyPr/>
-          <a:lstStyle/>
-          <a:p>
-            <a:endParaRPr lang="en-US"/>
-          </a:p>
-        </p:txBody>
       </p:sp>
       <p:sp>
         <p:nvSpPr>
@@ -2777,7 +2893,7 @@
           <a:bodyPr wrap="square" lIns="0" tIns="0" rIns="0" bIns="0" rtlCol="0" anchor="ctr"/>
           <a:lstStyle/>
           <a:p>
-            <a:pPr marL="0" indent="0" algn="ctr">
+            <a:pPr algn="ctr" indent="0" marL="0">
               <a:buNone/>
             </a:pPr>
             <a:r>
@@ -2816,7 +2932,7 @@
           <a:bodyPr wrap="square" lIns="0" tIns="0" rIns="0" bIns="0" rtlCol="0" anchor="ctr"/>
           <a:lstStyle/>
           <a:p>
-            <a:pPr marL="0" indent="0" algn="ctr">
+            <a:pPr algn="ctr" indent="0" marL="0">
               <a:buNone/>
             </a:pPr>
             <a:r>
@@ -2855,7 +2971,7 @@
           <a:bodyPr wrap="square" lIns="0" tIns="0" rIns="0" bIns="0" rtlCol="0" anchor="ctr"/>
           <a:lstStyle/>
           <a:p>
-            <a:pPr marL="0" indent="0" algn="ctr">
+            <a:pPr algn="ctr" indent="0" marL="0">
               <a:buNone/>
             </a:pPr>
             <a:r>
@@ -2872,7 +2988,7 @@
             <a:endParaRPr lang="en-US" sz="1000" dirty="0"/>
           </a:p>
           <a:p>
-            <a:pPr marL="0" indent="0" algn="ctr">
+            <a:pPr algn="ctr" indent="0" marL="0">
               <a:buNone/>
             </a:pPr>
             <a:r>
@@ -2909,20 +3025,13 @@
           </a:solidFill>
           <a:ln/>
           <a:effectLst>
-            <a:outerShdw blurRad="101600" dist="38100" dir="8100000" algn="bl" rotWithShape="0">
+            <a:outerShdw sx="100000" sy="100000" kx="0" ky="0" algn="bl" rotWithShape="0" blurRad="101600" dist="38100" dir="8100000">
               <a:srgbClr val="000000">
                 <a:alpha val="35000"/>
               </a:srgbClr>
             </a:outerShdw>
           </a:effectLst>
         </p:spPr>
-        <p:txBody>
-          <a:bodyPr/>
-          <a:lstStyle/>
-          <a:p>
-            <a:endParaRPr lang="en-US"/>
-          </a:p>
-        </p:txBody>
       </p:sp>
       <p:sp>
         <p:nvSpPr>
@@ -2943,13 +3052,6 @@
           </a:solidFill>
           <a:ln/>
         </p:spPr>
-        <p:txBody>
-          <a:bodyPr/>
-          <a:lstStyle/>
-          <a:p>
-            <a:endParaRPr lang="en-US"/>
-          </a:p>
-        </p:txBody>
       </p:sp>
       <p:sp>
         <p:nvSpPr>
@@ -2972,7 +3074,7 @@
           <a:bodyPr wrap="square" lIns="0" tIns="0" rIns="0" bIns="0" rtlCol="0" anchor="ctr"/>
           <a:lstStyle/>
           <a:p>
-            <a:pPr marL="0" indent="0" algn="ctr">
+            <a:pPr algn="ctr" indent="0" marL="0">
               <a:buNone/>
             </a:pPr>
             <a:r>
@@ -3011,7 +3113,7 @@
           <a:bodyPr wrap="square" lIns="0" tIns="0" rIns="0" bIns="0" rtlCol="0" anchor="ctr"/>
           <a:lstStyle/>
           <a:p>
-            <a:pPr marL="0" indent="0" algn="ctr">
+            <a:pPr algn="ctr" indent="0" marL="0">
               <a:buNone/>
             </a:pPr>
             <a:r>
@@ -3050,7 +3152,7 @@
           <a:bodyPr wrap="square" lIns="0" tIns="0" rIns="0" bIns="0" rtlCol="0" anchor="ctr"/>
           <a:lstStyle/>
           <a:p>
-            <a:pPr marL="0" indent="0" algn="ctr">
+            <a:pPr algn="ctr" indent="0" marL="0">
               <a:buNone/>
             </a:pPr>
             <a:r>
@@ -3067,7 +3169,7 @@
             <a:endParaRPr lang="en-US" sz="1000" dirty="0"/>
           </a:p>
           <a:p>
-            <a:pPr marL="0" indent="0" algn="ctr">
+            <a:pPr algn="ctr" indent="0" marL="0">
               <a:buNone/>
             </a:pPr>
             <a:r>
@@ -3104,20 +3206,13 @@
           </a:solidFill>
           <a:ln/>
           <a:effectLst>
-            <a:outerShdw blurRad="101600" dist="38100" dir="8100000" algn="bl" rotWithShape="0">
+            <a:outerShdw sx="100000" sy="100000" kx="0" ky="0" algn="bl" rotWithShape="0" blurRad="101600" dist="38100" dir="8100000">
               <a:srgbClr val="000000">
                 <a:alpha val="35000"/>
               </a:srgbClr>
             </a:outerShdw>
           </a:effectLst>
         </p:spPr>
-        <p:txBody>
-          <a:bodyPr/>
-          <a:lstStyle/>
-          <a:p>
-            <a:endParaRPr lang="en-US"/>
-          </a:p>
-        </p:txBody>
       </p:sp>
       <p:sp>
         <p:nvSpPr>
@@ -3138,13 +3233,6 @@
           </a:solidFill>
           <a:ln/>
         </p:spPr>
-        <p:txBody>
-          <a:bodyPr/>
-          <a:lstStyle/>
-          <a:p>
-            <a:endParaRPr lang="en-US"/>
-          </a:p>
-        </p:txBody>
       </p:sp>
       <p:sp>
         <p:nvSpPr>
@@ -3167,7 +3255,7 @@
           <a:bodyPr wrap="square" lIns="0" tIns="0" rIns="0" bIns="0" rtlCol="0" anchor="ctr"/>
           <a:lstStyle/>
           <a:p>
-            <a:pPr marL="0" indent="0" algn="ctr">
+            <a:pPr algn="ctr" indent="0" marL="0">
               <a:buNone/>
             </a:pPr>
             <a:r>
@@ -3206,7 +3294,7 @@
           <a:bodyPr wrap="square" lIns="0" tIns="0" rIns="0" bIns="0" rtlCol="0" anchor="ctr"/>
           <a:lstStyle/>
           <a:p>
-            <a:pPr marL="0" indent="0" algn="ctr">
+            <a:pPr algn="ctr" indent="0" marL="0">
               <a:buNone/>
             </a:pPr>
             <a:r>
@@ -3245,7 +3333,7 @@
           <a:bodyPr wrap="square" lIns="0" tIns="0" rIns="0" bIns="0" rtlCol="0" anchor="ctr"/>
           <a:lstStyle/>
           <a:p>
-            <a:pPr marL="0" indent="0" algn="ctr">
+            <a:pPr algn="ctr" indent="0" marL="0">
               <a:buNone/>
             </a:pPr>
             <a:r>
@@ -3262,7 +3350,7 @@
             <a:endParaRPr lang="en-US" sz="1000" dirty="0"/>
           </a:p>
           <a:p>
-            <a:pPr marL="0" indent="0" algn="ctr">
+            <a:pPr algn="ctr" indent="0" marL="0">
               <a:buNone/>
             </a:pPr>
             <a:r>
@@ -3299,13 +3387,6 @@
           </a:solidFill>
           <a:ln/>
         </p:spPr>
-        <p:txBody>
-          <a:bodyPr/>
-          <a:lstStyle/>
-          <a:p>
-            <a:endParaRPr lang="en-US"/>
-          </a:p>
-        </p:txBody>
       </p:sp>
       <p:sp>
         <p:nvSpPr>
@@ -3328,7 +3409,7 @@
           <a:bodyPr wrap="square" lIns="0" tIns="0" rIns="0" bIns="0" rtlCol="0" anchor="ctr"/>
           <a:lstStyle/>
           <a:p>
-            <a:pPr marL="0" indent="0" algn="ctr">
+            <a:pPr algn="ctr" indent="0" marL="0">
               <a:buNone/>
             </a:pPr>
             <a:r>
@@ -3339,6 +3420,9 @@
               </a:rPr>
               <a:t>$0 </a:t>
             </a:r>
+            <a:pPr algn="ctr" indent="0" marL="0">
+              <a:buNone/>
+            </a:pPr>
             <a:r>
               <a:rPr lang="en-US" sz="1400" dirty="0">
                 <a:solidFill>
@@ -3347,6 +3431,9 @@
               </a:rPr>
               <a:t>operational cost  </a:t>
             </a:r>
+            <a:pPr algn="ctr" indent="0" marL="0">
+              <a:buNone/>
+            </a:pPr>
             <a:r>
               <a:rPr lang="en-US" sz="1400" dirty="0">
                 <a:solidFill>
@@ -3355,6 +3442,9 @@
               </a:rPr>
               <a:t>   |   </a:t>
             </a:r>
+            <a:pPr algn="ctr" indent="0" marL="0">
+              <a:buNone/>
+            </a:pPr>
             <a:r>
               <a:rPr lang="en-US" sz="2800" b="1" dirty="0">
                 <a:solidFill>
@@ -3363,6 +3453,9 @@
               </a:rPr>
               <a:t>100% </a:t>
             </a:r>
+            <a:pPr algn="ctr" indent="0" marL="0">
+              <a:buNone/>
+            </a:pPr>
             <a:r>
               <a:rPr lang="en-US" sz="1400" dirty="0">
                 <a:solidFill>
@@ -3371,6 +3464,9 @@
               </a:rPr>
               <a:t>cloud uptime  </a:t>
             </a:r>
+            <a:pPr algn="ctr" indent="0" marL="0">
+              <a:buNone/>
+            </a:pPr>
             <a:r>
               <a:rPr lang="en-US" sz="1400" dirty="0">
                 <a:solidFill>
@@ -3379,6 +3475,9 @@
               </a:rPr>
               <a:t>   |   </a:t>
             </a:r>
+            <a:pPr algn="ctr" indent="0" marL="0">
+              <a:buNone/>
+            </a:pPr>
             <a:r>
               <a:rPr lang="en-US" sz="2800" b="1" dirty="0">
                 <a:solidFill>
@@ -3387,6 +3486,9 @@
               </a:rPr>
               <a:t>5 </a:t>
             </a:r>
+            <a:pPr algn="ctr" indent="0" marL="0">
+              <a:buNone/>
+            </a:pPr>
             <a:r>
               <a:rPr lang="en-US" sz="1400" dirty="0">
                 <a:solidFill>
@@ -3415,7 +3517,6 @@
         <a:solidFill>
           <a:srgbClr val="0D1117"/>
         </a:solidFill>
-        <a:effectLst/>
       </p:bgPr>
     </p:bg>
     <p:spTree>
@@ -3451,13 +3552,6 @@
           </a:solidFill>
           <a:ln/>
         </p:spPr>
-        <p:txBody>
-          <a:bodyPr/>
-          <a:lstStyle/>
-          <a:p>
-            <a:endParaRPr lang="en-US"/>
-          </a:p>
-        </p:txBody>
       </p:sp>
       <p:sp>
         <p:nvSpPr>
@@ -3480,7 +3574,7 @@
           <a:bodyPr wrap="square" lIns="0" tIns="0" rIns="0" bIns="0" rtlCol="0" anchor="ctr"/>
           <a:lstStyle/>
           <a:p>
-            <a:pPr marL="0" indent="0">
+            <a:pPr indent="0" marL="0">
               <a:buNone/>
             </a:pPr>
             <a:r>
@@ -3517,13 +3611,6 @@
           </a:solidFill>
           <a:ln/>
         </p:spPr>
-        <p:txBody>
-          <a:bodyPr/>
-          <a:lstStyle/>
-          <a:p>
-            <a:endParaRPr lang="en-US"/>
-          </a:p>
-        </p:txBody>
       </p:sp>
       <p:sp>
         <p:nvSpPr>
@@ -3544,17 +3631,294 @@
           </a:solidFill>
           <a:ln/>
         </p:spPr>
-        <p:txBody>
-          <a:bodyPr/>
-          <a:lstStyle/>
-          <a:p>
-            <a:endParaRPr lang="en-US"/>
-          </a:p>
-        </p:txBody>
       </p:sp>
       <p:pic>
         <p:nvPicPr>
-          <p:cNvPr id="6" name="Image 0" descr="preencoded.png"/>
+          <p:cNvPr id="6" name="Image 0" descr="preencoded.png">    </p:cNvPr>
+          <p:cNvPicPr>
+            <a:picLocks noChangeAspect="1"/>
+          </p:cNvPicPr>
+          <p:nvPr/>
+        </p:nvPicPr>
+        <p:blipFill>
+          <a:blip r:embed="rId1"/>
+          <a:stretch>
+            <a:fillRect/>
+          </a:stretch>
+        </p:blipFill>
+        <p:spPr>
+          <a:xfrm>
+            <a:off x="822960" y="1115568"/>
+            <a:ext cx="411480" cy="411480"/>
+          </a:xfrm>
+          <a:prstGeom prst="rect">
+            <a:avLst/>
+          </a:prstGeom>
+        </p:spPr>
+      </p:pic>
+      <p:sp>
+        <p:nvSpPr>
+          <p:cNvPr id="7" name="Text 4"/>
+          <p:cNvSpPr/>
+          <p:nvPr/>
+        </p:nvSpPr>
+        <p:spPr>
+          <a:xfrm>
+            <a:off x="1417320" y="1042416"/>
+            <a:ext cx="2926080" cy="274320"/>
+          </a:xfrm>
+          <a:prstGeom prst="rect">
+            <a:avLst/>
+          </a:prstGeom>
+          <a:noFill/>
+          <a:ln/>
+        </p:spPr>
+        <p:txBody>
+          <a:bodyPr wrap="square" lIns="0" tIns="0" rIns="0" bIns="0" rtlCol="0" anchor="ctr"/>
+          <a:lstStyle/>
+          <a:p>
+            <a:pPr indent="0" marL="0">
+              <a:buNone/>
+            </a:pPr>
+            <a:r>
+              <a:rPr lang="en-US" sz="1300" b="1" dirty="0">
+                <a:solidFill>
+                  <a:srgbClr val="00D4AA"/>
+                </a:solidFill>
+                <a:latin typeface="Calibri" pitchFamily="34" charset="0"/>
+                <a:ea typeface="Calibri" pitchFamily="34" charset="-122"/>
+                <a:cs typeface="Calibri" pitchFamily="34" charset="-120"/>
+              </a:rPr>
+              <a:t>Job Scanner &amp; Resume Tuner</a:t>
+            </a:r>
+            <a:endParaRPr lang="en-US" sz="1300" dirty="0"/>
+          </a:p>
+        </p:txBody>
+      </p:sp>
+      <p:sp>
+        <p:nvSpPr>
+          <p:cNvPr id="8" name="Text 5"/>
+          <p:cNvSpPr/>
+          <p:nvPr/>
+        </p:nvSpPr>
+        <p:spPr>
+          <a:xfrm>
+            <a:off x="1417320" y="1298448"/>
+            <a:ext cx="6949440" cy="329184"/>
+          </a:xfrm>
+          <a:prstGeom prst="rect">
+            <a:avLst/>
+          </a:prstGeom>
+          <a:noFill/>
+          <a:ln/>
+        </p:spPr>
+        <p:txBody>
+          <a:bodyPr wrap="square" lIns="0" tIns="0" rIns="0" bIns="0" rtlCol="0" anchor="ctr"/>
+          <a:lstStyle/>
+          <a:p>
+            <a:pPr indent="0" marL="0">
+              <a:buNone/>
+            </a:pPr>
+            <a:r>
+              <a:rPr lang="en-US" sz="1050" dirty="0">
+                <a:solidFill>
+                  <a:srgbClr val="8B949E"/>
+                </a:solidFill>
+                <a:latin typeface="Calibri" pitchFamily="34" charset="0"/>
+                <a:ea typeface="Calibri" pitchFamily="34" charset="-122"/>
+                <a:cs typeface="Calibri" pitchFamily="34" charset="-120"/>
+              </a:rPr>
+              <a:t>Aggregates postings via managed crawlers, extracts frequency-weighted themes, updates resume in-place preserving typography</a:t>
+            </a:r>
+            <a:endParaRPr lang="en-US" sz="1050" dirty="0"/>
+          </a:p>
+        </p:txBody>
+      </p:sp>
+      <p:sp>
+        <p:nvSpPr>
+          <p:cNvPr id="9" name="Shape 6"/>
+          <p:cNvSpPr/>
+          <p:nvPr/>
+        </p:nvSpPr>
+        <p:spPr>
+          <a:xfrm>
+            <a:off x="548640" y="1783080"/>
+            <a:ext cx="8046720" cy="658368"/>
+          </a:xfrm>
+          <a:prstGeom prst="rect">
+            <a:avLst/>
+          </a:prstGeom>
+          <a:solidFill>
+            <a:srgbClr val="21262D"/>
+          </a:solidFill>
+          <a:ln/>
+        </p:spPr>
+      </p:sp>
+      <p:sp>
+        <p:nvSpPr>
+          <p:cNvPr id="10" name="Shape 7"/>
+          <p:cNvSpPr/>
+          <p:nvPr/>
+        </p:nvSpPr>
+        <p:spPr>
+          <a:xfrm>
+            <a:off x="548640" y="1783080"/>
+            <a:ext cx="54864" cy="658368"/>
+          </a:xfrm>
+          <a:prstGeom prst="rect">
+            <a:avLst/>
+          </a:prstGeom>
+          <a:solidFill>
+            <a:srgbClr val="00D4AA"/>
+          </a:solidFill>
+          <a:ln/>
+        </p:spPr>
+      </p:sp>
+      <p:pic>
+        <p:nvPicPr>
+          <p:cNvPr id="11" name="Image 1" descr="preencoded.png">    </p:cNvPr>
+          <p:cNvPicPr>
+            <a:picLocks noChangeAspect="1"/>
+          </p:cNvPicPr>
+          <p:nvPr/>
+        </p:nvPicPr>
+        <p:blipFill>
+          <a:blip r:embed="rId2"/>
+          <a:stretch>
+            <a:fillRect/>
+          </a:stretch>
+        </p:blipFill>
+        <p:spPr>
+          <a:xfrm>
+            <a:off x="822960" y="1892808"/>
+            <a:ext cx="411480" cy="411480"/>
+          </a:xfrm>
+          <a:prstGeom prst="rect">
+            <a:avLst/>
+          </a:prstGeom>
+        </p:spPr>
+      </p:pic>
+      <p:sp>
+        <p:nvSpPr>
+          <p:cNvPr id="12" name="Text 8"/>
+          <p:cNvSpPr/>
+          <p:nvPr/>
+        </p:nvSpPr>
+        <p:spPr>
+          <a:xfrm>
+            <a:off x="1417320" y="1819656"/>
+            <a:ext cx="2926080" cy="274320"/>
+          </a:xfrm>
+          <a:prstGeom prst="rect">
+            <a:avLst/>
+          </a:prstGeom>
+          <a:noFill/>
+          <a:ln/>
+        </p:spPr>
+        <p:txBody>
+          <a:bodyPr wrap="square" lIns="0" tIns="0" rIns="0" bIns="0" rtlCol="0" anchor="ctr"/>
+          <a:lstStyle/>
+          <a:p>
+            <a:pPr indent="0" marL="0">
+              <a:buNone/>
+            </a:pPr>
+            <a:r>
+              <a:rPr lang="en-US" sz="1300" b="1" dirty="0">
+                <a:solidFill>
+                  <a:srgbClr val="00D4AA"/>
+                </a:solidFill>
+                <a:latin typeface="Calibri" pitchFamily="34" charset="0"/>
+                <a:ea typeface="Calibri" pitchFamily="34" charset="-122"/>
+                <a:cs typeface="Calibri" pitchFamily="34" charset="-120"/>
+              </a:rPr>
+              <a:t>Opportunity Watchdog</a:t>
+            </a:r>
+            <a:endParaRPr lang="en-US" sz="1300" dirty="0"/>
+          </a:p>
+        </p:txBody>
+      </p:sp>
+      <p:sp>
+        <p:nvSpPr>
+          <p:cNvPr id="13" name="Text 9"/>
+          <p:cNvSpPr/>
+          <p:nvPr/>
+        </p:nvSpPr>
+        <p:spPr>
+          <a:xfrm>
+            <a:off x="1417320" y="2075688"/>
+            <a:ext cx="6949440" cy="329184"/>
+          </a:xfrm>
+          <a:prstGeom prst="rect">
+            <a:avLst/>
+          </a:prstGeom>
+          <a:noFill/>
+          <a:ln/>
+        </p:spPr>
+        <p:txBody>
+          <a:bodyPr wrap="square" lIns="0" tIns="0" rIns="0" bIns="0" rtlCol="0" anchor="ctr"/>
+          <a:lstStyle/>
+          <a:p>
+            <a:pPr indent="0" marL="0">
+              <a:buNone/>
+            </a:pPr>
+            <a:r>
+              <a:rPr lang="en-US" sz="1050" dirty="0">
+                <a:solidFill>
+                  <a:srgbClr val="8B949E"/>
+                </a:solidFill>
+                <a:latin typeface="Calibri" pitchFamily="34" charset="0"/>
+                <a:ea typeface="Calibri" pitchFamily="34" charset="-122"/>
+                <a:cs typeface="Calibri" pitchFamily="34" charset="-120"/>
+              </a:rPr>
+              <a:t>Bypasses aggregators to parse Greenhouse &amp; Lever ATS endpoints of target companies, flagging stealth postings instantly</a:t>
+            </a:r>
+            <a:endParaRPr lang="en-US" sz="1050" dirty="0"/>
+          </a:p>
+        </p:txBody>
+      </p:sp>
+      <p:sp>
+        <p:nvSpPr>
+          <p:cNvPr id="14" name="Shape 10"/>
+          <p:cNvSpPr/>
+          <p:nvPr/>
+        </p:nvSpPr>
+        <p:spPr>
+          <a:xfrm>
+            <a:off x="548640" y="2560320"/>
+            <a:ext cx="8046720" cy="658368"/>
+          </a:xfrm>
+          <a:prstGeom prst="rect">
+            <a:avLst/>
+          </a:prstGeom>
+          <a:solidFill>
+            <a:srgbClr val="21262D"/>
+          </a:solidFill>
+          <a:ln/>
+        </p:spPr>
+      </p:sp>
+      <p:sp>
+        <p:nvSpPr>
+          <p:cNvPr id="15" name="Shape 11"/>
+          <p:cNvSpPr/>
+          <p:nvPr/>
+        </p:nvSpPr>
+        <p:spPr>
+          <a:xfrm>
+            <a:off x="548640" y="2560320"/>
+            <a:ext cx="54864" cy="658368"/>
+          </a:xfrm>
+          <a:prstGeom prst="rect">
+            <a:avLst/>
+          </a:prstGeom>
+          <a:solidFill>
+            <a:srgbClr val="00D4AA"/>
+          </a:solidFill>
+          <a:ln/>
+        </p:spPr>
+      </p:sp>
+      <p:pic>
+        <p:nvPicPr>
+          <p:cNvPr id="16" name="Image 2" descr="preencoded.png">    </p:cNvPr>
           <p:cNvPicPr>
             <a:picLocks noChangeAspect="1"/>
           </p:cNvPicPr>
@@ -3568,7 +3932,7 @@
         </p:blipFill>
         <p:spPr>
           <a:xfrm>
-            <a:off x="822960" y="1115568"/>
+            <a:off x="822960" y="2670048"/>
             <a:ext cx="411480" cy="411480"/>
           </a:xfrm>
           <a:prstGeom prst="rect">
@@ -3578,13 +3942,13 @@
       </p:pic>
       <p:sp>
         <p:nvSpPr>
-          <p:cNvPr id="7" name="Text 4"/>
-          <p:cNvSpPr/>
-          <p:nvPr/>
-        </p:nvSpPr>
-        <p:spPr>
-          <a:xfrm>
-            <a:off x="1417320" y="1042416"/>
+          <p:cNvPr id="17" name="Text 12"/>
+          <p:cNvSpPr/>
+          <p:nvPr/>
+        </p:nvSpPr>
+        <p:spPr>
+          <a:xfrm>
+            <a:off x="1417320" y="2596896"/>
             <a:ext cx="2926080" cy="274320"/>
           </a:xfrm>
           <a:prstGeom prst="rect">
@@ -3597,7 +3961,7 @@
           <a:bodyPr wrap="square" lIns="0" tIns="0" rIns="0" bIns="0" rtlCol="0" anchor="ctr"/>
           <a:lstStyle/>
           <a:p>
-            <a:pPr marL="0" indent="0">
+            <a:pPr indent="0" marL="0">
               <a:buNone/>
             </a:pPr>
             <a:r>
@@ -3609,7 +3973,7 @@
                 <a:ea typeface="Calibri" pitchFamily="34" charset="-122"/>
                 <a:cs typeface="Calibri" pitchFamily="34" charset="-120"/>
               </a:rPr>
-              <a:t>Job Scanner &amp; Resume Tuner</a:t>
+              <a:t>Agent Tutor</a:t>
             </a:r>
             <a:endParaRPr lang="en-US" sz="1300" dirty="0"/>
           </a:p>
@@ -3617,13 +3981,13 @@
       </p:sp>
       <p:sp>
         <p:nvSpPr>
-          <p:cNvPr id="8" name="Text 5"/>
-          <p:cNvSpPr/>
-          <p:nvPr/>
-        </p:nvSpPr>
-        <p:spPr>
-          <a:xfrm>
-            <a:off x="1417320" y="1298448"/>
+          <p:cNvPr id="18" name="Text 13"/>
+          <p:cNvSpPr/>
+          <p:nvPr/>
+        </p:nvSpPr>
+        <p:spPr>
+          <a:xfrm>
+            <a:off x="1417320" y="2852928"/>
             <a:ext cx="6949440" cy="329184"/>
           </a:xfrm>
           <a:prstGeom prst="rect">
@@ -3636,7 +4000,7 @@
           <a:bodyPr wrap="square" lIns="0" tIns="0" rIns="0" bIns="0" rtlCol="0" anchor="ctr"/>
           <a:lstStyle/>
           <a:p>
-            <a:pPr marL="0" indent="0">
+            <a:pPr indent="0" marL="0">
               <a:buNone/>
             </a:pPr>
             <a:r>
@@ -3648,7 +4012,7 @@
                 <a:ea typeface="Calibri" pitchFamily="34" charset="-122"/>
                 <a:cs typeface="Calibri" pitchFamily="34" charset="-120"/>
               </a:rPr>
-              <a:t>Aggregates postings via managed crawlers, extracts frequency-weighted themes, updates resume in-place preserving typography</a:t>
+              <a:t>Evaluates trending skills, retrieves arXiv papers &amp; GitHub repos, creates NotebookLM workspaces, generates audio podcasts &amp; study plans</a:t>
             </a:r>
             <a:endParaRPr lang="en-US" sz="1050" dirty="0"/>
           </a:p>
@@ -3656,13 +4020,13 @@
       </p:sp>
       <p:sp>
         <p:nvSpPr>
-          <p:cNvPr id="9" name="Shape 6"/>
-          <p:cNvSpPr/>
-          <p:nvPr/>
-        </p:nvSpPr>
-        <p:spPr>
-          <a:xfrm>
-            <a:off x="548640" y="1783080"/>
+          <p:cNvPr id="19" name="Shape 14"/>
+          <p:cNvSpPr/>
+          <p:nvPr/>
+        </p:nvSpPr>
+        <p:spPr>
+          <a:xfrm>
+            <a:off x="548640" y="3337560"/>
             <a:ext cx="8046720" cy="658368"/>
           </a:xfrm>
           <a:prstGeom prst="rect">
@@ -3673,23 +4037,16 @@
           </a:solidFill>
           <a:ln/>
         </p:spPr>
-        <p:txBody>
-          <a:bodyPr/>
-          <a:lstStyle/>
-          <a:p>
-            <a:endParaRPr lang="en-US"/>
-          </a:p>
-        </p:txBody>
-      </p:sp>
-      <p:sp>
-        <p:nvSpPr>
-          <p:cNvPr id="10" name="Shape 7"/>
-          <p:cNvSpPr/>
-          <p:nvPr/>
-        </p:nvSpPr>
-        <p:spPr>
-          <a:xfrm>
-            <a:off x="548640" y="1783080"/>
+      </p:sp>
+      <p:sp>
+        <p:nvSpPr>
+          <p:cNvPr id="20" name="Shape 15"/>
+          <p:cNvSpPr/>
+          <p:nvPr/>
+        </p:nvSpPr>
+        <p:spPr>
+          <a:xfrm>
+            <a:off x="548640" y="3337560"/>
             <a:ext cx="54864" cy="658368"/>
           </a:xfrm>
           <a:prstGeom prst="rect">
@@ -3700,17 +4057,10 @@
           </a:solidFill>
           <a:ln/>
         </p:spPr>
-        <p:txBody>
-          <a:bodyPr/>
-          <a:lstStyle/>
-          <a:p>
-            <a:endParaRPr lang="en-US"/>
-          </a:p>
-        </p:txBody>
       </p:sp>
       <p:pic>
         <p:nvPicPr>
-          <p:cNvPr id="11" name="Image 1" descr="preencoded.png"/>
+          <p:cNvPr id="21" name="Image 3" descr="preencoded.png">    </p:cNvPr>
           <p:cNvPicPr>
             <a:picLocks noChangeAspect="1"/>
           </p:cNvPicPr>
@@ -3724,7 +4074,7 @@
         </p:blipFill>
         <p:spPr>
           <a:xfrm>
-            <a:off x="822960" y="1892808"/>
+            <a:off x="822960" y="3447288"/>
             <a:ext cx="411480" cy="411480"/>
           </a:xfrm>
           <a:prstGeom prst="rect">
@@ -3734,13 +4084,13 @@
       </p:pic>
       <p:sp>
         <p:nvSpPr>
-          <p:cNvPr id="12" name="Text 8"/>
-          <p:cNvSpPr/>
-          <p:nvPr/>
-        </p:nvSpPr>
-        <p:spPr>
-          <a:xfrm>
-            <a:off x="1417320" y="1819656"/>
+          <p:cNvPr id="22" name="Text 16"/>
+          <p:cNvSpPr/>
+          <p:nvPr/>
+        </p:nvSpPr>
+        <p:spPr>
+          <a:xfrm>
+            <a:off x="1417320" y="3374136"/>
             <a:ext cx="2926080" cy="274320"/>
           </a:xfrm>
           <a:prstGeom prst="rect">
@@ -3753,7 +4103,7 @@
           <a:bodyPr wrap="square" lIns="0" tIns="0" rIns="0" bIns="0" rtlCol="0" anchor="ctr"/>
           <a:lstStyle/>
           <a:p>
-            <a:pPr marL="0" indent="0">
+            <a:pPr indent="0" marL="0">
               <a:buNone/>
             </a:pPr>
             <a:r>
@@ -3765,7 +4115,7 @@
                 <a:ea typeface="Calibri" pitchFamily="34" charset="-122"/>
                 <a:cs typeface="Calibri" pitchFamily="34" charset="-120"/>
               </a:rPr>
-              <a:t>Opportunity Watchdog</a:t>
+              <a:t>Mock Interviewer</a:t>
             </a:r>
             <a:endParaRPr lang="en-US" sz="1300" dirty="0"/>
           </a:p>
@@ -3773,13 +4123,13 @@
       </p:sp>
       <p:sp>
         <p:nvSpPr>
-          <p:cNvPr id="13" name="Text 9"/>
-          <p:cNvSpPr/>
-          <p:nvPr/>
-        </p:nvSpPr>
-        <p:spPr>
-          <a:xfrm>
-            <a:off x="1417320" y="2075688"/>
+          <p:cNvPr id="23" name="Text 17"/>
+          <p:cNvSpPr/>
+          <p:nvPr/>
+        </p:nvSpPr>
+        <p:spPr>
+          <a:xfrm>
+            <a:off x="1417320" y="3630168"/>
             <a:ext cx="6949440" cy="329184"/>
           </a:xfrm>
           <a:prstGeom prst="rect">
@@ -3792,7 +4142,7 @@
           <a:bodyPr wrap="square" lIns="0" tIns="0" rIns="0" bIns="0" rtlCol="0" anchor="ctr"/>
           <a:lstStyle/>
           <a:p>
-            <a:pPr marL="0" indent="0">
+            <a:pPr indent="0" marL="0">
               <a:buNone/>
             </a:pPr>
             <a:r>
@@ -3804,7 +4154,7 @@
                 <a:ea typeface="Calibri" pitchFamily="34" charset="-122"/>
                 <a:cs typeface="Calibri" pitchFamily="34" charset="-120"/>
               </a:rPr>
-              <a:t>Bypasses aggregators to parse Greenhouse &amp; Lever ATS endpoints of target companies, flagging stealth postings instantly</a:t>
+              <a:t>Designs situational, coding &amp; system-architecture questions, executes dry runs, logs scorecards with readiness ratings</a:t>
             </a:r>
             <a:endParaRPr lang="en-US" sz="1050" dirty="0"/>
           </a:p>
@@ -3812,13 +4162,13 @@
       </p:sp>
       <p:sp>
         <p:nvSpPr>
-          <p:cNvPr id="14" name="Shape 10"/>
-          <p:cNvSpPr/>
-          <p:nvPr/>
-        </p:nvSpPr>
-        <p:spPr>
-          <a:xfrm>
-            <a:off x="548640" y="2560320"/>
+          <p:cNvPr id="24" name="Shape 18"/>
+          <p:cNvSpPr/>
+          <p:nvPr/>
+        </p:nvSpPr>
+        <p:spPr>
+          <a:xfrm>
+            <a:off x="548640" y="4114800"/>
             <a:ext cx="8046720" cy="658368"/>
           </a:xfrm>
           <a:prstGeom prst="rect">
@@ -3829,23 +4179,16 @@
           </a:solidFill>
           <a:ln/>
         </p:spPr>
-        <p:txBody>
-          <a:bodyPr/>
-          <a:lstStyle/>
-          <a:p>
-            <a:endParaRPr lang="en-US"/>
-          </a:p>
-        </p:txBody>
-      </p:sp>
-      <p:sp>
-        <p:nvSpPr>
-          <p:cNvPr id="15" name="Shape 11"/>
-          <p:cNvSpPr/>
-          <p:nvPr/>
-        </p:nvSpPr>
-        <p:spPr>
-          <a:xfrm>
-            <a:off x="548640" y="2560320"/>
+      </p:sp>
+      <p:sp>
+        <p:nvSpPr>
+          <p:cNvPr id="25" name="Shape 19"/>
+          <p:cNvSpPr/>
+          <p:nvPr/>
+        </p:nvSpPr>
+        <p:spPr>
+          <a:xfrm>
+            <a:off x="548640" y="4114800"/>
             <a:ext cx="54864" cy="658368"/>
           </a:xfrm>
           <a:prstGeom prst="rect">
@@ -3856,17 +4199,10 @@
           </a:solidFill>
           <a:ln/>
         </p:spPr>
-        <p:txBody>
-          <a:bodyPr/>
-          <a:lstStyle/>
-          <a:p>
-            <a:endParaRPr lang="en-US"/>
-          </a:p>
-        </p:txBody>
       </p:sp>
       <p:pic>
         <p:nvPicPr>
-          <p:cNvPr id="16" name="Image 2" descr="preencoded.png"/>
+          <p:cNvPr id="26" name="Image 4" descr="preencoded.png">    </p:cNvPr>
           <p:cNvPicPr>
             <a:picLocks noChangeAspect="1"/>
           </p:cNvPicPr>
@@ -3880,7 +4216,7 @@
         </p:blipFill>
         <p:spPr>
           <a:xfrm>
-            <a:off x="822960" y="2670048"/>
+            <a:off x="822960" y="4224528"/>
             <a:ext cx="411480" cy="411480"/>
           </a:xfrm>
           <a:prstGeom prst="rect">
@@ -3890,13 +4226,13 @@
       </p:pic>
       <p:sp>
         <p:nvSpPr>
-          <p:cNvPr id="17" name="Text 12"/>
-          <p:cNvSpPr/>
-          <p:nvPr/>
-        </p:nvSpPr>
-        <p:spPr>
-          <a:xfrm>
-            <a:off x="1417320" y="2596896"/>
+          <p:cNvPr id="27" name="Text 20"/>
+          <p:cNvSpPr/>
+          <p:nvPr/>
+        </p:nvSpPr>
+        <p:spPr>
+          <a:xfrm>
+            <a:off x="1417320" y="4151376"/>
             <a:ext cx="2926080" cy="274320"/>
           </a:xfrm>
           <a:prstGeom prst="rect">
@@ -3909,7 +4245,7 @@
           <a:bodyPr wrap="square" lIns="0" tIns="0" rIns="0" bIns="0" rtlCol="0" anchor="ctr"/>
           <a:lstStyle/>
           <a:p>
-            <a:pPr marL="0" indent="0">
+            <a:pPr indent="0" marL="0">
               <a:buNone/>
             </a:pPr>
             <a:r>
@@ -3921,318 +4257,6 @@
                 <a:ea typeface="Calibri" pitchFamily="34" charset="-122"/>
                 <a:cs typeface="Calibri" pitchFamily="34" charset="-120"/>
               </a:rPr>
-              <a:t>Agent Tutor</a:t>
-            </a:r>
-            <a:endParaRPr lang="en-US" sz="1300" dirty="0"/>
-          </a:p>
-        </p:txBody>
-      </p:sp>
-      <p:sp>
-        <p:nvSpPr>
-          <p:cNvPr id="18" name="Text 13"/>
-          <p:cNvSpPr/>
-          <p:nvPr/>
-        </p:nvSpPr>
-        <p:spPr>
-          <a:xfrm>
-            <a:off x="1417320" y="2852928"/>
-            <a:ext cx="6949440" cy="329184"/>
-          </a:xfrm>
-          <a:prstGeom prst="rect">
-            <a:avLst/>
-          </a:prstGeom>
-          <a:noFill/>
-          <a:ln/>
-        </p:spPr>
-        <p:txBody>
-          <a:bodyPr wrap="square" lIns="0" tIns="0" rIns="0" bIns="0" rtlCol="0" anchor="ctr"/>
-          <a:lstStyle/>
-          <a:p>
-            <a:pPr marL="0" indent="0">
-              <a:buNone/>
-            </a:pPr>
-            <a:r>
-              <a:rPr lang="en-US" sz="1050" dirty="0">
-                <a:solidFill>
-                  <a:srgbClr val="8B949E"/>
-                </a:solidFill>
-                <a:latin typeface="Calibri" pitchFamily="34" charset="0"/>
-                <a:ea typeface="Calibri" pitchFamily="34" charset="-122"/>
-                <a:cs typeface="Calibri" pitchFamily="34" charset="-120"/>
-              </a:rPr>
-              <a:t>Evaluates trending skills, retrieves arXiv papers &amp; GitHub repos, creates NotebookLM workspaces, generates audio podcasts &amp; study plans</a:t>
-            </a:r>
-            <a:endParaRPr lang="en-US" sz="1050" dirty="0"/>
-          </a:p>
-        </p:txBody>
-      </p:sp>
-      <p:sp>
-        <p:nvSpPr>
-          <p:cNvPr id="19" name="Shape 14"/>
-          <p:cNvSpPr/>
-          <p:nvPr/>
-        </p:nvSpPr>
-        <p:spPr>
-          <a:xfrm>
-            <a:off x="548640" y="3337560"/>
-            <a:ext cx="8046720" cy="658368"/>
-          </a:xfrm>
-          <a:prstGeom prst="rect">
-            <a:avLst/>
-          </a:prstGeom>
-          <a:solidFill>
-            <a:srgbClr val="21262D"/>
-          </a:solidFill>
-          <a:ln/>
-        </p:spPr>
-        <p:txBody>
-          <a:bodyPr/>
-          <a:lstStyle/>
-          <a:p>
-            <a:endParaRPr lang="en-US"/>
-          </a:p>
-        </p:txBody>
-      </p:sp>
-      <p:sp>
-        <p:nvSpPr>
-          <p:cNvPr id="20" name="Shape 15"/>
-          <p:cNvSpPr/>
-          <p:nvPr/>
-        </p:nvSpPr>
-        <p:spPr>
-          <a:xfrm>
-            <a:off x="548640" y="3337560"/>
-            <a:ext cx="54864" cy="658368"/>
-          </a:xfrm>
-          <a:prstGeom prst="rect">
-            <a:avLst/>
-          </a:prstGeom>
-          <a:solidFill>
-            <a:srgbClr val="00D4AA"/>
-          </a:solidFill>
-          <a:ln/>
-        </p:spPr>
-        <p:txBody>
-          <a:bodyPr/>
-          <a:lstStyle/>
-          <a:p>
-            <a:endParaRPr lang="en-US"/>
-          </a:p>
-        </p:txBody>
-      </p:sp>
-      <p:pic>
-        <p:nvPicPr>
-          <p:cNvPr id="21" name="Image 3" descr="preencoded.png"/>
-          <p:cNvPicPr>
-            <a:picLocks noChangeAspect="1"/>
-          </p:cNvPicPr>
-          <p:nvPr/>
-        </p:nvPicPr>
-        <p:blipFill>
-          <a:blip r:embed="rId6"/>
-          <a:stretch>
-            <a:fillRect/>
-          </a:stretch>
-        </p:blipFill>
-        <p:spPr>
-          <a:xfrm>
-            <a:off x="822960" y="3447288"/>
-            <a:ext cx="411480" cy="411480"/>
-          </a:xfrm>
-          <a:prstGeom prst="rect">
-            <a:avLst/>
-          </a:prstGeom>
-        </p:spPr>
-      </p:pic>
-      <p:sp>
-        <p:nvSpPr>
-          <p:cNvPr id="22" name="Text 16"/>
-          <p:cNvSpPr/>
-          <p:nvPr/>
-        </p:nvSpPr>
-        <p:spPr>
-          <a:xfrm>
-            <a:off x="1417320" y="3374136"/>
-            <a:ext cx="2926080" cy="274320"/>
-          </a:xfrm>
-          <a:prstGeom prst="rect">
-            <a:avLst/>
-          </a:prstGeom>
-          <a:noFill/>
-          <a:ln/>
-        </p:spPr>
-        <p:txBody>
-          <a:bodyPr wrap="square" lIns="0" tIns="0" rIns="0" bIns="0" rtlCol="0" anchor="ctr"/>
-          <a:lstStyle/>
-          <a:p>
-            <a:pPr marL="0" indent="0">
-              <a:buNone/>
-            </a:pPr>
-            <a:r>
-              <a:rPr lang="en-US" sz="1300" b="1" dirty="0">
-                <a:solidFill>
-                  <a:srgbClr val="00D4AA"/>
-                </a:solidFill>
-                <a:latin typeface="Calibri" pitchFamily="34" charset="0"/>
-                <a:ea typeface="Calibri" pitchFamily="34" charset="-122"/>
-                <a:cs typeface="Calibri" pitchFamily="34" charset="-120"/>
-              </a:rPr>
-              <a:t>Mock Interviewer</a:t>
-            </a:r>
-            <a:endParaRPr lang="en-US" sz="1300" dirty="0"/>
-          </a:p>
-        </p:txBody>
-      </p:sp>
-      <p:sp>
-        <p:nvSpPr>
-          <p:cNvPr id="23" name="Text 17"/>
-          <p:cNvSpPr/>
-          <p:nvPr/>
-        </p:nvSpPr>
-        <p:spPr>
-          <a:xfrm>
-            <a:off x="1417320" y="3630168"/>
-            <a:ext cx="6949440" cy="329184"/>
-          </a:xfrm>
-          <a:prstGeom prst="rect">
-            <a:avLst/>
-          </a:prstGeom>
-          <a:noFill/>
-          <a:ln/>
-        </p:spPr>
-        <p:txBody>
-          <a:bodyPr wrap="square" lIns="0" tIns="0" rIns="0" bIns="0" rtlCol="0" anchor="ctr"/>
-          <a:lstStyle/>
-          <a:p>
-            <a:pPr marL="0" indent="0">
-              <a:buNone/>
-            </a:pPr>
-            <a:r>
-              <a:rPr lang="en-US" sz="1050" dirty="0">
-                <a:solidFill>
-                  <a:srgbClr val="8B949E"/>
-                </a:solidFill>
-                <a:latin typeface="Calibri" pitchFamily="34" charset="0"/>
-                <a:ea typeface="Calibri" pitchFamily="34" charset="-122"/>
-                <a:cs typeface="Calibri" pitchFamily="34" charset="-120"/>
-              </a:rPr>
-              <a:t>Designs situational, coding &amp; system-architecture questions, executes dry runs, logs scorecards with readiness ratings</a:t>
-            </a:r>
-            <a:endParaRPr lang="en-US" sz="1050" dirty="0"/>
-          </a:p>
-        </p:txBody>
-      </p:sp>
-      <p:sp>
-        <p:nvSpPr>
-          <p:cNvPr id="24" name="Shape 18"/>
-          <p:cNvSpPr/>
-          <p:nvPr/>
-        </p:nvSpPr>
-        <p:spPr>
-          <a:xfrm>
-            <a:off x="548640" y="4114800"/>
-            <a:ext cx="8046720" cy="658368"/>
-          </a:xfrm>
-          <a:prstGeom prst="rect">
-            <a:avLst/>
-          </a:prstGeom>
-          <a:solidFill>
-            <a:srgbClr val="21262D"/>
-          </a:solidFill>
-          <a:ln/>
-        </p:spPr>
-        <p:txBody>
-          <a:bodyPr/>
-          <a:lstStyle/>
-          <a:p>
-            <a:endParaRPr lang="en-US"/>
-          </a:p>
-        </p:txBody>
-      </p:sp>
-      <p:sp>
-        <p:nvSpPr>
-          <p:cNvPr id="25" name="Shape 19"/>
-          <p:cNvSpPr/>
-          <p:nvPr/>
-        </p:nvSpPr>
-        <p:spPr>
-          <a:xfrm>
-            <a:off x="548640" y="4114800"/>
-            <a:ext cx="54864" cy="658368"/>
-          </a:xfrm>
-          <a:prstGeom prst="rect">
-            <a:avLst/>
-          </a:prstGeom>
-          <a:solidFill>
-            <a:srgbClr val="00D4AA"/>
-          </a:solidFill>
-          <a:ln/>
-        </p:spPr>
-        <p:txBody>
-          <a:bodyPr/>
-          <a:lstStyle/>
-          <a:p>
-            <a:endParaRPr lang="en-US"/>
-          </a:p>
-        </p:txBody>
-      </p:sp>
-      <p:pic>
-        <p:nvPicPr>
-          <p:cNvPr id="26" name="Image 4" descr="preencoded.png"/>
-          <p:cNvPicPr>
-            <a:picLocks noChangeAspect="1"/>
-          </p:cNvPicPr>
-          <p:nvPr/>
-        </p:nvPicPr>
-        <p:blipFill>
-          <a:blip r:embed="rId7"/>
-          <a:stretch>
-            <a:fillRect/>
-          </a:stretch>
-        </p:blipFill>
-        <p:spPr>
-          <a:xfrm>
-            <a:off x="822960" y="4224528"/>
-            <a:ext cx="411480" cy="411480"/>
-          </a:xfrm>
-          <a:prstGeom prst="rect">
-            <a:avLst/>
-          </a:prstGeom>
-        </p:spPr>
-      </p:pic>
-      <p:sp>
-        <p:nvSpPr>
-          <p:cNvPr id="27" name="Text 20"/>
-          <p:cNvSpPr/>
-          <p:nvPr/>
-        </p:nvSpPr>
-        <p:spPr>
-          <a:xfrm>
-            <a:off x="1417320" y="4151376"/>
-            <a:ext cx="2926080" cy="274320"/>
-          </a:xfrm>
-          <a:prstGeom prst="rect">
-            <a:avLst/>
-          </a:prstGeom>
-          <a:noFill/>
-          <a:ln/>
-        </p:spPr>
-        <p:txBody>
-          <a:bodyPr wrap="square" lIns="0" tIns="0" rIns="0" bIns="0" rtlCol="0" anchor="ctr"/>
-          <a:lstStyle/>
-          <a:p>
-            <a:pPr marL="0" indent="0">
-              <a:buNone/>
-            </a:pPr>
-            <a:r>
-              <a:rPr lang="en-US" sz="1300" b="1" dirty="0">
-                <a:solidFill>
-                  <a:srgbClr val="00D4AA"/>
-                </a:solidFill>
-                <a:latin typeface="Calibri" pitchFamily="34" charset="0"/>
-                <a:ea typeface="Calibri" pitchFamily="34" charset="-122"/>
-                <a:cs typeface="Calibri" pitchFamily="34" charset="-120"/>
-              </a:rPr>
               <a:t>Portfolio Architect</a:t>
             </a:r>
             <a:endParaRPr lang="en-US" sz="1300" dirty="0"/>
@@ -4260,7 +4284,7 @@
           <a:bodyPr wrap="square" lIns="0" tIns="0" rIns="0" bIns="0" rtlCol="0" anchor="ctr"/>
           <a:lstStyle/>
           <a:p>
-            <a:pPr marL="0" indent="0">
+            <a:pPr indent="0" marL="0">
               <a:buNone/>
             </a:pPr>
             <a:r>
@@ -4294,7 +4318,6 @@
         <a:solidFill>
           <a:srgbClr val="0D1117"/>
         </a:solidFill>
-        <a:effectLst/>
       </p:bgPr>
     </p:bg>
     <p:spTree>
@@ -4330,13 +4353,6 @@
           </a:solidFill>
           <a:ln/>
         </p:spPr>
-        <p:txBody>
-          <a:bodyPr/>
-          <a:lstStyle/>
-          <a:p>
-            <a:endParaRPr lang="en-US"/>
-          </a:p>
-        </p:txBody>
       </p:sp>
       <p:sp>
         <p:nvSpPr>
@@ -4346,8 +4362,8 @@
         </p:nvSpPr>
         <p:spPr>
           <a:xfrm>
-            <a:off x="548640" y="320040"/>
-            <a:ext cx="8229600" cy="548640"/>
+            <a:off x="548640" y="228600"/>
+            <a:ext cx="8229600" cy="457200"/>
           </a:xfrm>
           <a:prstGeom prst="rect">
             <a:avLst/>
@@ -4359,7 +4375,7 @@
           <a:bodyPr wrap="square" lIns="0" tIns="0" rIns="0" bIns="0" rtlCol="0" anchor="ctr"/>
           <a:lstStyle/>
           <a:p>
-            <a:pPr marL="0" indent="0">
+            <a:pPr indent="0" marL="0">
               <a:buNone/>
             </a:pPr>
             <a:r>
@@ -4371,7 +4387,7 @@
                 <a:ea typeface="Georgia" pitchFamily="34" charset="-122"/>
                 <a:cs typeface="Georgia" pitchFamily="34" charset="-120"/>
               </a:rPr>
-              <a:t>Architecture: The Hybrid Cloud Orchestrator</a:t>
+              <a:t>Unified Agentic Workflow &amp; Architecture</a:t>
             </a:r>
             <a:endParaRPr lang="en-US" sz="2600" dirty="0"/>
           </a:p>
@@ -4379,48 +4395,80 @@
       </p:sp>
       <p:sp>
         <p:nvSpPr>
-          <p:cNvPr id="4" name="Shape 2"/>
-          <p:cNvSpPr/>
-          <p:nvPr/>
-        </p:nvSpPr>
-        <p:spPr>
-          <a:xfrm>
-            <a:off x="548640" y="1097280"/>
-            <a:ext cx="8046720" cy="594360"/>
+          <p:cNvPr id="4" name="Text 2"/>
+          <p:cNvSpPr/>
+          <p:nvPr/>
+        </p:nvSpPr>
+        <p:spPr>
+          <a:xfrm>
+            <a:off x="548640" y="685800"/>
+            <a:ext cx="8046720" cy="320040"/>
+          </a:xfrm>
+          <a:prstGeom prst="rect">
+            <a:avLst/>
+          </a:prstGeom>
+          <a:noFill/>
+          <a:ln/>
+        </p:spPr>
+        <p:txBody>
+          <a:bodyPr wrap="square" lIns="0" tIns="0" rIns="0" bIns="0" rtlCol="0" anchor="ctr"/>
+          <a:lstStyle/>
+          <a:p>
+            <a:pPr indent="0" marL="0">
+              <a:buNone/>
+            </a:pPr>
+            <a:r>
+              <a:rPr lang="en-US" sz="1100" dirty="0">
+                <a:solidFill>
+                  <a:srgbClr val="8B949E"/>
+                </a:solidFill>
+                <a:latin typeface="Calibri" pitchFamily="34" charset="0"/>
+                <a:ea typeface="Calibri" pitchFamily="34" charset="-122"/>
+                <a:cs typeface="Calibri" pitchFamily="34" charset="-120"/>
+              </a:rPr>
+              <a:t>GitHub Actions Cron triggers 5 autonomous agents coordinating via SQLite persistence (themes.db) with Dropbox round-trip sync.</a:t>
+            </a:r>
+            <a:endParaRPr lang="en-US" sz="1100" dirty="0"/>
+          </a:p>
+        </p:txBody>
+      </p:sp>
+      <p:sp>
+        <p:nvSpPr>
+          <p:cNvPr id="5" name="Shape 3"/>
+          <p:cNvSpPr/>
+          <p:nvPr/>
+        </p:nvSpPr>
+        <p:spPr>
+          <a:xfrm>
+            <a:off x="3291840" y="1097280"/>
+            <a:ext cx="2560320" cy="457200"/>
           </a:xfrm>
           <a:prstGeom prst="rect">
             <a:avLst/>
           </a:prstGeom>
           <a:solidFill>
-            <a:srgbClr val="1E2761"/>
+            <a:srgbClr val="1A3A5C"/>
           </a:solidFill>
           <a:ln/>
           <a:effectLst>
-            <a:outerShdw blurRad="101600" dist="38100" dir="8100000" algn="bl" rotWithShape="0">
+            <a:outerShdw sx="100000" sy="100000" kx="0" ky="0" algn="bl" rotWithShape="0" blurRad="101600" dist="38100" dir="8100000">
               <a:srgbClr val="000000">
                 <a:alpha val="35000"/>
               </a:srgbClr>
             </a:outerShdw>
           </a:effectLst>
         </p:spPr>
-        <p:txBody>
-          <a:bodyPr/>
-          <a:lstStyle/>
-          <a:p>
-            <a:endParaRPr lang="en-US"/>
-          </a:p>
-        </p:txBody>
-      </p:sp>
-      <p:sp>
-        <p:nvSpPr>
-          <p:cNvPr id="5" name="Text 3"/>
-          <p:cNvSpPr/>
-          <p:nvPr/>
-        </p:nvSpPr>
-        <p:spPr>
-          <a:xfrm>
-            <a:off x="822960" y="1152144"/>
-            <a:ext cx="2743200" cy="256032"/>
+      </p:sp>
+      <p:sp>
+        <p:nvSpPr>
+          <p:cNvPr id="6" name="Text 4"/>
+          <p:cNvSpPr/>
+          <p:nvPr/>
+        </p:nvSpPr>
+        <p:spPr>
+          <a:xfrm>
+            <a:off x="3291840" y="1097280"/>
+            <a:ext cx="2560320" cy="457200"/>
           </a:xfrm>
           <a:prstGeom prst="rect">
             <a:avLst/>
@@ -4432,11 +4480,11 @@
           <a:bodyPr wrap="square" lIns="0" tIns="0" rIns="0" bIns="0" rtlCol="0" anchor="ctr"/>
           <a:lstStyle/>
           <a:p>
-            <a:pPr marL="0" indent="0">
-              <a:buNone/>
-            </a:pPr>
-            <a:r>
-              <a:rPr lang="en-US" sz="1300" b="1" dirty="0">
+            <a:pPr algn="ctr" indent="0" marL="0">
+              <a:buNone/>
+            </a:pPr>
+            <a:r>
+              <a:rPr lang="en-US" sz="1000" b="1" dirty="0">
                 <a:solidFill>
                   <a:srgbClr val="00D4AA"/>
                 </a:solidFill>
@@ -4444,48 +4492,9 @@
                 <a:ea typeface="Calibri" pitchFamily="34" charset="-122"/>
                 <a:cs typeface="Calibri" pitchFamily="34" charset="-120"/>
               </a:rPr>
-              <a:t>Scheduling Layer</a:t>
-            </a:r>
-            <a:endParaRPr lang="en-US" sz="1300" dirty="0"/>
-          </a:p>
-        </p:txBody>
-      </p:sp>
-      <p:sp>
-        <p:nvSpPr>
-          <p:cNvPr id="6" name="Text 4"/>
-          <p:cNvSpPr/>
-          <p:nvPr/>
-        </p:nvSpPr>
-        <p:spPr>
-          <a:xfrm>
-            <a:off x="822960" y="1408176"/>
-            <a:ext cx="7498080" cy="228600"/>
-          </a:xfrm>
-          <a:prstGeom prst="rect">
-            <a:avLst/>
-          </a:prstGeom>
-          <a:noFill/>
-          <a:ln/>
-        </p:spPr>
-        <p:txBody>
-          <a:bodyPr wrap="square" lIns="0" tIns="0" rIns="0" bIns="0" rtlCol="0" anchor="ctr"/>
-          <a:lstStyle/>
-          <a:p>
-            <a:pPr marL="0" indent="0">
-              <a:buNone/>
-            </a:pPr>
-            <a:r>
-              <a:rPr lang="en-US" sz="1100" dirty="0">
-                <a:solidFill>
-                  <a:srgbClr val="F0F6FC"/>
-                </a:solidFill>
-                <a:latin typeface="Calibri" pitchFamily="34" charset="0"/>
-                <a:ea typeface="Calibri" pitchFamily="34" charset="-122"/>
-                <a:cs typeface="Calibri" pitchFamily="34" charset="-120"/>
-              </a:rPr>
-              <a:t>GitHub Actions Cron  |  100% Cloud Uptime</a:t>
-            </a:r>
-            <a:endParaRPr lang="en-US" sz="1100" dirty="0"/>
+              <a:t>Weekly GitHub Actions Cron</a:t>
+            </a:r>
+            <a:endParaRPr lang="en-US" sz="1000" dirty="0"/>
           </a:p>
         </p:txBody>
       </p:sp>
@@ -4497,31 +4506,24 @@
         </p:nvSpPr>
         <p:spPr>
           <a:xfrm>
-            <a:off x="548640" y="1828800"/>
-            <a:ext cx="8046720" cy="594360"/>
+            <a:off x="320040" y="1874520"/>
+            <a:ext cx="1508760" cy="640080"/>
           </a:xfrm>
           <a:prstGeom prst="rect">
             <a:avLst/>
           </a:prstGeom>
           <a:solidFill>
-            <a:srgbClr val="1A3A5C"/>
+            <a:srgbClr val="3B1566"/>
           </a:solidFill>
           <a:ln/>
           <a:effectLst>
-            <a:outerShdw blurRad="101600" dist="38100" dir="8100000" algn="bl" rotWithShape="0">
+            <a:outerShdw sx="100000" sy="100000" kx="0" ky="0" algn="bl" rotWithShape="0" blurRad="101600" dist="38100" dir="8100000">
               <a:srgbClr val="000000">
                 <a:alpha val="35000"/>
               </a:srgbClr>
             </a:outerShdw>
           </a:effectLst>
         </p:spPr>
-        <p:txBody>
-          <a:bodyPr/>
-          <a:lstStyle/>
-          <a:p>
-            <a:endParaRPr lang="en-US"/>
-          </a:p>
-        </p:txBody>
       </p:sp>
       <p:sp>
         <p:nvSpPr>
@@ -4531,8 +4533,8 @@
         </p:nvSpPr>
         <p:spPr>
           <a:xfrm>
-            <a:off x="822960" y="1883664"/>
-            <a:ext cx="2743200" cy="256032"/>
+            <a:off x="320040" y="1874520"/>
+            <a:ext cx="1508760" cy="640080"/>
           </a:xfrm>
           <a:prstGeom prst="rect">
             <a:avLst/>
@@ -4544,107 +4546,78 @@
           <a:bodyPr wrap="square" lIns="0" tIns="0" rIns="0" bIns="0" rtlCol="0" anchor="ctr"/>
           <a:lstStyle/>
           <a:p>
-            <a:pPr marL="0" indent="0">
-              <a:buNone/>
-            </a:pPr>
-            <a:r>
-              <a:rPr lang="en-US" sz="1300" b="1" dirty="0">
-                <a:solidFill>
-                  <a:srgbClr val="00D4AA"/>
+            <a:pPr algn="ctr" indent="0" marL="0">
+              <a:buNone/>
+            </a:pPr>
+            <a:r>
+              <a:rPr lang="en-US" sz="900" b="1" dirty="0">
+                <a:solidFill>
+                  <a:srgbClr val="FFFFFF"/>
                 </a:solidFill>
                 <a:latin typeface="Calibri" pitchFamily="34" charset="0"/>
                 <a:ea typeface="Calibri" pitchFamily="34" charset="-122"/>
                 <a:cs typeface="Calibri" pitchFamily="34" charset="-120"/>
               </a:rPr>
-              <a:t>Orchestration Layer</a:t>
-            </a:r>
-            <a:endParaRPr lang="en-US" sz="1300" dirty="0"/>
-          </a:p>
-        </p:txBody>
-      </p:sp>
-      <p:sp>
-        <p:nvSpPr>
-          <p:cNvPr id="9" name="Text 7"/>
-          <p:cNvSpPr/>
-          <p:nvPr/>
-        </p:nvSpPr>
-        <p:spPr>
-          <a:xfrm>
-            <a:off x="822960" y="2139696"/>
-            <a:ext cx="7498080" cy="228600"/>
-          </a:xfrm>
-          <a:prstGeom prst="rect">
-            <a:avLst/>
-          </a:prstGeom>
-          <a:noFill/>
-          <a:ln/>
-        </p:spPr>
-        <p:txBody>
-          <a:bodyPr wrap="square" lIns="0" tIns="0" rIns="0" bIns="0" rtlCol="0" anchor="ctr"/>
-          <a:lstStyle/>
-          <a:p>
-            <a:pPr marL="0" indent="0">
-              <a:buNone/>
-            </a:pPr>
-            <a:r>
-              <a:rPr lang="en-US" sz="1100" dirty="0">
-                <a:solidFill>
-                  <a:srgbClr val="F0F6FC"/>
+              <a:t>Job Scanner</a:t>
+            </a:r>
+            <a:endParaRPr lang="en-US" sz="900" dirty="0"/>
+          </a:p>
+          <a:p>
+            <a:pPr algn="ctr" indent="0" marL="0">
+              <a:buNone/>
+            </a:pPr>
+            <a:r>
+              <a:rPr lang="en-US" sz="900" b="1" dirty="0">
+                <a:solidFill>
+                  <a:srgbClr val="FFFFFF"/>
                 </a:solidFill>
                 <a:latin typeface="Calibri" pitchFamily="34" charset="0"/>
                 <a:ea typeface="Calibri" pitchFamily="34" charset="-122"/>
                 <a:cs typeface="Calibri" pitchFamily="34" charset="-120"/>
               </a:rPr>
-              <a:t>Config-Driven Python Engine  |  Model Factory (Claude / Gemini)</a:t>
-            </a:r>
-            <a:endParaRPr lang="en-US" sz="1100" dirty="0"/>
-          </a:p>
-        </p:txBody>
-      </p:sp>
-      <p:sp>
-        <p:nvSpPr>
-          <p:cNvPr id="10" name="Shape 8"/>
-          <p:cNvSpPr/>
-          <p:nvPr/>
-        </p:nvSpPr>
-        <p:spPr>
-          <a:xfrm>
-            <a:off x="548640" y="2560320"/>
-            <a:ext cx="8046720" cy="594360"/>
+              <a:t>&amp; Resume Tuner</a:t>
+            </a:r>
+            <a:endParaRPr lang="en-US" sz="900" dirty="0"/>
+          </a:p>
+        </p:txBody>
+      </p:sp>
+      <p:sp>
+        <p:nvSpPr>
+          <p:cNvPr id="9" name="Shape 7"/>
+          <p:cNvSpPr/>
+          <p:nvPr/>
+        </p:nvSpPr>
+        <p:spPr>
+          <a:xfrm>
+            <a:off x="2011680" y="1874520"/>
+            <a:ext cx="1508760" cy="640080"/>
           </a:xfrm>
           <a:prstGeom prst="rect">
             <a:avLst/>
           </a:prstGeom>
           <a:solidFill>
-            <a:srgbClr val="1D4D6E"/>
+            <a:srgbClr val="3B1566"/>
           </a:solidFill>
           <a:ln/>
           <a:effectLst>
-            <a:outerShdw blurRad="101600" dist="38100" dir="8100000" algn="bl" rotWithShape="0">
+            <a:outerShdw sx="100000" sy="100000" kx="0" ky="0" algn="bl" rotWithShape="0" blurRad="101600" dist="38100" dir="8100000">
               <a:srgbClr val="000000">
                 <a:alpha val="35000"/>
               </a:srgbClr>
             </a:outerShdw>
           </a:effectLst>
         </p:spPr>
-        <p:txBody>
-          <a:bodyPr/>
-          <a:lstStyle/>
-          <a:p>
-            <a:endParaRPr lang="en-US"/>
-          </a:p>
-        </p:txBody>
-      </p:sp>
-      <p:sp>
-        <p:nvSpPr>
-          <p:cNvPr id="11" name="Text 9"/>
-          <p:cNvSpPr/>
-          <p:nvPr/>
-        </p:nvSpPr>
-        <p:spPr>
-          <a:xfrm>
-            <a:off x="822960" y="2615184"/>
-            <a:ext cx="2743200" cy="256032"/>
+      </p:sp>
+      <p:sp>
+        <p:nvSpPr>
+          <p:cNvPr id="10" name="Text 8"/>
+          <p:cNvSpPr/>
+          <p:nvPr/>
+        </p:nvSpPr>
+        <p:spPr>
+          <a:xfrm>
+            <a:off x="2011680" y="1874520"/>
+            <a:ext cx="1508760" cy="640080"/>
           </a:xfrm>
           <a:prstGeom prst="rect">
             <a:avLst/>
@@ -4656,107 +4629,78 @@
           <a:bodyPr wrap="square" lIns="0" tIns="0" rIns="0" bIns="0" rtlCol="0" anchor="ctr"/>
           <a:lstStyle/>
           <a:p>
-            <a:pPr marL="0" indent="0">
-              <a:buNone/>
-            </a:pPr>
-            <a:r>
-              <a:rPr lang="en-US" sz="1300" b="1" dirty="0">
-                <a:solidFill>
-                  <a:srgbClr val="00D4AA"/>
+            <a:pPr algn="ctr" indent="0" marL="0">
+              <a:buNone/>
+            </a:pPr>
+            <a:r>
+              <a:rPr lang="en-US" sz="900" b="1" dirty="0">
+                <a:solidFill>
+                  <a:srgbClr val="FFFFFF"/>
                 </a:solidFill>
                 <a:latin typeface="Calibri" pitchFamily="34" charset="0"/>
                 <a:ea typeface="Calibri" pitchFamily="34" charset="-122"/>
                 <a:cs typeface="Calibri" pitchFamily="34" charset="-120"/>
               </a:rPr>
-              <a:t>Ingestion Layer</a:t>
-            </a:r>
-            <a:endParaRPr lang="en-US" sz="1300" dirty="0"/>
-          </a:p>
-        </p:txBody>
-      </p:sp>
-      <p:sp>
-        <p:nvSpPr>
-          <p:cNvPr id="12" name="Text 10"/>
-          <p:cNvSpPr/>
-          <p:nvPr/>
-        </p:nvSpPr>
-        <p:spPr>
-          <a:xfrm>
-            <a:off x="822960" y="2871216"/>
-            <a:ext cx="7498080" cy="228600"/>
-          </a:xfrm>
-          <a:prstGeom prst="rect">
-            <a:avLst/>
-          </a:prstGeom>
-          <a:noFill/>
-          <a:ln/>
-        </p:spPr>
-        <p:txBody>
-          <a:bodyPr wrap="square" lIns="0" tIns="0" rIns="0" bIns="0" rtlCol="0" anchor="ctr"/>
-          <a:lstStyle/>
-          <a:p>
-            <a:pPr marL="0" indent="0">
-              <a:buNone/>
-            </a:pPr>
-            <a:r>
-              <a:rPr lang="en-US" sz="1100" dirty="0">
-                <a:solidFill>
-                  <a:srgbClr val="F0F6FC"/>
+              <a:t>Opportunity</a:t>
+            </a:r>
+            <a:endParaRPr lang="en-US" sz="900" dirty="0"/>
+          </a:p>
+          <a:p>
+            <a:pPr algn="ctr" indent="0" marL="0">
+              <a:buNone/>
+            </a:pPr>
+            <a:r>
+              <a:rPr lang="en-US" sz="900" b="1" dirty="0">
+                <a:solidFill>
+                  <a:srgbClr val="FFFFFF"/>
                 </a:solidFill>
                 <a:latin typeface="Calibri" pitchFamily="34" charset="0"/>
                 <a:ea typeface="Calibri" pitchFamily="34" charset="-122"/>
                 <a:cs typeface="Calibri" pitchFamily="34" charset="-120"/>
               </a:rPr>
-              <a:t>Apify Managed Scrapers  |  Rotating Proxies  |  OAuth Helpers</a:t>
-            </a:r>
-            <a:endParaRPr lang="en-US" sz="1100" dirty="0"/>
-          </a:p>
-        </p:txBody>
-      </p:sp>
-      <p:sp>
-        <p:nvSpPr>
-          <p:cNvPr id="13" name="Shape 11"/>
-          <p:cNvSpPr/>
-          <p:nvPr/>
-        </p:nvSpPr>
-        <p:spPr>
-          <a:xfrm>
-            <a:off x="548640" y="3291840"/>
-            <a:ext cx="8046720" cy="594360"/>
+              <a:t>Watchdog</a:t>
+            </a:r>
+            <a:endParaRPr lang="en-US" sz="900" dirty="0"/>
+          </a:p>
+        </p:txBody>
+      </p:sp>
+      <p:sp>
+        <p:nvSpPr>
+          <p:cNvPr id="11" name="Shape 9"/>
+          <p:cNvSpPr/>
+          <p:nvPr/>
+        </p:nvSpPr>
+        <p:spPr>
+          <a:xfrm>
+            <a:off x="3703320" y="1874520"/>
+            <a:ext cx="1508760" cy="640080"/>
           </a:xfrm>
           <a:prstGeom prst="rect">
             <a:avLst/>
           </a:prstGeom>
           <a:solidFill>
-            <a:srgbClr val="1F5F80"/>
+            <a:srgbClr val="3B1566"/>
           </a:solidFill>
           <a:ln/>
           <a:effectLst>
-            <a:outerShdw blurRad="101600" dist="38100" dir="8100000" algn="bl" rotWithShape="0">
+            <a:outerShdw sx="100000" sy="100000" kx="0" ky="0" algn="bl" rotWithShape="0" blurRad="101600" dist="38100" dir="8100000">
               <a:srgbClr val="000000">
                 <a:alpha val="35000"/>
               </a:srgbClr>
             </a:outerShdw>
           </a:effectLst>
         </p:spPr>
-        <p:txBody>
-          <a:bodyPr/>
-          <a:lstStyle/>
-          <a:p>
-            <a:endParaRPr lang="en-US"/>
-          </a:p>
-        </p:txBody>
-      </p:sp>
-      <p:sp>
-        <p:nvSpPr>
-          <p:cNvPr id="14" name="Text 12"/>
-          <p:cNvSpPr/>
-          <p:nvPr/>
-        </p:nvSpPr>
-        <p:spPr>
-          <a:xfrm>
-            <a:off x="822960" y="3346704"/>
-            <a:ext cx="2743200" cy="256032"/>
+      </p:sp>
+      <p:sp>
+        <p:nvSpPr>
+          <p:cNvPr id="12" name="Text 10"/>
+          <p:cNvSpPr/>
+          <p:nvPr/>
+        </p:nvSpPr>
+        <p:spPr>
+          <a:xfrm>
+            <a:off x="3703320" y="1874520"/>
+            <a:ext cx="1508760" cy="640080"/>
           </a:xfrm>
           <a:prstGeom prst="rect">
             <a:avLst/>
@@ -4768,107 +4712,78 @@
           <a:bodyPr wrap="square" lIns="0" tIns="0" rIns="0" bIns="0" rtlCol="0" anchor="ctr"/>
           <a:lstStyle/>
           <a:p>
-            <a:pPr marL="0" indent="0">
-              <a:buNone/>
-            </a:pPr>
-            <a:r>
-              <a:rPr lang="en-US" sz="1300" b="1" dirty="0">
-                <a:solidFill>
-                  <a:srgbClr val="00D4AA"/>
+            <a:pPr algn="ctr" indent="0" marL="0">
+              <a:buNone/>
+            </a:pPr>
+            <a:r>
+              <a:rPr lang="en-US" sz="900" b="1" dirty="0">
+                <a:solidFill>
+                  <a:srgbClr val="FFFFFF"/>
                 </a:solidFill>
                 <a:latin typeface="Calibri" pitchFamily="34" charset="0"/>
                 <a:ea typeface="Calibri" pitchFamily="34" charset="-122"/>
                 <a:cs typeface="Calibri" pitchFamily="34" charset="-120"/>
               </a:rPr>
-              <a:t>Persistence Layer</a:t>
-            </a:r>
-            <a:endParaRPr lang="en-US" sz="1300" dirty="0"/>
-          </a:p>
-        </p:txBody>
-      </p:sp>
-      <p:sp>
-        <p:nvSpPr>
-          <p:cNvPr id="15" name="Text 13"/>
-          <p:cNvSpPr/>
-          <p:nvPr/>
-        </p:nvSpPr>
-        <p:spPr>
-          <a:xfrm>
-            <a:off x="822960" y="3602736"/>
-            <a:ext cx="7498080" cy="228600"/>
-          </a:xfrm>
-          <a:prstGeom prst="rect">
-            <a:avLst/>
-          </a:prstGeom>
-          <a:noFill/>
-          <a:ln/>
-        </p:spPr>
-        <p:txBody>
-          <a:bodyPr wrap="square" lIns="0" tIns="0" rIns="0" bIns="0" rtlCol="0" anchor="ctr"/>
-          <a:lstStyle/>
-          <a:p>
-            <a:pPr marL="0" indent="0">
-              <a:buNone/>
-            </a:pPr>
-            <a:r>
-              <a:rPr lang="en-US" sz="1100" dirty="0">
-                <a:solidFill>
-                  <a:srgbClr val="F0F6FC"/>
+              <a:t>Agent</a:t>
+            </a:r>
+            <a:endParaRPr lang="en-US" sz="900" dirty="0"/>
+          </a:p>
+          <a:p>
+            <a:pPr algn="ctr" indent="0" marL="0">
+              <a:buNone/>
+            </a:pPr>
+            <a:r>
+              <a:rPr lang="en-US" sz="900" b="1" dirty="0">
+                <a:solidFill>
+                  <a:srgbClr val="FFFFFF"/>
                 </a:solidFill>
                 <a:latin typeface="Calibri" pitchFamily="34" charset="0"/>
                 <a:ea typeface="Calibri" pitchFamily="34" charset="-122"/>
                 <a:cs typeface="Calibri" pitchFamily="34" charset="-120"/>
               </a:rPr>
-              <a:t>SQLite (themes.db)  |  Dropbox Round-Trip Sync  |  Historical State</a:t>
-            </a:r>
-            <a:endParaRPr lang="en-US" sz="1100" dirty="0"/>
-          </a:p>
-        </p:txBody>
-      </p:sp>
-      <p:sp>
-        <p:nvSpPr>
-          <p:cNvPr id="16" name="Shape 14"/>
-          <p:cNvSpPr/>
-          <p:nvPr/>
-        </p:nvSpPr>
-        <p:spPr>
-          <a:xfrm>
-            <a:off x="548640" y="4023360"/>
-            <a:ext cx="8046720" cy="594360"/>
+              <a:t>Tutor</a:t>
+            </a:r>
+            <a:endParaRPr lang="en-US" sz="900" dirty="0"/>
+          </a:p>
+        </p:txBody>
+      </p:sp>
+      <p:sp>
+        <p:nvSpPr>
+          <p:cNvPr id="13" name="Shape 11"/>
+          <p:cNvSpPr/>
+          <p:nvPr/>
+        </p:nvSpPr>
+        <p:spPr>
+          <a:xfrm>
+            <a:off x="5394960" y="1874520"/>
+            <a:ext cx="1508760" cy="640080"/>
           </a:xfrm>
           <a:prstGeom prst="rect">
             <a:avLst/>
           </a:prstGeom>
           <a:solidFill>
-            <a:srgbClr val="217292"/>
+            <a:srgbClr val="3B1566"/>
           </a:solidFill>
           <a:ln/>
           <a:effectLst>
-            <a:outerShdw blurRad="101600" dist="38100" dir="8100000" algn="bl" rotWithShape="0">
+            <a:outerShdw sx="100000" sy="100000" kx="0" ky="0" algn="bl" rotWithShape="0" blurRad="101600" dist="38100" dir="8100000">
               <a:srgbClr val="000000">
                 <a:alpha val="35000"/>
               </a:srgbClr>
             </a:outerShdw>
           </a:effectLst>
         </p:spPr>
-        <p:txBody>
-          <a:bodyPr/>
-          <a:lstStyle/>
-          <a:p>
-            <a:endParaRPr lang="en-US"/>
-          </a:p>
-        </p:txBody>
-      </p:sp>
-      <p:sp>
-        <p:nvSpPr>
-          <p:cNvPr id="17" name="Text 15"/>
-          <p:cNvSpPr/>
-          <p:nvPr/>
-        </p:nvSpPr>
-        <p:spPr>
-          <a:xfrm>
-            <a:off x="822960" y="4078224"/>
-            <a:ext cx="2743200" cy="256032"/>
+      </p:sp>
+      <p:sp>
+        <p:nvSpPr>
+          <p:cNvPr id="14" name="Text 12"/>
+          <p:cNvSpPr/>
+          <p:nvPr/>
+        </p:nvSpPr>
+        <p:spPr>
+          <a:xfrm>
+            <a:off x="5394960" y="1874520"/>
+            <a:ext cx="1508760" cy="640080"/>
           </a:xfrm>
           <a:prstGeom prst="rect">
             <a:avLst/>
@@ -4880,60 +4795,1253 @@
           <a:bodyPr wrap="square" lIns="0" tIns="0" rIns="0" bIns="0" rtlCol="0" anchor="ctr"/>
           <a:lstStyle/>
           <a:p>
-            <a:pPr marL="0" indent="0">
-              <a:buNone/>
-            </a:pPr>
-            <a:r>
-              <a:rPr lang="en-US" sz="1300" b="1" dirty="0">
-                <a:solidFill>
-                  <a:srgbClr val="00D4AA"/>
+            <a:pPr algn="ctr" indent="0" marL="0">
+              <a:buNone/>
+            </a:pPr>
+            <a:r>
+              <a:rPr lang="en-US" sz="900" b="1" dirty="0">
+                <a:solidFill>
+                  <a:srgbClr val="FFFFFF"/>
                 </a:solidFill>
                 <a:latin typeface="Calibri" pitchFamily="34" charset="0"/>
                 <a:ea typeface="Calibri" pitchFamily="34" charset="-122"/>
                 <a:cs typeface="Calibri" pitchFamily="34" charset="-120"/>
               </a:rPr>
-              <a:t>Delivery Layer</a:t>
-            </a:r>
-            <a:endParaRPr lang="en-US" sz="1300" dirty="0"/>
-          </a:p>
-        </p:txBody>
-      </p:sp>
-      <p:sp>
-        <p:nvSpPr>
-          <p:cNvPr id="18" name="Text 16"/>
-          <p:cNvSpPr/>
-          <p:nvPr/>
-        </p:nvSpPr>
-        <p:spPr>
-          <a:xfrm>
-            <a:off x="822960" y="4334256"/>
-            <a:ext cx="7498080" cy="228600"/>
-          </a:xfrm>
-          <a:prstGeom prst="rect">
-            <a:avLst/>
-          </a:prstGeom>
-          <a:noFill/>
-          <a:ln/>
-        </p:spPr>
-        <p:txBody>
-          <a:bodyPr wrap="square" lIns="0" tIns="0" rIns="0" bIns="0" rtlCol="0" anchor="ctr"/>
-          <a:lstStyle/>
-          <a:p>
-            <a:pPr marL="0" indent="0">
-              <a:buNone/>
-            </a:pPr>
-            <a:r>
-              <a:rPr lang="en-US" sz="1100" dirty="0">
-                <a:solidFill>
-                  <a:srgbClr val="F0F6FC"/>
+              <a:t>Mock</a:t>
+            </a:r>
+            <a:endParaRPr lang="en-US" sz="900" dirty="0"/>
+          </a:p>
+          <a:p>
+            <a:pPr algn="ctr" indent="0" marL="0">
+              <a:buNone/>
+            </a:pPr>
+            <a:r>
+              <a:rPr lang="en-US" sz="900" b="1" dirty="0">
+                <a:solidFill>
+                  <a:srgbClr val="FFFFFF"/>
                 </a:solidFill>
                 <a:latin typeface="Calibri" pitchFamily="34" charset="0"/>
                 <a:ea typeface="Calibri" pitchFamily="34" charset="-122"/>
                 <a:cs typeface="Calibri" pitchFamily="34" charset="-120"/>
               </a:rPr>
-              <a:t>XML Resume Injection  |  GitHub Repo Scaffolding  |  Email Reports</a:t>
-            </a:r>
-            <a:endParaRPr lang="en-US" sz="1100" dirty="0"/>
+              <a:t>Interviewer</a:t>
+            </a:r>
+            <a:endParaRPr lang="en-US" sz="900" dirty="0"/>
+          </a:p>
+        </p:txBody>
+      </p:sp>
+      <p:sp>
+        <p:nvSpPr>
+          <p:cNvPr id="15" name="Shape 13"/>
+          <p:cNvSpPr/>
+          <p:nvPr/>
+        </p:nvSpPr>
+        <p:spPr>
+          <a:xfrm>
+            <a:off x="7086600" y="1874520"/>
+            <a:ext cx="1508760" cy="640080"/>
+          </a:xfrm>
+          <a:prstGeom prst="rect">
+            <a:avLst/>
+          </a:prstGeom>
+          <a:solidFill>
+            <a:srgbClr val="3B1566"/>
+          </a:solidFill>
+          <a:ln/>
+          <a:effectLst>
+            <a:outerShdw sx="100000" sy="100000" kx="0" ky="0" algn="bl" rotWithShape="0" blurRad="101600" dist="38100" dir="8100000">
+              <a:srgbClr val="000000">
+                <a:alpha val="35000"/>
+              </a:srgbClr>
+            </a:outerShdw>
+          </a:effectLst>
+        </p:spPr>
+      </p:sp>
+      <p:sp>
+        <p:nvSpPr>
+          <p:cNvPr id="16" name="Text 14"/>
+          <p:cNvSpPr/>
+          <p:nvPr/>
+        </p:nvSpPr>
+        <p:spPr>
+          <a:xfrm>
+            <a:off x="7086600" y="1874520"/>
+            <a:ext cx="1508760" cy="640080"/>
+          </a:xfrm>
+          <a:prstGeom prst="rect">
+            <a:avLst/>
+          </a:prstGeom>
+          <a:noFill/>
+          <a:ln/>
+        </p:spPr>
+        <p:txBody>
+          <a:bodyPr wrap="square" lIns="0" tIns="0" rIns="0" bIns="0" rtlCol="0" anchor="ctr"/>
+          <a:lstStyle/>
+          <a:p>
+            <a:pPr algn="ctr" indent="0" marL="0">
+              <a:buNone/>
+            </a:pPr>
+            <a:r>
+              <a:rPr lang="en-US" sz="900" b="1" dirty="0">
+                <a:solidFill>
+                  <a:srgbClr val="FFFFFF"/>
+                </a:solidFill>
+                <a:latin typeface="Calibri" pitchFamily="34" charset="0"/>
+                <a:ea typeface="Calibri" pitchFamily="34" charset="-122"/>
+                <a:cs typeface="Calibri" pitchFamily="34" charset="-120"/>
+              </a:rPr>
+              <a:t>Portfolio</a:t>
+            </a:r>
+            <a:endParaRPr lang="en-US" sz="900" dirty="0"/>
+          </a:p>
+          <a:p>
+            <a:pPr algn="ctr" indent="0" marL="0">
+              <a:buNone/>
+            </a:pPr>
+            <a:r>
+              <a:rPr lang="en-US" sz="900" b="1" dirty="0">
+                <a:solidFill>
+                  <a:srgbClr val="FFFFFF"/>
+                </a:solidFill>
+                <a:latin typeface="Calibri" pitchFamily="34" charset="0"/>
+                <a:ea typeface="Calibri" pitchFamily="34" charset="-122"/>
+                <a:cs typeface="Calibri" pitchFamily="34" charset="-120"/>
+              </a:rPr>
+              <a:t>Architect</a:t>
+            </a:r>
+            <a:endParaRPr lang="en-US" sz="900" dirty="0"/>
+          </a:p>
+        </p:txBody>
+      </p:sp>
+      <p:sp>
+        <p:nvSpPr>
+          <p:cNvPr id="17" name="Shape 15"/>
+          <p:cNvSpPr/>
+          <p:nvPr/>
+        </p:nvSpPr>
+        <p:spPr>
+          <a:xfrm>
+            <a:off x="320040" y="2834640"/>
+            <a:ext cx="1508760" cy="548640"/>
+          </a:xfrm>
+          <a:prstGeom prst="rect">
+            <a:avLst/>
+          </a:prstGeom>
+          <a:solidFill>
+            <a:srgbClr val="1B5E20"/>
+          </a:solidFill>
+          <a:ln/>
+          <a:effectLst>
+            <a:outerShdw sx="100000" sy="100000" kx="0" ky="0" algn="bl" rotWithShape="0" blurRad="101600" dist="38100" dir="8100000">
+              <a:srgbClr val="000000">
+                <a:alpha val="35000"/>
+              </a:srgbClr>
+            </a:outerShdw>
+          </a:effectLst>
+        </p:spPr>
+      </p:sp>
+      <p:sp>
+        <p:nvSpPr>
+          <p:cNvPr id="18" name="Text 16"/>
+          <p:cNvSpPr/>
+          <p:nvPr/>
+        </p:nvSpPr>
+        <p:spPr>
+          <a:xfrm>
+            <a:off x="320040" y="2834640"/>
+            <a:ext cx="1508760" cy="548640"/>
+          </a:xfrm>
+          <a:prstGeom prst="rect">
+            <a:avLst/>
+          </a:prstGeom>
+          <a:noFill/>
+          <a:ln/>
+        </p:spPr>
+        <p:txBody>
+          <a:bodyPr wrap="square" lIns="0" tIns="0" rIns="0" bIns="0" rtlCol="0" anchor="ctr"/>
+          <a:lstStyle/>
+          <a:p>
+            <a:pPr algn="ctr" indent="0" marL="0">
+              <a:buNone/>
+            </a:pPr>
+            <a:r>
+              <a:rPr lang="en-US" sz="850" dirty="0">
+                <a:solidFill>
+                  <a:srgbClr val="F0F6FC"/>
+                </a:solidFill>
+                <a:latin typeface="Calibri" pitchFamily="34" charset="0"/>
+                <a:ea typeface="Calibri" pitchFamily="34" charset="-122"/>
+                <a:cs typeface="Calibri" pitchFamily="34" charset="-120"/>
+              </a:rPr>
+              <a:t>Apify Scraper</a:t>
+            </a:r>
+            <a:endParaRPr lang="en-US" sz="850" dirty="0"/>
+          </a:p>
+          <a:p>
+            <a:pPr algn="ctr" indent="0" marL="0">
+              <a:buNone/>
+            </a:pPr>
+            <a:r>
+              <a:rPr lang="en-US" sz="850" dirty="0">
+                <a:solidFill>
+                  <a:srgbClr val="F0F6FC"/>
+                </a:solidFill>
+                <a:latin typeface="Calibri" pitchFamily="34" charset="0"/>
+                <a:ea typeface="Calibri" pitchFamily="34" charset="-122"/>
+                <a:cs typeface="Calibri" pitchFamily="34" charset="-120"/>
+              </a:rPr>
+              <a:t>Engine</a:t>
+            </a:r>
+            <a:endParaRPr lang="en-US" sz="850" dirty="0"/>
+          </a:p>
+        </p:txBody>
+      </p:sp>
+      <p:sp>
+        <p:nvSpPr>
+          <p:cNvPr id="19" name="Shape 17"/>
+          <p:cNvSpPr/>
+          <p:nvPr/>
+        </p:nvSpPr>
+        <p:spPr>
+          <a:xfrm>
+            <a:off x="2011680" y="2834640"/>
+            <a:ext cx="1508760" cy="548640"/>
+          </a:xfrm>
+          <a:prstGeom prst="rect">
+            <a:avLst/>
+          </a:prstGeom>
+          <a:solidFill>
+            <a:srgbClr val="1B5E20"/>
+          </a:solidFill>
+          <a:ln/>
+          <a:effectLst>
+            <a:outerShdw sx="100000" sy="100000" kx="0" ky="0" algn="bl" rotWithShape="0" blurRad="101600" dist="38100" dir="8100000">
+              <a:srgbClr val="000000">
+                <a:alpha val="35000"/>
+              </a:srgbClr>
+            </a:outerShdw>
+          </a:effectLst>
+        </p:spPr>
+      </p:sp>
+      <p:sp>
+        <p:nvSpPr>
+          <p:cNvPr id="20" name="Text 18"/>
+          <p:cNvSpPr/>
+          <p:nvPr/>
+        </p:nvSpPr>
+        <p:spPr>
+          <a:xfrm>
+            <a:off x="2011680" y="2834640"/>
+            <a:ext cx="1508760" cy="548640"/>
+          </a:xfrm>
+          <a:prstGeom prst="rect">
+            <a:avLst/>
+          </a:prstGeom>
+          <a:noFill/>
+          <a:ln/>
+        </p:spPr>
+        <p:txBody>
+          <a:bodyPr wrap="square" lIns="0" tIns="0" rIns="0" bIns="0" rtlCol="0" anchor="ctr"/>
+          <a:lstStyle/>
+          <a:p>
+            <a:pPr algn="ctr" indent="0" marL="0">
+              <a:buNone/>
+            </a:pPr>
+            <a:r>
+              <a:rPr lang="en-US" sz="850" dirty="0">
+                <a:solidFill>
+                  <a:srgbClr val="F0F6FC"/>
+                </a:solidFill>
+                <a:latin typeface="Calibri" pitchFamily="34" charset="0"/>
+                <a:ea typeface="Calibri" pitchFamily="34" charset="-122"/>
+                <a:cs typeface="Calibri" pitchFamily="34" charset="-120"/>
+              </a:rPr>
+              <a:t>Greenhouse &amp;</a:t>
+            </a:r>
+            <a:endParaRPr lang="en-US" sz="850" dirty="0"/>
+          </a:p>
+          <a:p>
+            <a:pPr algn="ctr" indent="0" marL="0">
+              <a:buNone/>
+            </a:pPr>
+            <a:r>
+              <a:rPr lang="en-US" sz="850" dirty="0">
+                <a:solidFill>
+                  <a:srgbClr val="F0F6FC"/>
+                </a:solidFill>
+                <a:latin typeface="Calibri" pitchFamily="34" charset="0"/>
+                <a:ea typeface="Calibri" pitchFamily="34" charset="-122"/>
+                <a:cs typeface="Calibri" pitchFamily="34" charset="-120"/>
+              </a:rPr>
+              <a:t>Lever ATS APIs</a:t>
+            </a:r>
+            <a:endParaRPr lang="en-US" sz="850" dirty="0"/>
+          </a:p>
+        </p:txBody>
+      </p:sp>
+      <p:sp>
+        <p:nvSpPr>
+          <p:cNvPr id="21" name="Shape 19"/>
+          <p:cNvSpPr/>
+          <p:nvPr/>
+        </p:nvSpPr>
+        <p:spPr>
+          <a:xfrm>
+            <a:off x="3703320" y="2834640"/>
+            <a:ext cx="1508760" cy="548640"/>
+          </a:xfrm>
+          <a:prstGeom prst="rect">
+            <a:avLst/>
+          </a:prstGeom>
+          <a:solidFill>
+            <a:srgbClr val="1B5E20"/>
+          </a:solidFill>
+          <a:ln/>
+          <a:effectLst>
+            <a:outerShdw sx="100000" sy="100000" kx="0" ky="0" algn="bl" rotWithShape="0" blurRad="101600" dist="38100" dir="8100000">
+              <a:srgbClr val="000000">
+                <a:alpha val="35000"/>
+              </a:srgbClr>
+            </a:outerShdw>
+          </a:effectLst>
+        </p:spPr>
+      </p:sp>
+      <p:sp>
+        <p:nvSpPr>
+          <p:cNvPr id="22" name="Text 20"/>
+          <p:cNvSpPr/>
+          <p:nvPr/>
+        </p:nvSpPr>
+        <p:spPr>
+          <a:xfrm>
+            <a:off x="3703320" y="2834640"/>
+            <a:ext cx="1508760" cy="548640"/>
+          </a:xfrm>
+          <a:prstGeom prst="rect">
+            <a:avLst/>
+          </a:prstGeom>
+          <a:noFill/>
+          <a:ln/>
+        </p:spPr>
+        <p:txBody>
+          <a:bodyPr wrap="square" lIns="0" tIns="0" rIns="0" bIns="0" rtlCol="0" anchor="ctr"/>
+          <a:lstStyle/>
+          <a:p>
+            <a:pPr algn="ctr" indent="0" marL="0">
+              <a:buNone/>
+            </a:pPr>
+            <a:r>
+              <a:rPr lang="en-US" sz="850" dirty="0">
+                <a:solidFill>
+                  <a:srgbClr val="F0F6FC"/>
+                </a:solidFill>
+                <a:latin typeface="Calibri" pitchFamily="34" charset="0"/>
+                <a:ea typeface="Calibri" pitchFamily="34" charset="-122"/>
+                <a:cs typeface="Calibri" pitchFamily="34" charset="-120"/>
+              </a:rPr>
+              <a:t>arXiv &amp; GitHub</a:t>
+            </a:r>
+            <a:endParaRPr lang="en-US" sz="850" dirty="0"/>
+          </a:p>
+          <a:p>
+            <a:pPr algn="ctr" indent="0" marL="0">
+              <a:buNone/>
+            </a:pPr>
+            <a:r>
+              <a:rPr lang="en-US" sz="850" dirty="0">
+                <a:solidFill>
+                  <a:srgbClr val="F0F6FC"/>
+                </a:solidFill>
+                <a:latin typeface="Calibri" pitchFamily="34" charset="0"/>
+                <a:ea typeface="Calibri" pitchFamily="34" charset="-122"/>
+                <a:cs typeface="Calibri" pitchFamily="34" charset="-120"/>
+              </a:rPr>
+              <a:t>Search APIs</a:t>
+            </a:r>
+            <a:endParaRPr lang="en-US" sz="850" dirty="0"/>
+          </a:p>
+        </p:txBody>
+      </p:sp>
+      <p:sp>
+        <p:nvSpPr>
+          <p:cNvPr id="23" name="Shape 21"/>
+          <p:cNvSpPr/>
+          <p:nvPr/>
+        </p:nvSpPr>
+        <p:spPr>
+          <a:xfrm>
+            <a:off x="5394960" y="2834640"/>
+            <a:ext cx="1508760" cy="548640"/>
+          </a:xfrm>
+          <a:prstGeom prst="rect">
+            <a:avLst/>
+          </a:prstGeom>
+          <a:solidFill>
+            <a:srgbClr val="1B5E20"/>
+          </a:solidFill>
+          <a:ln/>
+          <a:effectLst>
+            <a:outerShdw sx="100000" sy="100000" kx="0" ky="0" algn="bl" rotWithShape="0" blurRad="101600" dist="38100" dir="8100000">
+              <a:srgbClr val="000000">
+                <a:alpha val="35000"/>
+              </a:srgbClr>
+            </a:outerShdw>
+          </a:effectLst>
+        </p:spPr>
+      </p:sp>
+      <p:sp>
+        <p:nvSpPr>
+          <p:cNvPr id="24" name="Text 22"/>
+          <p:cNvSpPr/>
+          <p:nvPr/>
+        </p:nvSpPr>
+        <p:spPr>
+          <a:xfrm>
+            <a:off x="5394960" y="2834640"/>
+            <a:ext cx="1508760" cy="548640"/>
+          </a:xfrm>
+          <a:prstGeom prst="rect">
+            <a:avLst/>
+          </a:prstGeom>
+          <a:noFill/>
+          <a:ln/>
+        </p:spPr>
+        <p:txBody>
+          <a:bodyPr wrap="square" lIns="0" tIns="0" rIns="0" bIns="0" rtlCol="0" anchor="ctr"/>
+          <a:lstStyle/>
+          <a:p>
+            <a:pPr algn="ctr" indent="0" marL="0">
+              <a:buNone/>
+            </a:pPr>
+            <a:r>
+              <a:rPr lang="en-US" sz="850" dirty="0">
+                <a:solidFill>
+                  <a:srgbClr val="F0F6FC"/>
+                </a:solidFill>
+                <a:latin typeface="Calibri" pitchFamily="34" charset="0"/>
+                <a:ea typeface="Calibri" pitchFamily="34" charset="-122"/>
+                <a:cs typeface="Calibri" pitchFamily="34" charset="-120"/>
+              </a:rPr>
+              <a:t>NotebookLM /</a:t>
+            </a:r>
+            <a:endParaRPr lang="en-US" sz="850" dirty="0"/>
+          </a:p>
+          <a:p>
+            <a:pPr algn="ctr" indent="0" marL="0">
+              <a:buNone/>
+            </a:pPr>
+            <a:r>
+              <a:rPr lang="en-US" sz="850" dirty="0">
+                <a:solidFill>
+                  <a:srgbClr val="F0F6FC"/>
+                </a:solidFill>
+                <a:latin typeface="Calibri" pitchFamily="34" charset="0"/>
+                <a:ea typeface="Calibri" pitchFamily="34" charset="-122"/>
+                <a:cs typeface="Calibri" pitchFamily="34" charset="-120"/>
+              </a:rPr>
+              <a:t>Gemini API</a:t>
+            </a:r>
+            <a:endParaRPr lang="en-US" sz="850" dirty="0"/>
+          </a:p>
+        </p:txBody>
+      </p:sp>
+      <p:sp>
+        <p:nvSpPr>
+          <p:cNvPr id="25" name="Shape 23"/>
+          <p:cNvSpPr/>
+          <p:nvPr/>
+        </p:nvSpPr>
+        <p:spPr>
+          <a:xfrm>
+            <a:off x="7086600" y="2834640"/>
+            <a:ext cx="1508760" cy="548640"/>
+          </a:xfrm>
+          <a:prstGeom prst="rect">
+            <a:avLst/>
+          </a:prstGeom>
+          <a:solidFill>
+            <a:srgbClr val="0D47A1"/>
+          </a:solidFill>
+          <a:ln/>
+          <a:effectLst>
+            <a:outerShdw sx="100000" sy="100000" kx="0" ky="0" algn="bl" rotWithShape="0" blurRad="101600" dist="38100" dir="8100000">
+              <a:srgbClr val="000000">
+                <a:alpha val="35000"/>
+              </a:srgbClr>
+            </a:outerShdw>
+          </a:effectLst>
+        </p:spPr>
+      </p:sp>
+      <p:sp>
+        <p:nvSpPr>
+          <p:cNvPr id="26" name="Text 24"/>
+          <p:cNvSpPr/>
+          <p:nvPr/>
+        </p:nvSpPr>
+        <p:spPr>
+          <a:xfrm>
+            <a:off x="7086600" y="2834640"/>
+            <a:ext cx="1508760" cy="548640"/>
+          </a:xfrm>
+          <a:prstGeom prst="rect">
+            <a:avLst/>
+          </a:prstGeom>
+          <a:noFill/>
+          <a:ln/>
+        </p:spPr>
+        <p:txBody>
+          <a:bodyPr wrap="square" lIns="0" tIns="0" rIns="0" bIns="0" rtlCol="0" anchor="ctr"/>
+          <a:lstStyle/>
+          <a:p>
+            <a:pPr algn="ctr" indent="0" marL="0">
+              <a:buNone/>
+            </a:pPr>
+            <a:r>
+              <a:rPr lang="en-US" sz="900" b="1" dirty="0">
+                <a:solidFill>
+                  <a:srgbClr val="F0F6FC"/>
+                </a:solidFill>
+                <a:latin typeface="Calibri" pitchFamily="34" charset="0"/>
+                <a:ea typeface="Calibri" pitchFamily="34" charset="-122"/>
+                <a:cs typeface="Calibri" pitchFamily="34" charset="-120"/>
+              </a:rPr>
+              <a:t>SQLite DB</a:t>
+            </a:r>
+            <a:endParaRPr lang="en-US" sz="900" dirty="0"/>
+          </a:p>
+          <a:p>
+            <a:pPr algn="ctr" indent="0" marL="0">
+              <a:buNone/>
+            </a:pPr>
+            <a:r>
+              <a:rPr lang="en-US" sz="900" b="1" dirty="0">
+                <a:solidFill>
+                  <a:srgbClr val="F0F6FC"/>
+                </a:solidFill>
+                <a:latin typeface="Calibri" pitchFamily="34" charset="0"/>
+                <a:ea typeface="Calibri" pitchFamily="34" charset="-122"/>
+                <a:cs typeface="Calibri" pitchFamily="34" charset="-120"/>
+              </a:rPr>
+              <a:t>(themes.db)</a:t>
+            </a:r>
+            <a:endParaRPr lang="en-US" sz="900" dirty="0"/>
+          </a:p>
+        </p:txBody>
+      </p:sp>
+      <p:sp>
+        <p:nvSpPr>
+          <p:cNvPr id="27" name="Shape 25"/>
+          <p:cNvSpPr/>
+          <p:nvPr/>
+        </p:nvSpPr>
+        <p:spPr>
+          <a:xfrm>
+            <a:off x="320040" y="3749040"/>
+            <a:ext cx="1508760" cy="502920"/>
+          </a:xfrm>
+          <a:prstGeom prst="rect">
+            <a:avLst/>
+          </a:prstGeom>
+          <a:solidFill>
+            <a:srgbClr val="BF360C"/>
+          </a:solidFill>
+          <a:ln/>
+          <a:effectLst>
+            <a:outerShdw sx="100000" sy="100000" kx="0" ky="0" algn="bl" rotWithShape="0" blurRad="101600" dist="38100" dir="8100000">
+              <a:srgbClr val="000000">
+                <a:alpha val="35000"/>
+              </a:srgbClr>
+            </a:outerShdw>
+          </a:effectLst>
+        </p:spPr>
+      </p:sp>
+      <p:sp>
+        <p:nvSpPr>
+          <p:cNvPr id="28" name="Text 26"/>
+          <p:cNvSpPr/>
+          <p:nvPr/>
+        </p:nvSpPr>
+        <p:spPr>
+          <a:xfrm>
+            <a:off x="320040" y="3749040"/>
+            <a:ext cx="1508760" cy="502920"/>
+          </a:xfrm>
+          <a:prstGeom prst="rect">
+            <a:avLst/>
+          </a:prstGeom>
+          <a:noFill/>
+          <a:ln/>
+        </p:spPr>
+        <p:txBody>
+          <a:bodyPr wrap="square" lIns="0" tIns="0" rIns="0" bIns="0" rtlCol="0" anchor="ctr"/>
+          <a:lstStyle/>
+          <a:p>
+            <a:pPr algn="ctr" indent="0" marL="0">
+              <a:buNone/>
+            </a:pPr>
+            <a:r>
+              <a:rPr lang="en-US" sz="850" dirty="0">
+                <a:solidFill>
+                  <a:srgbClr val="F0F6FC"/>
+                </a:solidFill>
+                <a:latin typeface="Calibri" pitchFamily="34" charset="0"/>
+                <a:ea typeface="Calibri" pitchFamily="34" charset="-122"/>
+                <a:cs typeface="Calibri" pitchFamily="34" charset="-120"/>
+              </a:rPr>
+              <a:t>Tailored</a:t>
+            </a:r>
+            <a:endParaRPr lang="en-US" sz="850" dirty="0"/>
+          </a:p>
+          <a:p>
+            <a:pPr algn="ctr" indent="0" marL="0">
+              <a:buNone/>
+            </a:pPr>
+            <a:r>
+              <a:rPr lang="en-US" sz="850" dirty="0">
+                <a:solidFill>
+                  <a:srgbClr val="F0F6FC"/>
+                </a:solidFill>
+                <a:latin typeface="Calibri" pitchFamily="34" charset="0"/>
+                <a:ea typeface="Calibri" pitchFamily="34" charset="-122"/>
+                <a:cs typeface="Calibri" pitchFamily="34" charset="-120"/>
+              </a:rPr>
+              <a:t>Resume .docx</a:t>
+            </a:r>
+            <a:endParaRPr lang="en-US" sz="850" dirty="0"/>
+          </a:p>
+        </p:txBody>
+      </p:sp>
+      <p:sp>
+        <p:nvSpPr>
+          <p:cNvPr id="29" name="Shape 27"/>
+          <p:cNvSpPr/>
+          <p:nvPr/>
+        </p:nvSpPr>
+        <p:spPr>
+          <a:xfrm>
+            <a:off x="2011680" y="3749040"/>
+            <a:ext cx="1508760" cy="502920"/>
+          </a:xfrm>
+          <a:prstGeom prst="rect">
+            <a:avLst/>
+          </a:prstGeom>
+          <a:solidFill>
+            <a:srgbClr val="BF360C"/>
+          </a:solidFill>
+          <a:ln/>
+          <a:effectLst>
+            <a:outerShdw sx="100000" sy="100000" kx="0" ky="0" algn="bl" rotWithShape="0" blurRad="101600" dist="38100" dir="8100000">
+              <a:srgbClr val="000000">
+                <a:alpha val="35000"/>
+              </a:srgbClr>
+            </a:outerShdw>
+          </a:effectLst>
+        </p:spPr>
+      </p:sp>
+      <p:sp>
+        <p:nvSpPr>
+          <p:cNvPr id="30" name="Text 28"/>
+          <p:cNvSpPr/>
+          <p:nvPr/>
+        </p:nvSpPr>
+        <p:spPr>
+          <a:xfrm>
+            <a:off x="2011680" y="3749040"/>
+            <a:ext cx="1508760" cy="502920"/>
+          </a:xfrm>
+          <a:prstGeom prst="rect">
+            <a:avLst/>
+          </a:prstGeom>
+          <a:noFill/>
+          <a:ln/>
+        </p:spPr>
+        <p:txBody>
+          <a:bodyPr wrap="square" lIns="0" tIns="0" rIns="0" bIns="0" rtlCol="0" anchor="ctr"/>
+          <a:lstStyle/>
+          <a:p>
+            <a:pPr algn="ctr" indent="0" marL="0">
+              <a:buNone/>
+            </a:pPr>
+            <a:r>
+              <a:rPr lang="en-US" sz="850" dirty="0">
+                <a:solidFill>
+                  <a:srgbClr val="F0F6FC"/>
+                </a:solidFill>
+                <a:latin typeface="Calibri" pitchFamily="34" charset="0"/>
+                <a:ea typeface="Calibri" pitchFamily="34" charset="-122"/>
+                <a:cs typeface="Calibri" pitchFamily="34" charset="-120"/>
+              </a:rPr>
+              <a:t>Weekly</a:t>
+            </a:r>
+            <a:endParaRPr lang="en-US" sz="850" dirty="0"/>
+          </a:p>
+          <a:p>
+            <a:pPr algn="ctr" indent="0" marL="0">
+              <a:buNone/>
+            </a:pPr>
+            <a:r>
+              <a:rPr lang="en-US" sz="850" dirty="0">
+                <a:solidFill>
+                  <a:srgbClr val="F0F6FC"/>
+                </a:solidFill>
+                <a:latin typeface="Calibri" pitchFamily="34" charset="0"/>
+                <a:ea typeface="Calibri" pitchFamily="34" charset="-122"/>
+                <a:cs typeface="Calibri" pitchFamily="34" charset="-120"/>
+              </a:rPr>
+              <a:t>Notifications</a:t>
+            </a:r>
+            <a:endParaRPr lang="en-US" sz="850" dirty="0"/>
+          </a:p>
+        </p:txBody>
+      </p:sp>
+      <p:sp>
+        <p:nvSpPr>
+          <p:cNvPr id="31" name="Shape 29"/>
+          <p:cNvSpPr/>
+          <p:nvPr/>
+        </p:nvSpPr>
+        <p:spPr>
+          <a:xfrm>
+            <a:off x="3703320" y="3749040"/>
+            <a:ext cx="1508760" cy="502920"/>
+          </a:xfrm>
+          <a:prstGeom prst="rect">
+            <a:avLst/>
+          </a:prstGeom>
+          <a:solidFill>
+            <a:srgbClr val="BF360C"/>
+          </a:solidFill>
+          <a:ln/>
+          <a:effectLst>
+            <a:outerShdw sx="100000" sy="100000" kx="0" ky="0" algn="bl" rotWithShape="0" blurRad="101600" dist="38100" dir="8100000">
+              <a:srgbClr val="000000">
+                <a:alpha val="35000"/>
+              </a:srgbClr>
+            </a:outerShdw>
+          </a:effectLst>
+        </p:spPr>
+      </p:sp>
+      <p:sp>
+        <p:nvSpPr>
+          <p:cNvPr id="32" name="Text 30"/>
+          <p:cNvSpPr/>
+          <p:nvPr/>
+        </p:nvSpPr>
+        <p:spPr>
+          <a:xfrm>
+            <a:off x="3703320" y="3749040"/>
+            <a:ext cx="1508760" cy="502920"/>
+          </a:xfrm>
+          <a:prstGeom prst="rect">
+            <a:avLst/>
+          </a:prstGeom>
+          <a:noFill/>
+          <a:ln/>
+        </p:spPr>
+        <p:txBody>
+          <a:bodyPr wrap="square" lIns="0" tIns="0" rIns="0" bIns="0" rtlCol="0" anchor="ctr"/>
+          <a:lstStyle/>
+          <a:p>
+            <a:pPr algn="ctr" indent="0" marL="0">
+              <a:buNone/>
+            </a:pPr>
+            <a:r>
+              <a:rPr lang="en-US" sz="850" dirty="0">
+                <a:solidFill>
+                  <a:srgbClr val="F0F6FC"/>
+                </a:solidFill>
+                <a:latin typeface="Calibri" pitchFamily="34" charset="0"/>
+                <a:ea typeface="Calibri" pitchFamily="34" charset="-122"/>
+                <a:cs typeface="Calibri" pitchFamily="34" charset="-120"/>
+              </a:rPr>
+              <a:t>SMTP Study</a:t>
+            </a:r>
+            <a:endParaRPr lang="en-US" sz="850" dirty="0"/>
+          </a:p>
+          <a:p>
+            <a:pPr algn="ctr" indent="0" marL="0">
+              <a:buNone/>
+            </a:pPr>
+            <a:r>
+              <a:rPr lang="en-US" sz="850" dirty="0">
+                <a:solidFill>
+                  <a:srgbClr val="F0F6FC"/>
+                </a:solidFill>
+                <a:latin typeface="Calibri" pitchFamily="34" charset="0"/>
+                <a:ea typeface="Calibri" pitchFamily="34" charset="-122"/>
+                <a:cs typeface="Calibri" pitchFamily="34" charset="-120"/>
+              </a:rPr>
+              <a:t>Plan Email</a:t>
+            </a:r>
+            <a:endParaRPr lang="en-US" sz="850" dirty="0"/>
+          </a:p>
+        </p:txBody>
+      </p:sp>
+      <p:sp>
+        <p:nvSpPr>
+          <p:cNvPr id="33" name="Shape 31"/>
+          <p:cNvSpPr/>
+          <p:nvPr/>
+        </p:nvSpPr>
+        <p:spPr>
+          <a:xfrm>
+            <a:off x="5394960" y="3749040"/>
+            <a:ext cx="1508760" cy="502920"/>
+          </a:xfrm>
+          <a:prstGeom prst="rect">
+            <a:avLst/>
+          </a:prstGeom>
+          <a:solidFill>
+            <a:srgbClr val="BF360C"/>
+          </a:solidFill>
+          <a:ln/>
+          <a:effectLst>
+            <a:outerShdw sx="100000" sy="100000" kx="0" ky="0" algn="bl" rotWithShape="0" blurRad="101600" dist="38100" dir="8100000">
+              <a:srgbClr val="000000">
+                <a:alpha val="35000"/>
+              </a:srgbClr>
+            </a:outerShdw>
+          </a:effectLst>
+        </p:spPr>
+      </p:sp>
+      <p:sp>
+        <p:nvSpPr>
+          <p:cNvPr id="34" name="Text 32"/>
+          <p:cNvSpPr/>
+          <p:nvPr/>
+        </p:nvSpPr>
+        <p:spPr>
+          <a:xfrm>
+            <a:off x="5394960" y="3749040"/>
+            <a:ext cx="1508760" cy="502920"/>
+          </a:xfrm>
+          <a:prstGeom prst="rect">
+            <a:avLst/>
+          </a:prstGeom>
+          <a:noFill/>
+          <a:ln/>
+        </p:spPr>
+        <p:txBody>
+          <a:bodyPr wrap="square" lIns="0" tIns="0" rIns="0" bIns="0" rtlCol="0" anchor="ctr"/>
+          <a:lstStyle/>
+          <a:p>
+            <a:pPr algn="ctr" indent="0" marL="0">
+              <a:buNone/>
+            </a:pPr>
+            <a:r>
+              <a:rPr lang="en-US" sz="850" dirty="0">
+                <a:solidFill>
+                  <a:srgbClr val="F0F6FC"/>
+                </a:solidFill>
+                <a:latin typeface="Calibri" pitchFamily="34" charset="0"/>
+                <a:ea typeface="Calibri" pitchFamily="34" charset="-122"/>
+                <a:cs typeface="Calibri" pitchFamily="34" charset="-120"/>
+              </a:rPr>
+              <a:t>Markdown</a:t>
+            </a:r>
+            <a:endParaRPr lang="en-US" sz="850" dirty="0"/>
+          </a:p>
+          <a:p>
+            <a:pPr algn="ctr" indent="0" marL="0">
+              <a:buNone/>
+            </a:pPr>
+            <a:r>
+              <a:rPr lang="en-US" sz="850" dirty="0">
+                <a:solidFill>
+                  <a:srgbClr val="F0F6FC"/>
+                </a:solidFill>
+                <a:latin typeface="Calibri" pitchFamily="34" charset="0"/>
+                <a:ea typeface="Calibri" pitchFamily="34" charset="-122"/>
+                <a:cs typeface="Calibri" pitchFamily="34" charset="-120"/>
+              </a:rPr>
+              <a:t>Scorecards</a:t>
+            </a:r>
+            <a:endParaRPr lang="en-US" sz="850" dirty="0"/>
+          </a:p>
+        </p:txBody>
+      </p:sp>
+      <p:sp>
+        <p:nvSpPr>
+          <p:cNvPr id="35" name="Shape 33"/>
+          <p:cNvSpPr/>
+          <p:nvPr/>
+        </p:nvSpPr>
+        <p:spPr>
+          <a:xfrm>
+            <a:off x="7086600" y="3749040"/>
+            <a:ext cx="1508760" cy="502920"/>
+          </a:xfrm>
+          <a:prstGeom prst="rect">
+            <a:avLst/>
+          </a:prstGeom>
+          <a:solidFill>
+            <a:srgbClr val="BF360C"/>
+          </a:solidFill>
+          <a:ln/>
+          <a:effectLst>
+            <a:outerShdw sx="100000" sy="100000" kx="0" ky="0" algn="bl" rotWithShape="0" blurRad="101600" dist="38100" dir="8100000">
+              <a:srgbClr val="000000">
+                <a:alpha val="35000"/>
+              </a:srgbClr>
+            </a:outerShdw>
+          </a:effectLst>
+        </p:spPr>
+      </p:sp>
+      <p:sp>
+        <p:nvSpPr>
+          <p:cNvPr id="36" name="Text 34"/>
+          <p:cNvSpPr/>
+          <p:nvPr/>
+        </p:nvSpPr>
+        <p:spPr>
+          <a:xfrm>
+            <a:off x="7086600" y="3749040"/>
+            <a:ext cx="1508760" cy="502920"/>
+          </a:xfrm>
+          <a:prstGeom prst="rect">
+            <a:avLst/>
+          </a:prstGeom>
+          <a:noFill/>
+          <a:ln/>
+        </p:spPr>
+        <p:txBody>
+          <a:bodyPr wrap="square" lIns="0" tIns="0" rIns="0" bIns="0" rtlCol="0" anchor="ctr"/>
+          <a:lstStyle/>
+          <a:p>
+            <a:pPr algn="ctr" indent="0" marL="0">
+              <a:buNone/>
+            </a:pPr>
+            <a:r>
+              <a:rPr lang="en-US" sz="850" dirty="0">
+                <a:solidFill>
+                  <a:srgbClr val="F0F6FC"/>
+                </a:solidFill>
+                <a:latin typeface="Calibri" pitchFamily="34" charset="0"/>
+                <a:ea typeface="Calibri" pitchFamily="34" charset="-122"/>
+                <a:cs typeface="Calibri" pitchFamily="34" charset="-120"/>
+              </a:rPr>
+              <a:t>GitHub</a:t>
+            </a:r>
+            <a:endParaRPr lang="en-US" sz="850" dirty="0"/>
+          </a:p>
+          <a:p>
+            <a:pPr algn="ctr" indent="0" marL="0">
+              <a:buNone/>
+            </a:pPr>
+            <a:r>
+              <a:rPr lang="en-US" sz="850" dirty="0">
+                <a:solidFill>
+                  <a:srgbClr val="F0F6FC"/>
+                </a:solidFill>
+                <a:latin typeface="Calibri" pitchFamily="34" charset="0"/>
+                <a:ea typeface="Calibri" pitchFamily="34" charset="-122"/>
+                <a:cs typeface="Calibri" pitchFamily="34" charset="-120"/>
+              </a:rPr>
+              <a:t>Repositories</a:t>
+            </a:r>
+            <a:endParaRPr lang="en-US" sz="850" dirty="0"/>
+          </a:p>
+        </p:txBody>
+      </p:sp>
+      <p:sp>
+        <p:nvSpPr>
+          <p:cNvPr id="37" name="Shape 35"/>
+          <p:cNvSpPr/>
+          <p:nvPr/>
+        </p:nvSpPr>
+        <p:spPr>
+          <a:xfrm>
+            <a:off x="320040" y="4434840"/>
+            <a:ext cx="2286000" cy="411480"/>
+          </a:xfrm>
+          <a:prstGeom prst="rect">
+            <a:avLst/>
+          </a:prstGeom>
+          <a:solidFill>
+            <a:srgbClr val="0D47A1"/>
+          </a:solidFill>
+          <a:ln/>
+          <a:effectLst>
+            <a:outerShdw sx="100000" sy="100000" kx="0" ky="0" algn="bl" rotWithShape="0" blurRad="101600" dist="38100" dir="8100000">
+              <a:srgbClr val="000000">
+                <a:alpha val="35000"/>
+              </a:srgbClr>
+            </a:outerShdw>
+          </a:effectLst>
+        </p:spPr>
+      </p:sp>
+      <p:sp>
+        <p:nvSpPr>
+          <p:cNvPr id="38" name="Text 36"/>
+          <p:cNvSpPr/>
+          <p:nvPr/>
+        </p:nvSpPr>
+        <p:spPr>
+          <a:xfrm>
+            <a:off x="320040" y="4434840"/>
+            <a:ext cx="2286000" cy="411480"/>
+          </a:xfrm>
+          <a:prstGeom prst="rect">
+            <a:avLst/>
+          </a:prstGeom>
+          <a:noFill/>
+          <a:ln/>
+        </p:spPr>
+        <p:txBody>
+          <a:bodyPr wrap="square" lIns="0" tIns="0" rIns="0" bIns="0" rtlCol="0" anchor="ctr"/>
+          <a:lstStyle/>
+          <a:p>
+            <a:pPr algn="ctr" indent="0" marL="0">
+              <a:buNone/>
+            </a:pPr>
+            <a:r>
+              <a:rPr lang="en-US" sz="850" b="1" dirty="0">
+                <a:solidFill>
+                  <a:srgbClr val="F0F6FC"/>
+                </a:solidFill>
+                <a:latin typeface="Calibri" pitchFamily="34" charset="0"/>
+                <a:ea typeface="Calibri" pitchFamily="34" charset="-122"/>
+                <a:cs typeface="Calibri" pitchFamily="34" charset="-120"/>
+              </a:rPr>
+              <a:t>Dropbox Storage (Round-Trip Sync)</a:t>
+            </a:r>
+            <a:endParaRPr lang="en-US" sz="850" dirty="0"/>
+          </a:p>
+        </p:txBody>
+      </p:sp>
+      <p:sp>
+        <p:nvSpPr>
+          <p:cNvPr id="39" name="Shape 37"/>
+          <p:cNvSpPr/>
+          <p:nvPr/>
+        </p:nvSpPr>
+        <p:spPr>
+          <a:xfrm>
+            <a:off x="5029200" y="4498848"/>
+            <a:ext cx="182880" cy="182880"/>
+          </a:xfrm>
+          <a:prstGeom prst="rect">
+            <a:avLst/>
+          </a:prstGeom>
+          <a:solidFill>
+            <a:srgbClr val="3B1566"/>
+          </a:solidFill>
+          <a:ln/>
+        </p:spPr>
+      </p:sp>
+      <p:sp>
+        <p:nvSpPr>
+          <p:cNvPr id="40" name="Text 38"/>
+          <p:cNvSpPr/>
+          <p:nvPr/>
+        </p:nvSpPr>
+        <p:spPr>
+          <a:xfrm>
+            <a:off x="5257800" y="4462272"/>
+            <a:ext cx="777240" cy="256032"/>
+          </a:xfrm>
+          <a:prstGeom prst="rect">
+            <a:avLst/>
+          </a:prstGeom>
+          <a:noFill/>
+          <a:ln/>
+        </p:spPr>
+        <p:txBody>
+          <a:bodyPr wrap="square" lIns="0" tIns="0" rIns="0" bIns="0" rtlCol="0" anchor="ctr"/>
+          <a:lstStyle/>
+          <a:p>
+            <a:pPr indent="0" marL="0">
+              <a:buNone/>
+            </a:pPr>
+            <a:r>
+              <a:rPr lang="en-US" sz="800" dirty="0">
+                <a:solidFill>
+                  <a:srgbClr val="8B949E"/>
+                </a:solidFill>
+                <a:latin typeface="Calibri" pitchFamily="34" charset="0"/>
+                <a:ea typeface="Calibri" pitchFamily="34" charset="-122"/>
+                <a:cs typeface="Calibri" pitchFamily="34" charset="-120"/>
+              </a:rPr>
+              <a:t>Agents</a:t>
+            </a:r>
+            <a:endParaRPr lang="en-US" sz="800" dirty="0"/>
+          </a:p>
+        </p:txBody>
+      </p:sp>
+      <p:sp>
+        <p:nvSpPr>
+          <p:cNvPr id="41" name="Shape 39"/>
+          <p:cNvSpPr/>
+          <p:nvPr/>
+        </p:nvSpPr>
+        <p:spPr>
+          <a:xfrm>
+            <a:off x="6126480" y="4498848"/>
+            <a:ext cx="182880" cy="182880"/>
+          </a:xfrm>
+          <a:prstGeom prst="rect">
+            <a:avLst/>
+          </a:prstGeom>
+          <a:solidFill>
+            <a:srgbClr val="1B5E20"/>
+          </a:solidFill>
+          <a:ln/>
+        </p:spPr>
+      </p:sp>
+      <p:sp>
+        <p:nvSpPr>
+          <p:cNvPr id="42" name="Text 40"/>
+          <p:cNvSpPr/>
+          <p:nvPr/>
+        </p:nvSpPr>
+        <p:spPr>
+          <a:xfrm>
+            <a:off x="6355080" y="4462272"/>
+            <a:ext cx="777240" cy="256032"/>
+          </a:xfrm>
+          <a:prstGeom prst="rect">
+            <a:avLst/>
+          </a:prstGeom>
+          <a:noFill/>
+          <a:ln/>
+        </p:spPr>
+        <p:txBody>
+          <a:bodyPr wrap="square" lIns="0" tIns="0" rIns="0" bIns="0" rtlCol="0" anchor="ctr"/>
+          <a:lstStyle/>
+          <a:p>
+            <a:pPr indent="0" marL="0">
+              <a:buNone/>
+            </a:pPr>
+            <a:r>
+              <a:rPr lang="en-US" sz="800" dirty="0">
+                <a:solidFill>
+                  <a:srgbClr val="8B949E"/>
+                </a:solidFill>
+                <a:latin typeface="Calibri" pitchFamily="34" charset="0"/>
+                <a:ea typeface="Calibri" pitchFamily="34" charset="-122"/>
+                <a:cs typeface="Calibri" pitchFamily="34" charset="-120"/>
+              </a:rPr>
+              <a:t>Services</a:t>
+            </a:r>
+            <a:endParaRPr lang="en-US" sz="800" dirty="0"/>
+          </a:p>
+        </p:txBody>
+      </p:sp>
+      <p:sp>
+        <p:nvSpPr>
+          <p:cNvPr id="43" name="Shape 41"/>
+          <p:cNvSpPr/>
+          <p:nvPr/>
+        </p:nvSpPr>
+        <p:spPr>
+          <a:xfrm>
+            <a:off x="7223760" y="4498848"/>
+            <a:ext cx="182880" cy="182880"/>
+          </a:xfrm>
+          <a:prstGeom prst="rect">
+            <a:avLst/>
+          </a:prstGeom>
+          <a:solidFill>
+            <a:srgbClr val="0D47A1"/>
+          </a:solidFill>
+          <a:ln/>
+        </p:spPr>
+      </p:sp>
+      <p:sp>
+        <p:nvSpPr>
+          <p:cNvPr id="44" name="Text 42"/>
+          <p:cNvSpPr/>
+          <p:nvPr/>
+        </p:nvSpPr>
+        <p:spPr>
+          <a:xfrm>
+            <a:off x="7452360" y="4462272"/>
+            <a:ext cx="777240" cy="256032"/>
+          </a:xfrm>
+          <a:prstGeom prst="rect">
+            <a:avLst/>
+          </a:prstGeom>
+          <a:noFill/>
+          <a:ln/>
+        </p:spPr>
+        <p:txBody>
+          <a:bodyPr wrap="square" lIns="0" tIns="0" rIns="0" bIns="0" rtlCol="0" anchor="ctr"/>
+          <a:lstStyle/>
+          <a:p>
+            <a:pPr indent="0" marL="0">
+              <a:buNone/>
+            </a:pPr>
+            <a:r>
+              <a:rPr lang="en-US" sz="800" dirty="0">
+                <a:solidFill>
+                  <a:srgbClr val="8B949E"/>
+                </a:solidFill>
+                <a:latin typeface="Calibri" pitchFamily="34" charset="0"/>
+                <a:ea typeface="Calibri" pitchFamily="34" charset="-122"/>
+                <a:cs typeface="Calibri" pitchFamily="34" charset="-120"/>
+              </a:rPr>
+              <a:t>Storage</a:t>
+            </a:r>
+            <a:endParaRPr lang="en-US" sz="800" dirty="0"/>
+          </a:p>
+        </p:txBody>
+      </p:sp>
+      <p:sp>
+        <p:nvSpPr>
+          <p:cNvPr id="45" name="Shape 43"/>
+          <p:cNvSpPr/>
+          <p:nvPr/>
+        </p:nvSpPr>
+        <p:spPr>
+          <a:xfrm>
+            <a:off x="8321040" y="4498848"/>
+            <a:ext cx="182880" cy="182880"/>
+          </a:xfrm>
+          <a:prstGeom prst="rect">
+            <a:avLst/>
+          </a:prstGeom>
+          <a:solidFill>
+            <a:srgbClr val="BF360C"/>
+          </a:solidFill>
+          <a:ln/>
+        </p:spPr>
+      </p:sp>
+      <p:sp>
+        <p:nvSpPr>
+          <p:cNvPr id="46" name="Text 44"/>
+          <p:cNvSpPr/>
+          <p:nvPr/>
+        </p:nvSpPr>
+        <p:spPr>
+          <a:xfrm>
+            <a:off x="8549640" y="4462272"/>
+            <a:ext cx="777240" cy="256032"/>
+          </a:xfrm>
+          <a:prstGeom prst="rect">
+            <a:avLst/>
+          </a:prstGeom>
+          <a:noFill/>
+          <a:ln/>
+        </p:spPr>
+        <p:txBody>
+          <a:bodyPr wrap="square" lIns="0" tIns="0" rIns="0" bIns="0" rtlCol="0" anchor="ctr"/>
+          <a:lstStyle/>
+          <a:p>
+            <a:pPr indent="0" marL="0">
+              <a:buNone/>
+            </a:pPr>
+            <a:r>
+              <a:rPr lang="en-US" sz="800" dirty="0">
+                <a:solidFill>
+                  <a:srgbClr val="8B949E"/>
+                </a:solidFill>
+                <a:latin typeface="Calibri" pitchFamily="34" charset="0"/>
+                <a:ea typeface="Calibri" pitchFamily="34" charset="-122"/>
+                <a:cs typeface="Calibri" pitchFamily="34" charset="-120"/>
+              </a:rPr>
+              <a:t>Deliverables</a:t>
+            </a:r>
+            <a:endParaRPr lang="en-US" sz="800" dirty="0"/>
           </a:p>
         </p:txBody>
       </p:sp>
@@ -4953,7 +6061,6 @@
         <a:solidFill>
           <a:srgbClr val="0D1117"/>
         </a:solidFill>
-        <a:effectLst/>
       </p:bgPr>
     </p:bg>
     <p:spTree>
@@ -4989,13 +6096,6 @@
           </a:solidFill>
           <a:ln/>
         </p:spPr>
-        <p:txBody>
-          <a:bodyPr/>
-          <a:lstStyle/>
-          <a:p>
-            <a:endParaRPr lang="en-US"/>
-          </a:p>
-        </p:txBody>
       </p:sp>
       <p:sp>
         <p:nvSpPr>
@@ -5018,7 +6118,7 @@
           <a:bodyPr wrap="square" lIns="0" tIns="0" rIns="0" bIns="0" rtlCol="0" anchor="ctr"/>
           <a:lstStyle/>
           <a:p>
-            <a:pPr marL="0" indent="0">
+            <a:pPr indent="0" marL="0">
               <a:buNone/>
             </a:pPr>
             <a:r>
@@ -5057,7 +6157,7 @@
           <a:bodyPr wrap="square" lIns="0" tIns="0" rIns="0" bIns="0" rtlCol="0" anchor="ctr"/>
           <a:lstStyle/>
           <a:p>
-            <a:pPr marL="0" indent="0">
+            <a:pPr indent="0" marL="0">
               <a:buNone/>
             </a:pPr>
             <a:r>
@@ -5098,34 +6198,10 @@
             <a:tbl>
               <a:tblPr/>
               <a:tblGrid>
-                <a:gridCol w="2011680">
-                  <a:extLst>
-                    <a:ext uri="{9D8B030D-6E8A-4147-A177-3AD203B41FA5}">
-                      <a16:colId xmlns:a16="http://schemas.microsoft.com/office/drawing/2014/main" val="20000"/>
-                    </a:ext>
-                  </a:extLst>
-                </a:gridCol>
-                <a:gridCol w="2011680">
-                  <a:extLst>
-                    <a:ext uri="{9D8B030D-6E8A-4147-A177-3AD203B41FA5}">
-                      <a16:colId xmlns:a16="http://schemas.microsoft.com/office/drawing/2014/main" val="20001"/>
-                    </a:ext>
-                  </a:extLst>
-                </a:gridCol>
-                <a:gridCol w="2011680">
-                  <a:extLst>
-                    <a:ext uri="{9D8B030D-6E8A-4147-A177-3AD203B41FA5}">
-                      <a16:colId xmlns:a16="http://schemas.microsoft.com/office/drawing/2014/main" val="20002"/>
-                    </a:ext>
-                  </a:extLst>
-                </a:gridCol>
-                <a:gridCol w="2011680">
-                  <a:extLst>
-                    <a:ext uri="{9D8B030D-6E8A-4147-A177-3AD203B41FA5}">
-                      <a16:colId xmlns:a16="http://schemas.microsoft.com/office/drawing/2014/main" val="20003"/>
-                    </a:ext>
-                  </a:extLst>
-                </a:gridCol>
+                <a:gridCol w="2011680"/>
+                <a:gridCol w="2011680"/>
+                <a:gridCol w="2011680"/>
+                <a:gridCol w="2011680"/>
               </a:tblGrid>
               <a:tr h="411480">
                 <a:tc>
@@ -5133,7 +6209,7 @@
                     <a:bodyPr/>
                     <a:lstStyle/>
                     <a:p>
-                      <a:pPr marL="0" indent="0" algn="ctr">
+                      <a:pPr algn="ctr" indent="0" marL="0">
                         <a:buNone/>
                       </a:pPr>
                       <a:r>
@@ -5154,7 +6230,7 @@
                       </a:endParaRPr>
                     </a:p>
                   </a:txBody>
-                  <a:tcPr anchor="ctr">
+                  <a:tcPr marL="91440" marR="91440" marT="45720" marB="45720" anchor="ctr">
                     <a:lnL w="6350" cap="flat" cmpd="sng" algn="ctr">
                       <a:solidFill>
                         <a:srgbClr val="30363D"/>
@@ -5201,7 +6277,7 @@
                     <a:bodyPr/>
                     <a:lstStyle/>
                     <a:p>
-                      <a:pPr marL="0" indent="0" algn="ctr">
+                      <a:pPr algn="ctr" indent="0" marL="0">
                         <a:buNone/>
                       </a:pPr>
                       <a:r>
@@ -5222,7 +6298,7 @@
                       </a:endParaRPr>
                     </a:p>
                   </a:txBody>
-                  <a:tcPr anchor="ctr">
+                  <a:tcPr marL="91440" marR="91440" marT="45720" marB="45720" anchor="ctr">
                     <a:lnL w="6350" cap="flat" cmpd="sng" algn="ctr">
                       <a:solidFill>
                         <a:srgbClr val="30363D"/>
@@ -5269,7 +6345,7 @@
                     <a:bodyPr/>
                     <a:lstStyle/>
                     <a:p>
-                      <a:pPr marL="0" indent="0" algn="ctr">
+                      <a:pPr algn="ctr" indent="0" marL="0">
                         <a:buNone/>
                       </a:pPr>
                       <a:r>
@@ -5290,7 +6366,7 @@
                       </a:endParaRPr>
                     </a:p>
                   </a:txBody>
-                  <a:tcPr anchor="ctr">
+                  <a:tcPr marL="91440" marR="91440" marT="45720" marB="45720" anchor="ctr">
                     <a:lnL w="6350" cap="flat" cmpd="sng" algn="ctr">
                       <a:solidFill>
                         <a:srgbClr val="30363D"/>
@@ -5337,7 +6413,7 @@
                     <a:bodyPr/>
                     <a:lstStyle/>
                     <a:p>
-                      <a:pPr marL="0" indent="0" algn="ctr">
+                      <a:pPr algn="ctr" indent="0" marL="0">
                         <a:buNone/>
                       </a:pPr>
                       <a:r>
@@ -5358,7 +6434,7 @@
                       </a:endParaRPr>
                     </a:p>
                   </a:txBody>
-                  <a:tcPr anchor="ctr">
+                  <a:tcPr marL="91440" marR="91440" marT="45720" marB="45720" anchor="ctr">
                     <a:lnL w="6350" cap="flat" cmpd="sng" algn="ctr">
                       <a:solidFill>
                         <a:srgbClr val="30363D"/>
@@ -5400,11 +6476,6 @@
                     </a:solidFill>
                   </a:tcPr>
                 </a:tc>
-                <a:extLst>
-                  <a:ext uri="{0D108BD9-81ED-4DB2-BD59-A6C34878D82A}">
-                    <a16:rowId xmlns:a16="http://schemas.microsoft.com/office/drawing/2014/main" val="10000"/>
-                  </a:ext>
-                </a:extLst>
               </a:tr>
               <a:tr h="411480">
                 <a:tc>
@@ -5412,7 +6483,7 @@
                     <a:bodyPr/>
                     <a:lstStyle/>
                     <a:p>
-                      <a:pPr marL="0" indent="0" algn="ctr">
+                      <a:pPr algn="ctr" indent="0" marL="0">
                         <a:buNone/>
                       </a:pPr>
                       <a:r>
@@ -5433,7 +6504,7 @@
                       </a:endParaRPr>
                     </a:p>
                   </a:txBody>
-                  <a:tcPr anchor="ctr">
+                  <a:tcPr marL="91440" marR="91440" marT="45720" marB="45720" anchor="ctr">
                     <a:lnL w="6350" cap="flat" cmpd="sng" algn="ctr">
                       <a:solidFill>
                         <a:srgbClr val="30363D"/>
@@ -5480,7 +6551,7 @@
                     <a:bodyPr/>
                     <a:lstStyle/>
                     <a:p>
-                      <a:pPr marL="0" indent="0" algn="ctr">
+                      <a:pPr algn="ctr" indent="0" marL="0">
                         <a:buNone/>
                       </a:pPr>
                       <a:r>
@@ -5501,7 +6572,7 @@
                       </a:endParaRPr>
                     </a:p>
                   </a:txBody>
-                  <a:tcPr anchor="ctr">
+                  <a:tcPr marL="91440" marR="91440" marT="45720" marB="45720" anchor="ctr">
                     <a:lnL w="6350" cap="flat" cmpd="sng" algn="ctr">
                       <a:solidFill>
                         <a:srgbClr val="30363D"/>
@@ -5548,7 +6619,7 @@
                     <a:bodyPr/>
                     <a:lstStyle/>
                     <a:p>
-                      <a:pPr marL="0" indent="0" algn="ctr">
+                      <a:pPr algn="ctr" indent="0" marL="0">
                         <a:buNone/>
                       </a:pPr>
                       <a:r>
@@ -5569,7 +6640,7 @@
                       </a:endParaRPr>
                     </a:p>
                   </a:txBody>
-                  <a:tcPr anchor="ctr">
+                  <a:tcPr marL="91440" marR="91440" marT="45720" marB="45720" anchor="ctr">
                     <a:lnL w="6350" cap="flat" cmpd="sng" algn="ctr">
                       <a:solidFill>
                         <a:srgbClr val="30363D"/>
@@ -5616,7 +6687,7 @@
                     <a:bodyPr/>
                     <a:lstStyle/>
                     <a:p>
-                      <a:pPr marL="0" indent="0" algn="ctr">
+                      <a:pPr algn="ctr" indent="0" marL="0">
                         <a:buNone/>
                       </a:pPr>
                       <a:r>
@@ -5637,7 +6708,7 @@
                       </a:endParaRPr>
                     </a:p>
                   </a:txBody>
-                  <a:tcPr anchor="ctr">
+                  <a:tcPr marL="91440" marR="91440" marT="45720" marB="45720" anchor="ctr">
                     <a:lnL w="6350" cap="flat" cmpd="sng" algn="ctr">
                       <a:solidFill>
                         <a:srgbClr val="30363D"/>
@@ -5679,11 +6750,6 @@
                     </a:solidFill>
                   </a:tcPr>
                 </a:tc>
-                <a:extLst>
-                  <a:ext uri="{0D108BD9-81ED-4DB2-BD59-A6C34878D82A}">
-                    <a16:rowId xmlns:a16="http://schemas.microsoft.com/office/drawing/2014/main" val="10001"/>
-                  </a:ext>
-                </a:extLst>
               </a:tr>
               <a:tr h="411480">
                 <a:tc>
@@ -5691,7 +6757,7 @@
                     <a:bodyPr/>
                     <a:lstStyle/>
                     <a:p>
-                      <a:pPr marL="0" indent="0" algn="ctr">
+                      <a:pPr algn="ctr" indent="0" marL="0">
                         <a:buNone/>
                       </a:pPr>
                       <a:r>
@@ -5712,7 +6778,7 @@
                       </a:endParaRPr>
                     </a:p>
                   </a:txBody>
-                  <a:tcPr anchor="ctr">
+                  <a:tcPr marL="91440" marR="91440" marT="45720" marB="45720" anchor="ctr">
                     <a:lnL w="6350" cap="flat" cmpd="sng" algn="ctr">
                       <a:solidFill>
                         <a:srgbClr val="30363D"/>
@@ -5759,7 +6825,7 @@
                     <a:bodyPr/>
                     <a:lstStyle/>
                     <a:p>
-                      <a:pPr marL="0" indent="0" algn="ctr">
+                      <a:pPr algn="ctr" indent="0" marL="0">
                         <a:buNone/>
                       </a:pPr>
                       <a:r>
@@ -5780,7 +6846,7 @@
                       </a:endParaRPr>
                     </a:p>
                   </a:txBody>
-                  <a:tcPr anchor="ctr">
+                  <a:tcPr marL="91440" marR="91440" marT="45720" marB="45720" anchor="ctr">
                     <a:lnL w="6350" cap="flat" cmpd="sng" algn="ctr">
                       <a:solidFill>
                         <a:srgbClr val="30363D"/>
@@ -5827,7 +6893,7 @@
                     <a:bodyPr/>
                     <a:lstStyle/>
                     <a:p>
-                      <a:pPr marL="0" indent="0" algn="ctr">
+                      <a:pPr algn="ctr" indent="0" marL="0">
                         <a:buNone/>
                       </a:pPr>
                       <a:r>
@@ -5848,7 +6914,7 @@
                       </a:endParaRPr>
                     </a:p>
                   </a:txBody>
-                  <a:tcPr anchor="ctr">
+                  <a:tcPr marL="91440" marR="91440" marT="45720" marB="45720" anchor="ctr">
                     <a:lnL w="6350" cap="flat" cmpd="sng" algn="ctr">
                       <a:solidFill>
                         <a:srgbClr val="30363D"/>
@@ -5895,7 +6961,7 @@
                     <a:bodyPr/>
                     <a:lstStyle/>
                     <a:p>
-                      <a:pPr marL="0" indent="0" algn="ctr">
+                      <a:pPr algn="ctr" indent="0" marL="0">
                         <a:buNone/>
                       </a:pPr>
                       <a:r>
@@ -5916,7 +6982,7 @@
                       </a:endParaRPr>
                     </a:p>
                   </a:txBody>
-                  <a:tcPr anchor="ctr">
+                  <a:tcPr marL="91440" marR="91440" marT="45720" marB="45720" anchor="ctr">
                     <a:lnL w="6350" cap="flat" cmpd="sng" algn="ctr">
                       <a:solidFill>
                         <a:srgbClr val="30363D"/>
@@ -5958,11 +7024,6 @@
                     </a:solidFill>
                   </a:tcPr>
                 </a:tc>
-                <a:extLst>
-                  <a:ext uri="{0D108BD9-81ED-4DB2-BD59-A6C34878D82A}">
-                    <a16:rowId xmlns:a16="http://schemas.microsoft.com/office/drawing/2014/main" val="10002"/>
-                  </a:ext>
-                </a:extLst>
               </a:tr>
               <a:tr h="411480">
                 <a:tc>
@@ -5970,7 +7031,7 @@
                     <a:bodyPr/>
                     <a:lstStyle/>
                     <a:p>
-                      <a:pPr marL="0" indent="0" algn="ctr">
+                      <a:pPr algn="ctr" indent="0" marL="0">
                         <a:buNone/>
                       </a:pPr>
                       <a:r>
@@ -5991,7 +7052,7 @@
                       </a:endParaRPr>
                     </a:p>
                   </a:txBody>
-                  <a:tcPr anchor="ctr">
+                  <a:tcPr marL="91440" marR="91440" marT="45720" marB="45720" anchor="ctr">
                     <a:lnL w="6350" cap="flat" cmpd="sng" algn="ctr">
                       <a:solidFill>
                         <a:srgbClr val="30363D"/>
@@ -6038,7 +7099,7 @@
                     <a:bodyPr/>
                     <a:lstStyle/>
                     <a:p>
-                      <a:pPr marL="0" indent="0" algn="ctr">
+                      <a:pPr algn="ctr" indent="0" marL="0">
                         <a:buNone/>
                       </a:pPr>
                       <a:r>
@@ -6059,7 +7120,7 @@
                       </a:endParaRPr>
                     </a:p>
                   </a:txBody>
-                  <a:tcPr anchor="ctr">
+                  <a:tcPr marL="91440" marR="91440" marT="45720" marB="45720" anchor="ctr">
                     <a:lnL w="6350" cap="flat" cmpd="sng" algn="ctr">
                       <a:solidFill>
                         <a:srgbClr val="30363D"/>
@@ -6106,7 +7167,7 @@
                     <a:bodyPr/>
                     <a:lstStyle/>
                     <a:p>
-                      <a:pPr marL="0" indent="0" algn="ctr">
+                      <a:pPr algn="ctr" indent="0" marL="0">
                         <a:buNone/>
                       </a:pPr>
                       <a:r>
@@ -6127,7 +7188,7 @@
                       </a:endParaRPr>
                     </a:p>
                   </a:txBody>
-                  <a:tcPr anchor="ctr">
+                  <a:tcPr marL="91440" marR="91440" marT="45720" marB="45720" anchor="ctr">
                     <a:lnL w="6350" cap="flat" cmpd="sng" algn="ctr">
                       <a:solidFill>
                         <a:srgbClr val="30363D"/>
@@ -6174,7 +7235,7 @@
                     <a:bodyPr/>
                     <a:lstStyle/>
                     <a:p>
-                      <a:pPr marL="0" indent="0" algn="ctr">
+                      <a:pPr algn="ctr" indent="0" marL="0">
                         <a:buNone/>
                       </a:pPr>
                       <a:r>
@@ -6195,7 +7256,7 @@
                       </a:endParaRPr>
                     </a:p>
                   </a:txBody>
-                  <a:tcPr anchor="ctr">
+                  <a:tcPr marL="91440" marR="91440" marT="45720" marB="45720" anchor="ctr">
                     <a:lnL w="6350" cap="flat" cmpd="sng" algn="ctr">
                       <a:solidFill>
                         <a:srgbClr val="30363D"/>
@@ -6237,11 +7298,6 @@
                     </a:solidFill>
                   </a:tcPr>
                 </a:tc>
-                <a:extLst>
-                  <a:ext uri="{0D108BD9-81ED-4DB2-BD59-A6C34878D82A}">
-                    <a16:rowId xmlns:a16="http://schemas.microsoft.com/office/drawing/2014/main" val="10003"/>
-                  </a:ext>
-                </a:extLst>
               </a:tr>
               <a:tr h="411480">
                 <a:tc>
@@ -6249,7 +7305,7 @@
                     <a:bodyPr/>
                     <a:lstStyle/>
                     <a:p>
-                      <a:pPr marL="0" indent="0" algn="ctr">
+                      <a:pPr algn="ctr" indent="0" marL="0">
                         <a:buNone/>
                       </a:pPr>
                       <a:r>
@@ -6270,7 +7326,7 @@
                       </a:endParaRPr>
                     </a:p>
                   </a:txBody>
-                  <a:tcPr anchor="ctr">
+                  <a:tcPr marL="91440" marR="91440" marT="45720" marB="45720" anchor="ctr">
                     <a:lnL w="6350" cap="flat" cmpd="sng" algn="ctr">
                       <a:solidFill>
                         <a:srgbClr val="30363D"/>
@@ -6317,7 +7373,7 @@
                     <a:bodyPr/>
                     <a:lstStyle/>
                     <a:p>
-                      <a:pPr marL="0" indent="0" algn="ctr">
+                      <a:pPr algn="ctr" indent="0" marL="0">
                         <a:buNone/>
                       </a:pPr>
                       <a:r>
@@ -6338,7 +7394,7 @@
                       </a:endParaRPr>
                     </a:p>
                   </a:txBody>
-                  <a:tcPr anchor="ctr">
+                  <a:tcPr marL="91440" marR="91440" marT="45720" marB="45720" anchor="ctr">
                     <a:lnL w="6350" cap="flat" cmpd="sng" algn="ctr">
                       <a:solidFill>
                         <a:srgbClr val="30363D"/>
@@ -6385,7 +7441,7 @@
                     <a:bodyPr/>
                     <a:lstStyle/>
                     <a:p>
-                      <a:pPr marL="0" indent="0" algn="ctr">
+                      <a:pPr algn="ctr" indent="0" marL="0">
                         <a:buNone/>
                       </a:pPr>
                       <a:r>
@@ -6406,7 +7462,7 @@
                       </a:endParaRPr>
                     </a:p>
                   </a:txBody>
-                  <a:tcPr anchor="ctr">
+                  <a:tcPr marL="91440" marR="91440" marT="45720" marB="45720" anchor="ctr">
                     <a:lnL w="6350" cap="flat" cmpd="sng" algn="ctr">
                       <a:solidFill>
                         <a:srgbClr val="30363D"/>
@@ -6453,7 +7509,7 @@
                     <a:bodyPr/>
                     <a:lstStyle/>
                     <a:p>
-                      <a:pPr marL="0" indent="0" algn="ctr">
+                      <a:pPr algn="ctr" indent="0" marL="0">
                         <a:buNone/>
                       </a:pPr>
                       <a:r>
@@ -6474,7 +7530,7 @@
                       </a:endParaRPr>
                     </a:p>
                   </a:txBody>
-                  <a:tcPr anchor="ctr">
+                  <a:tcPr marL="91440" marR="91440" marT="45720" marB="45720" anchor="ctr">
                     <a:lnL w="6350" cap="flat" cmpd="sng" algn="ctr">
                       <a:solidFill>
                         <a:srgbClr val="30363D"/>
@@ -6516,11 +7572,6 @@
                     </a:solidFill>
                   </a:tcPr>
                 </a:tc>
-                <a:extLst>
-                  <a:ext uri="{0D108BD9-81ED-4DB2-BD59-A6C34878D82A}">
-                    <a16:rowId xmlns:a16="http://schemas.microsoft.com/office/drawing/2014/main" val="10004"/>
-                  </a:ext>
-                </a:extLst>
               </a:tr>
               <a:tr h="411480">
                 <a:tc>
@@ -6528,7 +7579,7 @@
                     <a:bodyPr/>
                     <a:lstStyle/>
                     <a:p>
-                      <a:pPr marL="0" indent="0" algn="ctr">
+                      <a:pPr algn="ctr" indent="0" marL="0">
                         <a:buNone/>
                       </a:pPr>
                       <a:r>
@@ -6549,7 +7600,7 @@
                       </a:endParaRPr>
                     </a:p>
                   </a:txBody>
-                  <a:tcPr anchor="ctr">
+                  <a:tcPr marL="91440" marR="91440" marT="45720" marB="45720" anchor="ctr">
                     <a:lnL w="6350" cap="flat" cmpd="sng" algn="ctr">
                       <a:solidFill>
                         <a:srgbClr val="30363D"/>
@@ -6596,7 +7647,7 @@
                     <a:bodyPr/>
                     <a:lstStyle/>
                     <a:p>
-                      <a:pPr marL="0" indent="0" algn="ctr">
+                      <a:pPr algn="ctr" indent="0" marL="0">
                         <a:buNone/>
                       </a:pPr>
                       <a:r>
@@ -6617,7 +7668,7 @@
                       </a:endParaRPr>
                     </a:p>
                   </a:txBody>
-                  <a:tcPr anchor="ctr">
+                  <a:tcPr marL="91440" marR="91440" marT="45720" marB="45720" anchor="ctr">
                     <a:lnL w="6350" cap="flat" cmpd="sng" algn="ctr">
                       <a:solidFill>
                         <a:srgbClr val="30363D"/>
@@ -6664,7 +7715,7 @@
                     <a:bodyPr/>
                     <a:lstStyle/>
                     <a:p>
-                      <a:pPr marL="0" indent="0" algn="ctr">
+                      <a:pPr algn="ctr" indent="0" marL="0">
                         <a:buNone/>
                       </a:pPr>
                       <a:r>
@@ -6685,7 +7736,7 @@
                       </a:endParaRPr>
                     </a:p>
                   </a:txBody>
-                  <a:tcPr anchor="ctr">
+                  <a:tcPr marL="91440" marR="91440" marT="45720" marB="45720" anchor="ctr">
                     <a:lnL w="6350" cap="flat" cmpd="sng" algn="ctr">
                       <a:solidFill>
                         <a:srgbClr val="30363D"/>
@@ -6732,7 +7783,7 @@
                     <a:bodyPr/>
                     <a:lstStyle/>
                     <a:p>
-                      <a:pPr marL="0" indent="0" algn="ctr">
+                      <a:pPr algn="ctr" indent="0" marL="0">
                         <a:buNone/>
                       </a:pPr>
                       <a:r>
@@ -6753,7 +7804,7 @@
                       </a:endParaRPr>
                     </a:p>
                   </a:txBody>
-                  <a:tcPr anchor="ctr">
+                  <a:tcPr marL="91440" marR="91440" marT="45720" marB="45720" anchor="ctr">
                     <a:lnL w="6350" cap="flat" cmpd="sng" algn="ctr">
                       <a:solidFill>
                         <a:srgbClr val="30363D"/>
@@ -6795,11 +7846,6 @@
                     </a:solidFill>
                   </a:tcPr>
                 </a:tc>
-                <a:extLst>
-                  <a:ext uri="{0D108BD9-81ED-4DB2-BD59-A6C34878D82A}">
-                    <a16:rowId xmlns:a16="http://schemas.microsoft.com/office/drawing/2014/main" val="10005"/>
-                  </a:ext>
-                </a:extLst>
               </a:tr>
               <a:tr h="411480">
                 <a:tc>
@@ -6807,7 +7853,7 @@
                     <a:bodyPr/>
                     <a:lstStyle/>
                     <a:p>
-                      <a:pPr marL="0" indent="0" algn="ctr">
+                      <a:pPr algn="ctr" indent="0" marL="0">
                         <a:buNone/>
                       </a:pPr>
                       <a:r>
@@ -6828,7 +7874,7 @@
                       </a:endParaRPr>
                     </a:p>
                   </a:txBody>
-                  <a:tcPr anchor="ctr">
+                  <a:tcPr marL="91440" marR="91440" marT="45720" marB="45720" anchor="ctr">
                     <a:lnL w="6350" cap="flat" cmpd="sng" algn="ctr">
                       <a:solidFill>
                         <a:srgbClr val="30363D"/>
@@ -6875,7 +7921,7 @@
                     <a:bodyPr/>
                     <a:lstStyle/>
                     <a:p>
-                      <a:pPr marL="0" indent="0" algn="ctr">
+                      <a:pPr algn="ctr" indent="0" marL="0">
                         <a:buNone/>
                       </a:pPr>
                       <a:r>
@@ -6896,7 +7942,7 @@
                       </a:endParaRPr>
                     </a:p>
                   </a:txBody>
-                  <a:tcPr anchor="ctr">
+                  <a:tcPr marL="91440" marR="91440" marT="45720" marB="45720" anchor="ctr">
                     <a:lnL w="6350" cap="flat" cmpd="sng" algn="ctr">
                       <a:solidFill>
                         <a:srgbClr val="30363D"/>
@@ -6943,7 +7989,7 @@
                     <a:bodyPr/>
                     <a:lstStyle/>
                     <a:p>
-                      <a:pPr marL="0" indent="0" algn="ctr">
+                      <a:pPr algn="ctr" indent="0" marL="0">
                         <a:buNone/>
                       </a:pPr>
                       <a:r>
@@ -6964,7 +8010,7 @@
                       </a:endParaRPr>
                     </a:p>
                   </a:txBody>
-                  <a:tcPr anchor="ctr">
+                  <a:tcPr marL="91440" marR="91440" marT="45720" marB="45720" anchor="ctr">
                     <a:lnL w="6350" cap="flat" cmpd="sng" algn="ctr">
                       <a:solidFill>
                         <a:srgbClr val="30363D"/>
@@ -7011,7 +8057,7 @@
                     <a:bodyPr/>
                     <a:lstStyle/>
                     <a:p>
-                      <a:pPr marL="0" indent="0" algn="ctr">
+                      <a:pPr algn="ctr" indent="0" marL="0">
                         <a:buNone/>
                       </a:pPr>
                       <a:r>
@@ -7032,7 +8078,7 @@
                       </a:endParaRPr>
                     </a:p>
                   </a:txBody>
-                  <a:tcPr anchor="ctr">
+                  <a:tcPr marL="91440" marR="91440" marT="45720" marB="45720" anchor="ctr">
                     <a:lnL w="6350" cap="flat" cmpd="sng" algn="ctr">
                       <a:solidFill>
                         <a:srgbClr val="30363D"/>
@@ -7074,11 +8120,6 @@
                     </a:solidFill>
                   </a:tcPr>
                 </a:tc>
-                <a:extLst>
-                  <a:ext uri="{0D108BD9-81ED-4DB2-BD59-A6C34878D82A}">
-                    <a16:rowId xmlns:a16="http://schemas.microsoft.com/office/drawing/2014/main" val="10006"/>
-                  </a:ext>
-                </a:extLst>
               </a:tr>
             </a:tbl>
           </a:graphicData>
@@ -7100,7 +8141,6 @@
         <a:solidFill>
           <a:srgbClr val="0D1117"/>
         </a:solidFill>
-        <a:effectLst/>
       </p:bgPr>
     </p:bg>
     <p:spTree>
@@ -7136,13 +8176,6 @@
           </a:solidFill>
           <a:ln/>
         </p:spPr>
-        <p:txBody>
-          <a:bodyPr/>
-          <a:lstStyle/>
-          <a:p>
-            <a:endParaRPr lang="en-US"/>
-          </a:p>
-        </p:txBody>
       </p:sp>
       <p:sp>
         <p:nvSpPr>
@@ -7165,7 +8198,7 @@
           <a:bodyPr wrap="square" lIns="0" tIns="0" rIns="0" bIns="0" rtlCol="0" anchor="ctr"/>
           <a:lstStyle/>
           <a:p>
-            <a:pPr marL="0" indent="0">
+            <a:pPr indent="0" marL="0">
               <a:buNone/>
             </a:pPr>
             <a:r>
@@ -7202,24 +8235,275 @@
           </a:solidFill>
           <a:ln/>
           <a:effectLst>
-            <a:outerShdw blurRad="101600" dist="38100" dir="8100000" algn="bl" rotWithShape="0">
+            <a:outerShdw sx="100000" sy="100000" kx="0" ky="0" algn="bl" rotWithShape="0" blurRad="101600" dist="38100" dir="8100000">
               <a:srgbClr val="000000">
                 <a:alpha val="35000"/>
               </a:srgbClr>
             </a:outerShdw>
           </a:effectLst>
         </p:spPr>
-        <p:txBody>
-          <a:bodyPr/>
-          <a:lstStyle/>
-          <a:p>
-            <a:endParaRPr lang="en-US"/>
-          </a:p>
-        </p:txBody>
       </p:sp>
       <p:pic>
         <p:nvPicPr>
-          <p:cNvPr id="5" name="Image 0" descr="preencoded.png"/>
+          <p:cNvPr id="5" name="Image 0" descr="preencoded.png">    </p:cNvPr>
+          <p:cNvPicPr>
+            <a:picLocks noChangeAspect="1"/>
+          </p:cNvPicPr>
+          <p:nvPr/>
+        </p:nvPicPr>
+        <p:blipFill>
+          <a:blip r:embed="rId1"/>
+          <a:stretch>
+            <a:fillRect/>
+          </a:stretch>
+        </p:blipFill>
+        <p:spPr>
+          <a:xfrm>
+            <a:off x="777240" y="1325880"/>
+            <a:ext cx="365760" cy="365760"/>
+          </a:xfrm>
+          <a:prstGeom prst="rect">
+            <a:avLst/>
+          </a:prstGeom>
+        </p:spPr>
+      </p:pic>
+      <p:sp>
+        <p:nvSpPr>
+          <p:cNvPr id="6" name="Text 3"/>
+          <p:cNvSpPr/>
+          <p:nvPr/>
+        </p:nvSpPr>
+        <p:spPr>
+          <a:xfrm>
+            <a:off x="1280160" y="1280160"/>
+            <a:ext cx="2834640" cy="320040"/>
+          </a:xfrm>
+          <a:prstGeom prst="rect">
+            <a:avLst/>
+          </a:prstGeom>
+          <a:noFill/>
+          <a:ln/>
+        </p:spPr>
+        <p:txBody>
+          <a:bodyPr wrap="square" lIns="0" tIns="0" rIns="0" bIns="0" rtlCol="0" anchor="ctr"/>
+          <a:lstStyle/>
+          <a:p>
+            <a:pPr indent="0" marL="0">
+              <a:buNone/>
+            </a:pPr>
+            <a:r>
+              <a:rPr lang="en-US" sz="1300" b="1" dirty="0">
+                <a:solidFill>
+                  <a:srgbClr val="00D4AA"/>
+                </a:solidFill>
+                <a:latin typeface="Calibri" pitchFamily="34" charset="0"/>
+                <a:ea typeface="Calibri" pitchFamily="34" charset="-122"/>
+                <a:cs typeface="Calibri" pitchFamily="34" charset="-120"/>
+              </a:rPr>
+              <a:t>Relational Trend Persistence</a:t>
+            </a:r>
+            <a:endParaRPr lang="en-US" sz="1300" dirty="0"/>
+          </a:p>
+        </p:txBody>
+      </p:sp>
+      <p:sp>
+        <p:nvSpPr>
+          <p:cNvPr id="7" name="Text 4"/>
+          <p:cNvSpPr/>
+          <p:nvPr/>
+        </p:nvSpPr>
+        <p:spPr>
+          <a:xfrm>
+            <a:off x="777240" y="1737360"/>
+            <a:ext cx="3474720" cy="914400"/>
+          </a:xfrm>
+          <a:prstGeom prst="rect">
+            <a:avLst/>
+          </a:prstGeom>
+          <a:noFill/>
+          <a:ln/>
+        </p:spPr>
+        <p:txBody>
+          <a:bodyPr wrap="square" lIns="0" tIns="0" rIns="0" bIns="0" rtlCol="0" anchor="ctr"/>
+          <a:lstStyle/>
+          <a:p>
+            <a:pPr indent="0" marL="0">
+              <a:buNone/>
+            </a:pPr>
+            <a:r>
+              <a:rPr lang="en-US" sz="1050" dirty="0">
+                <a:solidFill>
+                  <a:srgbClr val="8B949E"/>
+                </a:solidFill>
+                <a:latin typeface="Calibri" pitchFamily="34" charset="0"/>
+                <a:ea typeface="Calibri" pitchFamily="34" charset="-122"/>
+                <a:cs typeface="Calibri" pitchFamily="34" charset="-120"/>
+              </a:rPr>
+              <a:t>SQLite tables capture historical state across trending topics, notebooks, opportunities, interviews, and portfolio projects for longitudinal analytics.</a:t>
+            </a:r>
+            <a:endParaRPr lang="en-US" sz="1050" dirty="0"/>
+          </a:p>
+        </p:txBody>
+      </p:sp>
+      <p:sp>
+        <p:nvSpPr>
+          <p:cNvPr id="8" name="Shape 5"/>
+          <p:cNvSpPr/>
+          <p:nvPr/>
+        </p:nvSpPr>
+        <p:spPr>
+          <a:xfrm>
+            <a:off x="4709160" y="1097280"/>
+            <a:ext cx="3886200" cy="1691640"/>
+          </a:xfrm>
+          <a:prstGeom prst="rect">
+            <a:avLst/>
+          </a:prstGeom>
+          <a:solidFill>
+            <a:srgbClr val="21262D"/>
+          </a:solidFill>
+          <a:ln/>
+          <a:effectLst>
+            <a:outerShdw sx="100000" sy="100000" kx="0" ky="0" algn="bl" rotWithShape="0" blurRad="101600" dist="38100" dir="8100000">
+              <a:srgbClr val="000000">
+                <a:alpha val="35000"/>
+              </a:srgbClr>
+            </a:outerShdw>
+          </a:effectLst>
+        </p:spPr>
+      </p:sp>
+      <p:pic>
+        <p:nvPicPr>
+          <p:cNvPr id="9" name="Image 1" descr="preencoded.png">    </p:cNvPr>
+          <p:cNvPicPr>
+            <a:picLocks noChangeAspect="1"/>
+          </p:cNvPicPr>
+          <p:nvPr/>
+        </p:nvPicPr>
+        <p:blipFill>
+          <a:blip r:embed="rId2"/>
+          <a:stretch>
+            <a:fillRect/>
+          </a:stretch>
+        </p:blipFill>
+        <p:spPr>
+          <a:xfrm>
+            <a:off x="4937760" y="1325880"/>
+            <a:ext cx="365760" cy="365760"/>
+          </a:xfrm>
+          <a:prstGeom prst="rect">
+            <a:avLst/>
+          </a:prstGeom>
+        </p:spPr>
+      </p:pic>
+      <p:sp>
+        <p:nvSpPr>
+          <p:cNvPr id="10" name="Text 6"/>
+          <p:cNvSpPr/>
+          <p:nvPr/>
+        </p:nvSpPr>
+        <p:spPr>
+          <a:xfrm>
+            <a:off x="5440680" y="1280160"/>
+            <a:ext cx="2834640" cy="320040"/>
+          </a:xfrm>
+          <a:prstGeom prst="rect">
+            <a:avLst/>
+          </a:prstGeom>
+          <a:noFill/>
+          <a:ln/>
+        </p:spPr>
+        <p:txBody>
+          <a:bodyPr wrap="square" lIns="0" tIns="0" rIns="0" bIns="0" rtlCol="0" anchor="ctr"/>
+          <a:lstStyle/>
+          <a:p>
+            <a:pPr indent="0" marL="0">
+              <a:buNone/>
+            </a:pPr>
+            <a:r>
+              <a:rPr lang="en-US" sz="1300" b="1" dirty="0">
+                <a:solidFill>
+                  <a:srgbClr val="00D4AA"/>
+                </a:solidFill>
+                <a:latin typeface="Calibri" pitchFamily="34" charset="0"/>
+                <a:ea typeface="Calibri" pitchFamily="34" charset="-122"/>
+                <a:cs typeface="Calibri" pitchFamily="34" charset="-120"/>
+              </a:rPr>
+              <a:t>Intelligent Deduplication</a:t>
+            </a:r>
+            <a:endParaRPr lang="en-US" sz="1300" dirty="0"/>
+          </a:p>
+        </p:txBody>
+      </p:sp>
+      <p:sp>
+        <p:nvSpPr>
+          <p:cNvPr id="11" name="Text 7"/>
+          <p:cNvSpPr/>
+          <p:nvPr/>
+        </p:nvSpPr>
+        <p:spPr>
+          <a:xfrm>
+            <a:off x="4937760" y="1737360"/>
+            <a:ext cx="3474720" cy="914400"/>
+          </a:xfrm>
+          <a:prstGeom prst="rect">
+            <a:avLst/>
+          </a:prstGeom>
+          <a:noFill/>
+          <a:ln/>
+        </p:spPr>
+        <p:txBody>
+          <a:bodyPr wrap="square" lIns="0" tIns="0" rIns="0" bIns="0" rtlCol="0" anchor="ctr"/>
+          <a:lstStyle/>
+          <a:p>
+            <a:pPr indent="0" marL="0">
+              <a:buNone/>
+            </a:pPr>
+            <a:r>
+              <a:rPr lang="en-US" sz="1050" dirty="0">
+                <a:solidFill>
+                  <a:srgbClr val="8B949E"/>
+                </a:solidFill>
+                <a:latin typeface="Calibri" pitchFamily="34" charset="0"/>
+                <a:ea typeface="Calibri" pitchFamily="34" charset="-122"/>
+                <a:cs typeface="Calibri" pitchFamily="34" charset="-120"/>
+              </a:rPr>
+              <a:t>Semantic key normalization prevents redundant API calls. Agents query SQLite registers before executing expensive integrations, protecting token budgets.</a:t>
+            </a:r>
+            <a:endParaRPr lang="en-US" sz="1050" dirty="0"/>
+          </a:p>
+        </p:txBody>
+      </p:sp>
+      <p:sp>
+        <p:nvSpPr>
+          <p:cNvPr id="12" name="Shape 8"/>
+          <p:cNvSpPr/>
+          <p:nvPr/>
+        </p:nvSpPr>
+        <p:spPr>
+          <a:xfrm>
+            <a:off x="548640" y="2971800"/>
+            <a:ext cx="3886200" cy="1691640"/>
+          </a:xfrm>
+          <a:prstGeom prst="rect">
+            <a:avLst/>
+          </a:prstGeom>
+          <a:solidFill>
+            <a:srgbClr val="21262D"/>
+          </a:solidFill>
+          <a:ln/>
+          <a:effectLst>
+            <a:outerShdw sx="100000" sy="100000" kx="0" ky="0" algn="bl" rotWithShape="0" blurRad="101600" dist="38100" dir="8100000">
+              <a:srgbClr val="000000">
+                <a:alpha val="35000"/>
+              </a:srgbClr>
+            </a:outerShdw>
+          </a:effectLst>
+        </p:spPr>
+      </p:sp>
+      <p:pic>
+        <p:nvPicPr>
+          <p:cNvPr id="13" name="Image 2" descr="preencoded.png">    </p:cNvPr>
           <p:cNvPicPr>
             <a:picLocks noChangeAspect="1"/>
           </p:cNvPicPr>
@@ -7233,7 +8517,7 @@
         </p:blipFill>
         <p:spPr>
           <a:xfrm>
-            <a:off x="777240" y="1325880"/>
+            <a:off x="777240" y="3200400"/>
             <a:ext cx="365760" cy="365760"/>
           </a:xfrm>
           <a:prstGeom prst="rect">
@@ -7243,13 +8527,13 @@
       </p:pic>
       <p:sp>
         <p:nvSpPr>
-          <p:cNvPr id="6" name="Text 3"/>
-          <p:cNvSpPr/>
-          <p:nvPr/>
-        </p:nvSpPr>
-        <p:spPr>
-          <a:xfrm>
-            <a:off x="1280160" y="1280160"/>
+          <p:cNvPr id="14" name="Text 9"/>
+          <p:cNvSpPr/>
+          <p:nvPr/>
+        </p:nvSpPr>
+        <p:spPr>
+          <a:xfrm>
+            <a:off x="1280160" y="3154680"/>
             <a:ext cx="2834640" cy="320040"/>
           </a:xfrm>
           <a:prstGeom prst="rect">
@@ -7262,7 +8546,7 @@
           <a:bodyPr wrap="square" lIns="0" tIns="0" rIns="0" bIns="0" rtlCol="0" anchor="ctr"/>
           <a:lstStyle/>
           <a:p>
-            <a:pPr marL="0" indent="0">
+            <a:pPr indent="0" marL="0">
               <a:buNone/>
             </a:pPr>
             <a:r>
@@ -7274,7 +8558,7 @@
                 <a:ea typeface="Calibri" pitchFamily="34" charset="-122"/>
                 <a:cs typeface="Calibri" pitchFamily="34" charset="-120"/>
               </a:rPr>
-              <a:t>Relational Trend Persistence</a:t>
+              <a:t>Multi-Source Learning Hub</a:t>
             </a:r>
             <a:endParaRPr lang="en-US" sz="1300" dirty="0"/>
           </a:p>
@@ -7282,13 +8566,13 @@
       </p:sp>
       <p:sp>
         <p:nvSpPr>
-          <p:cNvPr id="7" name="Text 4"/>
-          <p:cNvSpPr/>
-          <p:nvPr/>
-        </p:nvSpPr>
-        <p:spPr>
-          <a:xfrm>
-            <a:off x="777240" y="1737360"/>
+          <p:cNvPr id="15" name="Text 10"/>
+          <p:cNvSpPr/>
+          <p:nvPr/>
+        </p:nvSpPr>
+        <p:spPr>
+          <a:xfrm>
+            <a:off x="777240" y="3611880"/>
             <a:ext cx="3474720" cy="914400"/>
           </a:xfrm>
           <a:prstGeom prst="rect">
@@ -7301,7 +8585,7 @@
           <a:bodyPr wrap="square" lIns="0" tIns="0" rIns="0" bIns="0" rtlCol="0" anchor="ctr"/>
           <a:lstStyle/>
           <a:p>
-            <a:pPr marL="0" indent="0">
+            <a:pPr indent="0" marL="0">
               <a:buNone/>
             </a:pPr>
             <a:r>
@@ -7313,7 +8597,7 @@
                 <a:ea typeface="Calibri" pitchFamily="34" charset="-122"/>
                 <a:cs typeface="Calibri" pitchFamily="34" charset="-120"/>
               </a:rPr>
-              <a:t>SQLite tables capture historical state across trending topics, notebooks, opportunities, interviews, and portfolio projects for longitudinal analytics.</a:t>
+              <a:t>arXiv papers + GitHub repos compiled into NotebookLM workspaces. Generates audio podcasts, visual mindmaps, and structured weekly study plans.</a:t>
             </a:r>
             <a:endParaRPr lang="en-US" sz="1050" dirty="0"/>
           </a:p>
@@ -7321,13 +8605,13 @@
       </p:sp>
       <p:sp>
         <p:nvSpPr>
-          <p:cNvPr id="8" name="Shape 5"/>
-          <p:cNvSpPr/>
-          <p:nvPr/>
-        </p:nvSpPr>
-        <p:spPr>
-          <a:xfrm>
-            <a:off x="4709160" y="1097280"/>
+          <p:cNvPr id="16" name="Shape 11"/>
+          <p:cNvSpPr/>
+          <p:nvPr/>
+        </p:nvSpPr>
+        <p:spPr>
+          <a:xfrm>
+            <a:off x="4709160" y="2971800"/>
             <a:ext cx="3886200" cy="1691640"/>
           </a:xfrm>
           <a:prstGeom prst="rect">
@@ -7338,24 +8622,17 @@
           </a:solidFill>
           <a:ln/>
           <a:effectLst>
-            <a:outerShdw blurRad="101600" dist="38100" dir="8100000" algn="bl" rotWithShape="0">
+            <a:outerShdw sx="100000" sy="100000" kx="0" ky="0" algn="bl" rotWithShape="0" blurRad="101600" dist="38100" dir="8100000">
               <a:srgbClr val="000000">
                 <a:alpha val="35000"/>
               </a:srgbClr>
             </a:outerShdw>
           </a:effectLst>
         </p:spPr>
-        <p:txBody>
-          <a:bodyPr/>
-          <a:lstStyle/>
-          <a:p>
-            <a:endParaRPr lang="en-US"/>
-          </a:p>
-        </p:txBody>
       </p:sp>
       <p:pic>
         <p:nvPicPr>
-          <p:cNvPr id="9" name="Image 1" descr="preencoded.png"/>
+          <p:cNvPr id="17" name="Image 3" descr="preencoded.png">    </p:cNvPr>
           <p:cNvPicPr>
             <a:picLocks noChangeAspect="1"/>
           </p:cNvPicPr>
@@ -7369,7 +8646,7 @@
         </p:blipFill>
         <p:spPr>
           <a:xfrm>
-            <a:off x="4937760" y="1325880"/>
+            <a:off x="4937760" y="3200400"/>
             <a:ext cx="365760" cy="365760"/>
           </a:xfrm>
           <a:prstGeom prst="rect">
@@ -7379,13 +8656,13 @@
       </p:pic>
       <p:sp>
         <p:nvSpPr>
-          <p:cNvPr id="10" name="Text 6"/>
-          <p:cNvSpPr/>
-          <p:nvPr/>
-        </p:nvSpPr>
-        <p:spPr>
-          <a:xfrm>
-            <a:off x="5440680" y="1280160"/>
+          <p:cNvPr id="18" name="Text 12"/>
+          <p:cNvSpPr/>
+          <p:nvPr/>
+        </p:nvSpPr>
+        <p:spPr>
+          <a:xfrm>
+            <a:off x="5440680" y="3154680"/>
             <a:ext cx="2834640" cy="320040"/>
           </a:xfrm>
           <a:prstGeom prst="rect">
@@ -7398,7 +8675,7 @@
           <a:bodyPr wrap="square" lIns="0" tIns="0" rIns="0" bIns="0" rtlCol="0" anchor="ctr"/>
           <a:lstStyle/>
           <a:p>
-            <a:pPr marL="0" indent="0">
+            <a:pPr indent="0" marL="0">
               <a:buNone/>
             </a:pPr>
             <a:r>
@@ -7410,278 +8687,6 @@
                 <a:ea typeface="Calibri" pitchFamily="34" charset="-122"/>
                 <a:cs typeface="Calibri" pitchFamily="34" charset="-120"/>
               </a:rPr>
-              <a:t>Intelligent Deduplication</a:t>
-            </a:r>
-            <a:endParaRPr lang="en-US" sz="1300" dirty="0"/>
-          </a:p>
-        </p:txBody>
-      </p:sp>
-      <p:sp>
-        <p:nvSpPr>
-          <p:cNvPr id="11" name="Text 7"/>
-          <p:cNvSpPr/>
-          <p:nvPr/>
-        </p:nvSpPr>
-        <p:spPr>
-          <a:xfrm>
-            <a:off x="4937760" y="1737360"/>
-            <a:ext cx="3474720" cy="914400"/>
-          </a:xfrm>
-          <a:prstGeom prst="rect">
-            <a:avLst/>
-          </a:prstGeom>
-          <a:noFill/>
-          <a:ln/>
-        </p:spPr>
-        <p:txBody>
-          <a:bodyPr wrap="square" lIns="0" tIns="0" rIns="0" bIns="0" rtlCol="0" anchor="ctr"/>
-          <a:lstStyle/>
-          <a:p>
-            <a:pPr marL="0" indent="0">
-              <a:buNone/>
-            </a:pPr>
-            <a:r>
-              <a:rPr lang="en-US" sz="1050" dirty="0">
-                <a:solidFill>
-                  <a:srgbClr val="8B949E"/>
-                </a:solidFill>
-                <a:latin typeface="Calibri" pitchFamily="34" charset="0"/>
-                <a:ea typeface="Calibri" pitchFamily="34" charset="-122"/>
-                <a:cs typeface="Calibri" pitchFamily="34" charset="-120"/>
-              </a:rPr>
-              <a:t>Semantic key normalization prevents redundant API calls. Agents query SQLite registers before executing expensive integrations, protecting token budgets.</a:t>
-            </a:r>
-            <a:endParaRPr lang="en-US" sz="1050" dirty="0"/>
-          </a:p>
-        </p:txBody>
-      </p:sp>
-      <p:sp>
-        <p:nvSpPr>
-          <p:cNvPr id="12" name="Shape 8"/>
-          <p:cNvSpPr/>
-          <p:nvPr/>
-        </p:nvSpPr>
-        <p:spPr>
-          <a:xfrm>
-            <a:off x="548640" y="2971800"/>
-            <a:ext cx="3886200" cy="1691640"/>
-          </a:xfrm>
-          <a:prstGeom prst="rect">
-            <a:avLst/>
-          </a:prstGeom>
-          <a:solidFill>
-            <a:srgbClr val="21262D"/>
-          </a:solidFill>
-          <a:ln/>
-          <a:effectLst>
-            <a:outerShdw blurRad="101600" dist="38100" dir="8100000" algn="bl" rotWithShape="0">
-              <a:srgbClr val="000000">
-                <a:alpha val="35000"/>
-              </a:srgbClr>
-            </a:outerShdw>
-          </a:effectLst>
-        </p:spPr>
-        <p:txBody>
-          <a:bodyPr/>
-          <a:lstStyle/>
-          <a:p>
-            <a:endParaRPr lang="en-US"/>
-          </a:p>
-        </p:txBody>
-      </p:sp>
-      <p:pic>
-        <p:nvPicPr>
-          <p:cNvPr id="13" name="Image 2" descr="preencoded.png"/>
-          <p:cNvPicPr>
-            <a:picLocks noChangeAspect="1"/>
-          </p:cNvPicPr>
-          <p:nvPr/>
-        </p:nvPicPr>
-        <p:blipFill>
-          <a:blip r:embed="rId5"/>
-          <a:stretch>
-            <a:fillRect/>
-          </a:stretch>
-        </p:blipFill>
-        <p:spPr>
-          <a:xfrm>
-            <a:off x="777240" y="3200400"/>
-            <a:ext cx="365760" cy="365760"/>
-          </a:xfrm>
-          <a:prstGeom prst="rect">
-            <a:avLst/>
-          </a:prstGeom>
-        </p:spPr>
-      </p:pic>
-      <p:sp>
-        <p:nvSpPr>
-          <p:cNvPr id="14" name="Text 9"/>
-          <p:cNvSpPr/>
-          <p:nvPr/>
-        </p:nvSpPr>
-        <p:spPr>
-          <a:xfrm>
-            <a:off x="1280160" y="3154680"/>
-            <a:ext cx="2834640" cy="320040"/>
-          </a:xfrm>
-          <a:prstGeom prst="rect">
-            <a:avLst/>
-          </a:prstGeom>
-          <a:noFill/>
-          <a:ln/>
-        </p:spPr>
-        <p:txBody>
-          <a:bodyPr wrap="square" lIns="0" tIns="0" rIns="0" bIns="0" rtlCol="0" anchor="ctr"/>
-          <a:lstStyle/>
-          <a:p>
-            <a:pPr marL="0" indent="0">
-              <a:buNone/>
-            </a:pPr>
-            <a:r>
-              <a:rPr lang="en-US" sz="1300" b="1" dirty="0">
-                <a:solidFill>
-                  <a:srgbClr val="00D4AA"/>
-                </a:solidFill>
-                <a:latin typeface="Calibri" pitchFamily="34" charset="0"/>
-                <a:ea typeface="Calibri" pitchFamily="34" charset="-122"/>
-                <a:cs typeface="Calibri" pitchFamily="34" charset="-120"/>
-              </a:rPr>
-              <a:t>Multi-Source Learning Hub</a:t>
-            </a:r>
-            <a:endParaRPr lang="en-US" sz="1300" dirty="0"/>
-          </a:p>
-        </p:txBody>
-      </p:sp>
-      <p:sp>
-        <p:nvSpPr>
-          <p:cNvPr id="15" name="Text 10"/>
-          <p:cNvSpPr/>
-          <p:nvPr/>
-        </p:nvSpPr>
-        <p:spPr>
-          <a:xfrm>
-            <a:off x="777240" y="3611880"/>
-            <a:ext cx="3474720" cy="914400"/>
-          </a:xfrm>
-          <a:prstGeom prst="rect">
-            <a:avLst/>
-          </a:prstGeom>
-          <a:noFill/>
-          <a:ln/>
-        </p:spPr>
-        <p:txBody>
-          <a:bodyPr wrap="square" lIns="0" tIns="0" rIns="0" bIns="0" rtlCol="0" anchor="ctr"/>
-          <a:lstStyle/>
-          <a:p>
-            <a:pPr marL="0" indent="0">
-              <a:buNone/>
-            </a:pPr>
-            <a:r>
-              <a:rPr lang="en-US" sz="1050" dirty="0">
-                <a:solidFill>
-                  <a:srgbClr val="8B949E"/>
-                </a:solidFill>
-                <a:latin typeface="Calibri" pitchFamily="34" charset="0"/>
-                <a:ea typeface="Calibri" pitchFamily="34" charset="-122"/>
-                <a:cs typeface="Calibri" pitchFamily="34" charset="-120"/>
-              </a:rPr>
-              <a:t>arXiv papers + GitHub repos compiled into NotebookLM workspaces. Generates audio podcasts, visual mindmaps, and structured weekly study plans.</a:t>
-            </a:r>
-            <a:endParaRPr lang="en-US" sz="1050" dirty="0"/>
-          </a:p>
-        </p:txBody>
-      </p:sp>
-      <p:sp>
-        <p:nvSpPr>
-          <p:cNvPr id="16" name="Shape 11"/>
-          <p:cNvSpPr/>
-          <p:nvPr/>
-        </p:nvSpPr>
-        <p:spPr>
-          <a:xfrm>
-            <a:off x="4709160" y="2971800"/>
-            <a:ext cx="3886200" cy="1691640"/>
-          </a:xfrm>
-          <a:prstGeom prst="rect">
-            <a:avLst/>
-          </a:prstGeom>
-          <a:solidFill>
-            <a:srgbClr val="21262D"/>
-          </a:solidFill>
-          <a:ln/>
-          <a:effectLst>
-            <a:outerShdw blurRad="101600" dist="38100" dir="8100000" algn="bl" rotWithShape="0">
-              <a:srgbClr val="000000">
-                <a:alpha val="35000"/>
-              </a:srgbClr>
-            </a:outerShdw>
-          </a:effectLst>
-        </p:spPr>
-        <p:txBody>
-          <a:bodyPr/>
-          <a:lstStyle/>
-          <a:p>
-            <a:endParaRPr lang="en-US"/>
-          </a:p>
-        </p:txBody>
-      </p:sp>
-      <p:pic>
-        <p:nvPicPr>
-          <p:cNvPr id="17" name="Image 3" descr="preencoded.png"/>
-          <p:cNvPicPr>
-            <a:picLocks noChangeAspect="1"/>
-          </p:cNvPicPr>
-          <p:nvPr/>
-        </p:nvPicPr>
-        <p:blipFill>
-          <a:blip r:embed="rId6"/>
-          <a:stretch>
-            <a:fillRect/>
-          </a:stretch>
-        </p:blipFill>
-        <p:spPr>
-          <a:xfrm>
-            <a:off x="4937760" y="3200400"/>
-            <a:ext cx="365760" cy="365760"/>
-          </a:xfrm>
-          <a:prstGeom prst="rect">
-            <a:avLst/>
-          </a:prstGeom>
-        </p:spPr>
-      </p:pic>
-      <p:sp>
-        <p:nvSpPr>
-          <p:cNvPr id="18" name="Text 12"/>
-          <p:cNvSpPr/>
-          <p:nvPr/>
-        </p:nvSpPr>
-        <p:spPr>
-          <a:xfrm>
-            <a:off x="5440680" y="3154680"/>
-            <a:ext cx="2834640" cy="320040"/>
-          </a:xfrm>
-          <a:prstGeom prst="rect">
-            <a:avLst/>
-          </a:prstGeom>
-          <a:noFill/>
-          <a:ln/>
-        </p:spPr>
-        <p:txBody>
-          <a:bodyPr wrap="square" lIns="0" tIns="0" rIns="0" bIns="0" rtlCol="0" anchor="ctr"/>
-          <a:lstStyle/>
-          <a:p>
-            <a:pPr marL="0" indent="0">
-              <a:buNone/>
-            </a:pPr>
-            <a:r>
-              <a:rPr lang="en-US" sz="1300" b="1" dirty="0">
-                <a:solidFill>
-                  <a:srgbClr val="00D4AA"/>
-                </a:solidFill>
-                <a:latin typeface="Calibri" pitchFamily="34" charset="0"/>
-                <a:ea typeface="Calibri" pitchFamily="34" charset="-122"/>
-                <a:cs typeface="Calibri" pitchFamily="34" charset="-120"/>
-              </a:rPr>
               <a:t>Proof-of-Work Scaffolding</a:t>
             </a:r>
             <a:endParaRPr lang="en-US" sz="1300" dirty="0"/>
@@ -7709,7 +8714,7 @@
           <a:bodyPr wrap="square" lIns="0" tIns="0" rIns="0" bIns="0" rtlCol="0" anchor="ctr"/>
           <a:lstStyle/>
           <a:p>
-            <a:pPr marL="0" indent="0">
+            <a:pPr indent="0" marL="0">
               <a:buNone/>
             </a:pPr>
             <a:r>
@@ -7743,7 +8748,6 @@
         <a:solidFill>
           <a:srgbClr val="0D1117"/>
         </a:solidFill>
-        <a:effectLst/>
       </p:bgPr>
     </p:bg>
     <p:spTree>
@@ -7779,13 +8783,6 @@
           </a:solidFill>
           <a:ln/>
         </p:spPr>
-        <p:txBody>
-          <a:bodyPr/>
-          <a:lstStyle/>
-          <a:p>
-            <a:endParaRPr lang="en-US"/>
-          </a:p>
-        </p:txBody>
       </p:sp>
       <p:sp>
         <p:nvSpPr>
@@ -7808,7 +8805,7 @@
           <a:bodyPr wrap="square" lIns="0" tIns="0" rIns="0" bIns="0" rtlCol="0" anchor="ctr"/>
           <a:lstStyle/>
           <a:p>
-            <a:pPr marL="0" indent="0">
+            <a:pPr indent="0" marL="0">
               <a:buNone/>
             </a:pPr>
             <a:r>
@@ -7847,7 +8844,7 @@
           <a:bodyPr wrap="square" lIns="0" tIns="0" rIns="0" bIns="0" rtlCol="0" anchor="ctr"/>
           <a:lstStyle/>
           <a:p>
-            <a:pPr marL="0" indent="0">
+            <a:pPr indent="0" marL="0">
               <a:buNone/>
             </a:pPr>
             <a:r>
@@ -7884,13 +8881,6 @@
           </a:solidFill>
           <a:ln/>
         </p:spPr>
-        <p:txBody>
-          <a:bodyPr/>
-          <a:lstStyle/>
-          <a:p>
-            <a:endParaRPr lang="en-US"/>
-          </a:p>
-        </p:txBody>
       </p:sp>
       <p:sp>
         <p:nvSpPr>
@@ -7911,13 +8901,6 @@
           </a:solidFill>
           <a:ln/>
         </p:spPr>
-        <p:txBody>
-          <a:bodyPr/>
-          <a:lstStyle/>
-          <a:p>
-            <a:endParaRPr lang="en-US"/>
-          </a:p>
-        </p:txBody>
       </p:sp>
       <p:sp>
         <p:nvSpPr>
@@ -7940,7 +8923,7 @@
           <a:bodyPr wrap="square" lIns="0" tIns="0" rIns="0" bIns="0" rtlCol="0" anchor="ctr"/>
           <a:lstStyle/>
           <a:p>
-            <a:pPr marL="0" indent="0">
+            <a:pPr indent="0" marL="0">
               <a:buNone/>
             </a:pPr>
             <a:r>
@@ -7979,7 +8962,7 @@
           <a:bodyPr wrap="square" lIns="0" tIns="0" rIns="0" bIns="0" rtlCol="0" anchor="ctr"/>
           <a:lstStyle/>
           <a:p>
-            <a:pPr marL="0" indent="0">
+            <a:pPr indent="0" marL="0">
               <a:buNone/>
             </a:pPr>
             <a:r>
@@ -8016,13 +8999,6 @@
           </a:solidFill>
           <a:ln/>
         </p:spPr>
-        <p:txBody>
-          <a:bodyPr/>
-          <a:lstStyle/>
-          <a:p>
-            <a:endParaRPr lang="en-US"/>
-          </a:p>
-        </p:txBody>
       </p:sp>
       <p:sp>
         <p:nvSpPr>
@@ -8045,7 +9021,7 @@
           <a:bodyPr wrap="square" lIns="0" tIns="0" rIns="0" bIns="0" rtlCol="0" anchor="ctr"/>
           <a:lstStyle/>
           <a:p>
-            <a:pPr marL="0" indent="0" algn="ctr">
+            <a:pPr algn="ctr" indent="0" marL="0">
               <a:buNone/>
             </a:pPr>
             <a:r>
@@ -8084,7 +9060,7 @@
           <a:bodyPr wrap="square" lIns="0" tIns="0" rIns="0" bIns="0" rtlCol="0" anchor="ctr"/>
           <a:lstStyle/>
           <a:p>
-            <a:pPr marL="0" indent="0" algn="ctr">
+            <a:pPr algn="ctr" indent="0" marL="0">
               <a:buNone/>
             </a:pPr>
             <a:r>
@@ -8121,13 +9097,6 @@
           </a:solidFill>
           <a:ln/>
         </p:spPr>
-        <p:txBody>
-          <a:bodyPr/>
-          <a:lstStyle/>
-          <a:p>
-            <a:endParaRPr lang="en-US"/>
-          </a:p>
-        </p:txBody>
       </p:sp>
       <p:sp>
         <p:nvSpPr>
@@ -8148,13 +9117,6 @@
           </a:solidFill>
           <a:ln/>
         </p:spPr>
-        <p:txBody>
-          <a:bodyPr/>
-          <a:lstStyle/>
-          <a:p>
-            <a:endParaRPr lang="en-US"/>
-          </a:p>
-        </p:txBody>
       </p:sp>
       <p:sp>
         <p:nvSpPr>
@@ -8177,7 +9139,7 @@
           <a:bodyPr wrap="square" lIns="0" tIns="0" rIns="0" bIns="0" rtlCol="0" anchor="ctr"/>
           <a:lstStyle/>
           <a:p>
-            <a:pPr marL="0" indent="0">
+            <a:pPr indent="0" marL="0">
               <a:buNone/>
             </a:pPr>
             <a:r>
@@ -8216,7 +9178,7 @@
           <a:bodyPr wrap="square" lIns="0" tIns="0" rIns="0" bIns="0" rtlCol="0" anchor="ctr"/>
           <a:lstStyle/>
           <a:p>
-            <a:pPr marL="0" indent="0">
+            <a:pPr indent="0" marL="0">
               <a:buNone/>
             </a:pPr>
             <a:r>
@@ -8253,13 +9215,6 @@
           </a:solidFill>
           <a:ln/>
         </p:spPr>
-        <p:txBody>
-          <a:bodyPr/>
-          <a:lstStyle/>
-          <a:p>
-            <a:endParaRPr lang="en-US"/>
-          </a:p>
-        </p:txBody>
       </p:sp>
       <p:sp>
         <p:nvSpPr>
@@ -8282,7 +9237,7 @@
           <a:bodyPr wrap="square" lIns="0" tIns="0" rIns="0" bIns="0" rtlCol="0" anchor="ctr"/>
           <a:lstStyle/>
           <a:p>
-            <a:pPr marL="0" indent="0" algn="ctr">
+            <a:pPr algn="ctr" indent="0" marL="0">
               <a:buNone/>
             </a:pPr>
             <a:r>
@@ -8321,7 +9276,7 @@
           <a:bodyPr wrap="square" lIns="0" tIns="0" rIns="0" bIns="0" rtlCol="0" anchor="ctr"/>
           <a:lstStyle/>
           <a:p>
-            <a:pPr marL="0" indent="0" algn="ctr">
+            <a:pPr algn="ctr" indent="0" marL="0">
               <a:buNone/>
             </a:pPr>
             <a:r>
@@ -8358,13 +9313,6 @@
           </a:solidFill>
           <a:ln/>
         </p:spPr>
-        <p:txBody>
-          <a:bodyPr/>
-          <a:lstStyle/>
-          <a:p>
-            <a:endParaRPr lang="en-US"/>
-          </a:p>
-        </p:txBody>
       </p:sp>
       <p:sp>
         <p:nvSpPr>
@@ -8385,13 +9333,6 @@
           </a:solidFill>
           <a:ln/>
         </p:spPr>
-        <p:txBody>
-          <a:bodyPr/>
-          <a:lstStyle/>
-          <a:p>
-            <a:endParaRPr lang="en-US"/>
-          </a:p>
-        </p:txBody>
       </p:sp>
       <p:sp>
         <p:nvSpPr>
@@ -8414,7 +9355,7 @@
           <a:bodyPr wrap="square" lIns="0" tIns="0" rIns="0" bIns="0" rtlCol="0" anchor="ctr"/>
           <a:lstStyle/>
           <a:p>
-            <a:pPr marL="0" indent="0">
+            <a:pPr indent="0" marL="0">
               <a:buNone/>
             </a:pPr>
             <a:r>
@@ -8453,7 +9394,7 @@
           <a:bodyPr wrap="square" lIns="0" tIns="0" rIns="0" bIns="0" rtlCol="0" anchor="ctr"/>
           <a:lstStyle/>
           <a:p>
-            <a:pPr marL="0" indent="0">
+            <a:pPr indent="0" marL="0">
               <a:buNone/>
             </a:pPr>
             <a:r>
@@ -8490,13 +9431,6 @@
           </a:solidFill>
           <a:ln/>
         </p:spPr>
-        <p:txBody>
-          <a:bodyPr/>
-          <a:lstStyle/>
-          <a:p>
-            <a:endParaRPr lang="en-US"/>
-          </a:p>
-        </p:txBody>
       </p:sp>
       <p:sp>
         <p:nvSpPr>
@@ -8519,7 +9453,7 @@
           <a:bodyPr wrap="square" lIns="0" tIns="0" rIns="0" bIns="0" rtlCol="0" anchor="ctr"/>
           <a:lstStyle/>
           <a:p>
-            <a:pPr marL="0" indent="0" algn="ctr">
+            <a:pPr algn="ctr" indent="0" marL="0">
               <a:buNone/>
             </a:pPr>
             <a:r>
@@ -8558,7 +9492,7 @@
           <a:bodyPr wrap="square" lIns="0" tIns="0" rIns="0" bIns="0" rtlCol="0" anchor="ctr"/>
           <a:lstStyle/>
           <a:p>
-            <a:pPr marL="0" indent="0" algn="ctr">
+            <a:pPr algn="ctr" indent="0" marL="0">
               <a:buNone/>
             </a:pPr>
             <a:r>
@@ -8595,13 +9529,6 @@
           </a:solidFill>
           <a:ln/>
         </p:spPr>
-        <p:txBody>
-          <a:bodyPr/>
-          <a:lstStyle/>
-          <a:p>
-            <a:endParaRPr lang="en-US"/>
-          </a:p>
-        </p:txBody>
       </p:sp>
       <p:sp>
         <p:nvSpPr>
@@ -8622,13 +9549,6 @@
           </a:solidFill>
           <a:ln/>
         </p:spPr>
-        <p:txBody>
-          <a:bodyPr/>
-          <a:lstStyle/>
-          <a:p>
-            <a:endParaRPr lang="en-US"/>
-          </a:p>
-        </p:txBody>
       </p:sp>
       <p:sp>
         <p:nvSpPr>
@@ -8651,7 +9571,7 @@
           <a:bodyPr wrap="square" lIns="0" tIns="0" rIns="0" bIns="0" rtlCol="0" anchor="ctr"/>
           <a:lstStyle/>
           <a:p>
-            <a:pPr marL="0" indent="0">
+            <a:pPr indent="0" marL="0">
               <a:buNone/>
             </a:pPr>
             <a:r>
@@ -8690,7 +9610,7 @@
           <a:bodyPr wrap="square" lIns="0" tIns="0" rIns="0" bIns="0" rtlCol="0" anchor="ctr"/>
           <a:lstStyle/>
           <a:p>
-            <a:pPr marL="0" indent="0">
+            <a:pPr indent="0" marL="0">
               <a:buNone/>
             </a:pPr>
             <a:r>
@@ -8727,13 +9647,6 @@
           </a:solidFill>
           <a:ln/>
         </p:spPr>
-        <p:txBody>
-          <a:bodyPr/>
-          <a:lstStyle/>
-          <a:p>
-            <a:endParaRPr lang="en-US"/>
-          </a:p>
-        </p:txBody>
       </p:sp>
       <p:sp>
         <p:nvSpPr>
@@ -8756,7 +9669,7 @@
           <a:bodyPr wrap="square" lIns="0" tIns="0" rIns="0" bIns="0" rtlCol="0" anchor="ctr"/>
           <a:lstStyle/>
           <a:p>
-            <a:pPr marL="0" indent="0" algn="ctr">
+            <a:pPr algn="ctr" indent="0" marL="0">
               <a:buNone/>
             </a:pPr>
             <a:r>
@@ -8795,7 +9708,7 @@
           <a:bodyPr wrap="square" lIns="0" tIns="0" rIns="0" bIns="0" rtlCol="0" anchor="ctr"/>
           <a:lstStyle/>
           <a:p>
-            <a:pPr marL="0" indent="0" algn="ctr">
+            <a:pPr algn="ctr" indent="0" marL="0">
               <a:buNone/>
             </a:pPr>
             <a:r>
@@ -8829,7 +9742,6 @@
         <a:solidFill>
           <a:srgbClr val="0D1117"/>
         </a:solidFill>
-        <a:effectLst/>
       </p:bgPr>
     </p:bg>
     <p:spTree>
@@ -8865,13 +9777,6 @@
           </a:solidFill>
           <a:ln/>
         </p:spPr>
-        <p:txBody>
-          <a:bodyPr/>
-          <a:lstStyle/>
-          <a:p>
-            <a:endParaRPr lang="en-US"/>
-          </a:p>
-        </p:txBody>
       </p:sp>
       <p:sp>
         <p:nvSpPr>
@@ -8894,7 +9799,7 @@
           <a:bodyPr wrap="square" lIns="0" tIns="0" rIns="0" bIns="0" rtlCol="0" anchor="ctr"/>
           <a:lstStyle/>
           <a:p>
-            <a:pPr marL="0" indent="0">
+            <a:pPr indent="0" marL="0">
               <a:buNone/>
             </a:pPr>
             <a:r>
@@ -8933,7 +9838,7 @@
           <a:bodyPr wrap="square" lIns="0" tIns="0" rIns="0" bIns="0" rtlCol="0" anchor="ctr"/>
           <a:lstStyle/>
           <a:p>
-            <a:pPr marL="0" indent="0">
+            <a:pPr indent="0" marL="0">
               <a:buNone/>
             </a:pPr>
             <a:r>
@@ -8970,13 +9875,6 @@
           </a:solidFill>
           <a:ln/>
         </p:spPr>
-        <p:txBody>
-          <a:bodyPr/>
-          <a:lstStyle/>
-          <a:p>
-            <a:endParaRPr lang="en-US"/>
-          </a:p>
-        </p:txBody>
       </p:sp>
       <p:sp>
         <p:nvSpPr>
@@ -8999,7 +9897,7 @@
           <a:bodyPr wrap="square" lIns="0" tIns="0" rIns="0" bIns="0" rtlCol="0" anchor="ctr"/>
           <a:lstStyle/>
           <a:p>
-            <a:pPr marL="0" indent="0">
+            <a:pPr indent="0" marL="0">
               <a:lnSpc>
                 <a:spcPct val="140000"/>
               </a:lnSpc>
@@ -9039,20 +9937,13 @@
           </a:solidFill>
           <a:ln/>
           <a:effectLst>
-            <a:outerShdw blurRad="101600" dist="38100" dir="8100000" algn="bl" rotWithShape="0">
+            <a:outerShdw sx="100000" sy="100000" kx="0" ky="0" algn="bl" rotWithShape="0" blurRad="101600" dist="38100" dir="8100000">
               <a:srgbClr val="000000">
                 <a:alpha val="35000"/>
               </a:srgbClr>
             </a:outerShdw>
           </a:effectLst>
         </p:spPr>
-        <p:txBody>
-          <a:bodyPr/>
-          <a:lstStyle/>
-          <a:p>
-            <a:endParaRPr lang="en-US"/>
-          </a:p>
-        </p:txBody>
       </p:sp>
       <p:sp>
         <p:nvSpPr>
@@ -9075,7 +9966,7 @@
           <a:bodyPr wrap="square" lIns="0" tIns="0" rIns="0" bIns="0" rtlCol="0" anchor="ctr"/>
           <a:lstStyle/>
           <a:p>
-            <a:pPr marL="0" indent="0">
+            <a:pPr indent="0" marL="0">
               <a:buNone/>
             </a:pPr>
             <a:r>
@@ -9114,7 +10005,7 @@
           <a:bodyPr wrap="square" lIns="0" tIns="0" rIns="0" bIns="0" rtlCol="0" anchor="ctr"/>
           <a:lstStyle/>
           <a:p>
-            <a:pPr marL="0" indent="0">
+            <a:pPr indent="0" marL="0">
               <a:buNone/>
             </a:pPr>
             <a:r>
@@ -9153,7 +10044,7 @@
           <a:bodyPr wrap="square" lIns="0" tIns="0" rIns="0" bIns="0" rtlCol="0" anchor="ctr"/>
           <a:lstStyle/>
           <a:p>
-            <a:pPr marL="0" indent="0">
+            <a:pPr indent="0" marL="0">
               <a:buNone/>
             </a:pPr>
             <a:r>
@@ -9190,20 +10081,13 @@
           </a:solidFill>
           <a:ln/>
           <a:effectLst>
-            <a:outerShdw blurRad="101600" dist="38100" dir="8100000" algn="bl" rotWithShape="0">
+            <a:outerShdw sx="100000" sy="100000" kx="0" ky="0" algn="bl" rotWithShape="0" blurRad="101600" dist="38100" dir="8100000">
               <a:srgbClr val="000000">
                 <a:alpha val="35000"/>
               </a:srgbClr>
             </a:outerShdw>
           </a:effectLst>
         </p:spPr>
-        <p:txBody>
-          <a:bodyPr/>
-          <a:lstStyle/>
-          <a:p>
-            <a:endParaRPr lang="en-US"/>
-          </a:p>
-        </p:txBody>
       </p:sp>
       <p:sp>
         <p:nvSpPr>
@@ -9226,7 +10110,7 @@
           <a:bodyPr wrap="square" lIns="0" tIns="0" rIns="0" bIns="0" rtlCol="0" anchor="ctr"/>
           <a:lstStyle/>
           <a:p>
-            <a:pPr marL="0" indent="0">
+            <a:pPr indent="0" marL="0">
               <a:buNone/>
             </a:pPr>
             <a:r>
@@ -9265,7 +10149,7 @@
           <a:bodyPr wrap="square" lIns="0" tIns="0" rIns="0" bIns="0" rtlCol="0" anchor="ctr"/>
           <a:lstStyle/>
           <a:p>
-            <a:pPr marL="0" indent="0">
+            <a:pPr indent="0" marL="0">
               <a:buNone/>
             </a:pPr>
             <a:r>
@@ -9304,7 +10188,7 @@
           <a:bodyPr wrap="square" lIns="0" tIns="0" rIns="0" bIns="0" rtlCol="0" anchor="ctr"/>
           <a:lstStyle/>
           <a:p>
-            <a:pPr marL="0" indent="0">
+            <a:pPr indent="0" marL="0">
               <a:buNone/>
             </a:pPr>
             <a:r>
@@ -9341,20 +10225,13 @@
           </a:solidFill>
           <a:ln/>
           <a:effectLst>
-            <a:outerShdw blurRad="101600" dist="38100" dir="8100000" algn="bl" rotWithShape="0">
+            <a:outerShdw sx="100000" sy="100000" kx="0" ky="0" algn="bl" rotWithShape="0" blurRad="101600" dist="38100" dir="8100000">
               <a:srgbClr val="000000">
                 <a:alpha val="35000"/>
               </a:srgbClr>
             </a:outerShdw>
           </a:effectLst>
         </p:spPr>
-        <p:txBody>
-          <a:bodyPr/>
-          <a:lstStyle/>
-          <a:p>
-            <a:endParaRPr lang="en-US"/>
-          </a:p>
-        </p:txBody>
       </p:sp>
       <p:sp>
         <p:nvSpPr>
@@ -9377,7 +10254,7 @@
           <a:bodyPr wrap="square" lIns="0" tIns="0" rIns="0" bIns="0" rtlCol="0" anchor="ctr"/>
           <a:lstStyle/>
           <a:p>
-            <a:pPr marL="0" indent="0">
+            <a:pPr indent="0" marL="0">
               <a:buNone/>
             </a:pPr>
             <a:r>
@@ -9416,7 +10293,7 @@
           <a:bodyPr wrap="square" lIns="0" tIns="0" rIns="0" bIns="0" rtlCol="0" anchor="ctr"/>
           <a:lstStyle/>
           <a:p>
-            <a:pPr marL="0" indent="0">
+            <a:pPr indent="0" marL="0">
               <a:buNone/>
             </a:pPr>
             <a:r>
@@ -9455,7 +10332,7 @@
           <a:bodyPr wrap="square" lIns="0" tIns="0" rIns="0" bIns="0" rtlCol="0" anchor="ctr"/>
           <a:lstStyle/>
           <a:p>
-            <a:pPr marL="0" indent="0">
+            <a:pPr indent="0" marL="0">
               <a:buNone/>
             </a:pPr>
             <a:r>
@@ -9774,319 +10651,4 @@
     </a:ext>
   </a:extLst>
 </a:theme>
-</file>
-
-<file path=ppt/theme/theme2.xml><?xml version="1.0" encoding="utf-8"?>
-<a:theme xmlns:a="http://schemas.openxmlformats.org/drawingml/2006/main" name="Office Theme">
-  <a:themeElements>
-    <a:clrScheme name="Office">
-      <a:dk1>
-        <a:sysClr val="windowText" lastClr="000000"/>
-      </a:dk1>
-      <a:lt1>
-        <a:sysClr val="window" lastClr="FFFFFF"/>
-      </a:lt1>
-      <a:dk2>
-        <a:srgbClr val="0E2841"/>
-      </a:dk2>
-      <a:lt2>
-        <a:srgbClr val="E8E8E8"/>
-      </a:lt2>
-      <a:accent1>
-        <a:srgbClr val="156082"/>
-      </a:accent1>
-      <a:accent2>
-        <a:srgbClr val="E97132"/>
-      </a:accent2>
-      <a:accent3>
-        <a:srgbClr val="196B24"/>
-      </a:accent3>
-      <a:accent4>
-        <a:srgbClr val="0F9ED5"/>
-      </a:accent4>
-      <a:accent5>
-        <a:srgbClr val="A02B93"/>
-      </a:accent5>
-      <a:accent6>
-        <a:srgbClr val="4EA72E"/>
-      </a:accent6>
-      <a:hlink>
-        <a:srgbClr val="467886"/>
-      </a:hlink>
-      <a:folHlink>
-        <a:srgbClr val="96607D"/>
-      </a:folHlink>
-    </a:clrScheme>
-    <a:fontScheme name="Office">
-      <a:majorFont>
-        <a:latin typeface="Aptos Display" panose="02110004020202020204"/>
-        <a:ea typeface=""/>
-        <a:cs typeface=""/>
-        <a:font script="Jpan" typeface="游ゴシック Light"/>
-        <a:font script="Hang" typeface="맑은 고딕"/>
-        <a:font script="Hans" typeface="等线 Light"/>
-        <a:font script="Hant" typeface="新細明體"/>
-        <a:font script="Arab" typeface="Times New Roman"/>
-        <a:font script="Hebr" typeface="Times New Roman"/>
-        <a:font script="Thai" typeface="Angsana New"/>
-        <a:font script="Ethi" typeface="Nyala"/>
-        <a:font script="Beng" typeface="Vrinda"/>
-        <a:font script="Gujr" typeface="Shruti"/>
-        <a:font script="Khmr" typeface="MoolBoran"/>
-        <a:font script="Knda" typeface="Tunga"/>
-        <a:font script="Guru" typeface="Raavi"/>
-        <a:font script="Cans" typeface="Euphemia"/>
-        <a:font script="Cher" typeface="Plantagenet Cherokee"/>
-        <a:font script="Yiii" typeface="Microsoft Yi Baiti"/>
-        <a:font script="Tibt" typeface="Microsoft Himalaya"/>
-        <a:font script="Thaa" typeface="MV Boli"/>
-        <a:font script="Deva" typeface="Mangal"/>
-        <a:font script="Telu" typeface="Gautami"/>
-        <a:font script="Taml" typeface="Latha"/>
-        <a:font script="Syrc" typeface="Estrangelo Edessa"/>
-        <a:font script="Orya" typeface="Kalinga"/>
-        <a:font script="Mlym" typeface="Kartika"/>
-        <a:font script="Laoo" typeface="DokChampa"/>
-        <a:font script="Sinh" typeface="Iskoola Pota"/>
-        <a:font script="Mong" typeface="Mongolian Baiti"/>
-        <a:font script="Viet" typeface="Times New Roman"/>
-        <a:font script="Uigh" typeface="Microsoft Uighur"/>
-        <a:font script="Geor" typeface="Sylfaen"/>
-        <a:font script="Armn" typeface="Arial"/>
-        <a:font script="Bugi" typeface="Leelawadee UI"/>
-        <a:font script="Bopo" typeface="Microsoft JhengHei"/>
-        <a:font script="Java" typeface="Javanese Text"/>
-        <a:font script="Lisu" typeface="Segoe UI"/>
-        <a:font script="Mymr" typeface="Myanmar Text"/>
-        <a:font script="Nkoo" typeface="Ebrima"/>
-        <a:font script="Olck" typeface="Nirmala UI"/>
-        <a:font script="Osma" typeface="Ebrima"/>
-        <a:font script="Phag" typeface="Phagspa"/>
-        <a:font script="Syrn" typeface="Estrangelo Edessa"/>
-        <a:font script="Syrj" typeface="Estrangelo Edessa"/>
-        <a:font script="Syre" typeface="Estrangelo Edessa"/>
-        <a:font script="Sora" typeface="Nirmala UI"/>
-        <a:font script="Tale" typeface="Microsoft Tai Le"/>
-        <a:font script="Talu" typeface="Microsoft New Tai Lue"/>
-        <a:font script="Tfng" typeface="Ebrima"/>
-      </a:majorFont>
-      <a:minorFont>
-        <a:latin typeface="Aptos" panose="02110004020202020204"/>
-        <a:ea typeface=""/>
-        <a:cs typeface=""/>
-        <a:font script="Jpan" typeface="游ゴシック"/>
-        <a:font script="Hang" typeface="맑은 고딕"/>
-        <a:font script="Hans" typeface="等线"/>
-        <a:font script="Hant" typeface="新細明體"/>
-        <a:font script="Arab" typeface="Arial"/>
-        <a:font script="Hebr" typeface="Arial"/>
-        <a:font script="Thai" typeface="Cordia New"/>
-        <a:font script="Ethi" typeface="Nyala"/>
-        <a:font script="Beng" typeface="Vrinda"/>
-        <a:font script="Gujr" typeface="Shruti"/>
-        <a:font script="Khmr" typeface="DaunPenh"/>
-        <a:font script="Knda" typeface="Tunga"/>
-        <a:font script="Guru" typeface="Raavi"/>
-        <a:font script="Cans" typeface="Euphemia"/>
-        <a:font script="Cher" typeface="Plantagenet Cherokee"/>
-        <a:font script="Yiii" typeface="Microsoft Yi Baiti"/>
-        <a:font script="Tibt" typeface="Microsoft Himalaya"/>
-        <a:font script="Thaa" typeface="MV Boli"/>
-        <a:font script="Deva" typeface="Mangal"/>
-        <a:font script="Telu" typeface="Gautami"/>
-        <a:font script="Taml" typeface="Latha"/>
-        <a:font script="Syrc" typeface="Estrangelo Edessa"/>
-        <a:font script="Orya" typeface="Kalinga"/>
-        <a:font script="Mlym" typeface="Kartika"/>
-        <a:font script="Laoo" typeface="DokChampa"/>
-        <a:font script="Sinh" typeface="Iskoola Pota"/>
-        <a:font script="Mong" typeface="Mongolian Baiti"/>
-        <a:font script="Viet" typeface="Arial"/>
-        <a:font script="Uigh" typeface="Microsoft Uighur"/>
-        <a:font script="Geor" typeface="Sylfaen"/>
-        <a:font script="Armn" typeface="Arial"/>
-        <a:font script="Bugi" typeface="Leelawadee UI"/>
-        <a:font script="Bopo" typeface="Microsoft JhengHei"/>
-        <a:font script="Java" typeface="Javanese Text"/>
-        <a:font script="Lisu" typeface="Segoe UI"/>
-        <a:font script="Mymr" typeface="Myanmar Text"/>
-        <a:font script="Nkoo" typeface="Ebrima"/>
-        <a:font script="Olck" typeface="Nirmala UI"/>
-        <a:font script="Osma" typeface="Ebrima"/>
-        <a:font script="Phag" typeface="Phagspa"/>
-        <a:font script="Syrn" typeface="Estrangelo Edessa"/>
-        <a:font script="Syrj" typeface="Estrangelo Edessa"/>
-        <a:font script="Syre" typeface="Estrangelo Edessa"/>
-        <a:font script="Sora" typeface="Nirmala UI"/>
-        <a:font script="Tale" typeface="Microsoft Tai Le"/>
-        <a:font script="Talu" typeface="Microsoft New Tai Lue"/>
-        <a:font script="Tfng" typeface="Ebrima"/>
-      </a:minorFont>
-    </a:fontScheme>
-    <a:fmtScheme name="Office">
-      <a:fillStyleLst>
-        <a:solidFill>
-          <a:schemeClr val="phClr"/>
-        </a:solidFill>
-        <a:gradFill rotWithShape="1">
-          <a:gsLst>
-            <a:gs pos="0">
-              <a:schemeClr val="phClr">
-                <a:lumMod val="110000"/>
-                <a:satMod val="105000"/>
-                <a:tint val="67000"/>
-              </a:schemeClr>
-            </a:gs>
-            <a:gs pos="50000">
-              <a:schemeClr val="phClr">
-                <a:lumMod val="105000"/>
-                <a:satMod val="103000"/>
-                <a:tint val="73000"/>
-              </a:schemeClr>
-            </a:gs>
-            <a:gs pos="100000">
-              <a:schemeClr val="phClr">
-                <a:lumMod val="105000"/>
-                <a:satMod val="109000"/>
-                <a:tint val="81000"/>
-              </a:schemeClr>
-            </a:gs>
-          </a:gsLst>
-          <a:lin ang="5400000" scaled="0"/>
-        </a:gradFill>
-        <a:gradFill rotWithShape="1">
-          <a:gsLst>
-            <a:gs pos="0">
-              <a:schemeClr val="phClr">
-                <a:satMod val="103000"/>
-                <a:lumMod val="102000"/>
-                <a:tint val="94000"/>
-              </a:schemeClr>
-            </a:gs>
-            <a:gs pos="50000">
-              <a:schemeClr val="phClr">
-                <a:satMod val="110000"/>
-                <a:lumMod val="100000"/>
-                <a:shade val="100000"/>
-              </a:schemeClr>
-            </a:gs>
-            <a:gs pos="100000">
-              <a:schemeClr val="phClr">
-                <a:lumMod val="99000"/>
-                <a:satMod val="120000"/>
-                <a:shade val="78000"/>
-              </a:schemeClr>
-            </a:gs>
-          </a:gsLst>
-          <a:lin ang="5400000" scaled="0"/>
-        </a:gradFill>
-      </a:fillStyleLst>
-      <a:lnStyleLst>
-        <a:ln w="12700" cap="flat" cmpd="sng" algn="ctr">
-          <a:solidFill>
-            <a:schemeClr val="phClr"/>
-          </a:solidFill>
-          <a:prstDash val="solid"/>
-          <a:miter lim="800000"/>
-        </a:ln>
-        <a:ln w="19050" cap="flat" cmpd="sng" algn="ctr">
-          <a:solidFill>
-            <a:schemeClr val="phClr"/>
-          </a:solidFill>
-          <a:prstDash val="solid"/>
-          <a:miter lim="800000"/>
-        </a:ln>
-        <a:ln w="25400" cap="flat" cmpd="sng" algn="ctr">
-          <a:solidFill>
-            <a:schemeClr val="phClr"/>
-          </a:solidFill>
-          <a:prstDash val="solid"/>
-          <a:miter lim="800000"/>
-        </a:ln>
-      </a:lnStyleLst>
-      <a:effectStyleLst>
-        <a:effectStyle>
-          <a:effectLst/>
-        </a:effectStyle>
-        <a:effectStyle>
-          <a:effectLst/>
-        </a:effectStyle>
-        <a:effectStyle>
-          <a:effectLst>
-            <a:outerShdw blurRad="57150" dist="19050" dir="5400000" algn="ctr" rotWithShape="0">
-              <a:srgbClr val="000000">
-                <a:alpha val="63000"/>
-              </a:srgbClr>
-            </a:outerShdw>
-          </a:effectLst>
-        </a:effectStyle>
-      </a:effectStyleLst>
-      <a:bgFillStyleLst>
-        <a:solidFill>
-          <a:schemeClr val="phClr"/>
-        </a:solidFill>
-        <a:solidFill>
-          <a:schemeClr val="phClr">
-            <a:tint val="95000"/>
-            <a:satMod val="170000"/>
-          </a:schemeClr>
-        </a:solidFill>
-        <a:gradFill rotWithShape="1">
-          <a:gsLst>
-            <a:gs pos="0">
-              <a:schemeClr val="phClr">
-                <a:tint val="93000"/>
-                <a:satMod val="150000"/>
-                <a:shade val="98000"/>
-                <a:lumMod val="102000"/>
-              </a:schemeClr>
-            </a:gs>
-            <a:gs pos="50000">
-              <a:schemeClr val="phClr">
-                <a:tint val="98000"/>
-                <a:satMod val="130000"/>
-                <a:shade val="90000"/>
-                <a:lumMod val="103000"/>
-              </a:schemeClr>
-            </a:gs>
-            <a:gs pos="100000">
-              <a:schemeClr val="phClr">
-                <a:shade val="63000"/>
-                <a:satMod val="120000"/>
-              </a:schemeClr>
-            </a:gs>
-          </a:gsLst>
-          <a:lin ang="5400000" scaled="0"/>
-        </a:gradFill>
-      </a:bgFillStyleLst>
-    </a:fmtScheme>
-  </a:themeElements>
-  <a:objectDefaults>
-    <a:lnDef>
-      <a:spPr/>
-      <a:bodyPr/>
-      <a:lstStyle/>
-      <a:style>
-        <a:lnRef idx="2">
-          <a:schemeClr val="accent1"/>
-        </a:lnRef>
-        <a:fillRef idx="0">
-          <a:schemeClr val="accent1"/>
-        </a:fillRef>
-        <a:effectRef idx="1">
-          <a:schemeClr val="accent1"/>
-        </a:effectRef>
-        <a:fontRef idx="minor">
-          <a:schemeClr val="tx1"/>
-        </a:fontRef>
-      </a:style>
-    </a:lnDef>
-  </a:objectDefaults>
-  <a:extraClrSchemeLst/>
-  <a:extLst>
-    <a:ext uri="{05A4C25C-085E-4340-85A3-A5531E510DB2}">
-      <thm15:themeFamily xmlns:thm15="http://schemas.microsoft.com/office/thememl/2012/main" name="Office Theme" id="{2E142A2C-CD16-42D6-873A-C26D2A0506FA}" vid="{1BDDFF52-6CD6-40A5-AB3C-68EB2F1E4D0A}"/>
-    </a:ext>
-  </a:extLst>
-</a:theme>
 </file>